--- a/public/videos/repositories/togo-kanri-tool/togo-kanri-tool-tech-preview.pptx
+++ b/public/videos/repositories/togo-kanri-tool/togo-kanri-tool-tech-preview.pptx
@@ -134,7 +134,7 @@
           <p:cNvPr id="2" name="タイトル 1">
             <a:extLst>
               <a:ext uri="{FF2B5EF4-FFF2-40B4-BE49-F238E27FC236}">
-                <a16:creationId xmlns:a16="http://schemas.microsoft.com/office/drawing/2014/main" id="{144DD5FD-F9D0-0F17-68A8-B770440AF956}"/>
+                <a16:creationId xmlns:a16="http://schemas.microsoft.com/office/drawing/2014/main" id="{9AFE3E65-40C9-7BB2-3180-08BD0793F4EC}"/>
               </a:ext>
             </a:extLst>
           </p:cNvPr>
@@ -171,7 +171,7 @@
           <p:cNvPr id="3" name="字幕 2">
             <a:extLst>
               <a:ext uri="{FF2B5EF4-FFF2-40B4-BE49-F238E27FC236}">
-                <a16:creationId xmlns:a16="http://schemas.microsoft.com/office/drawing/2014/main" id="{988C4CA5-1574-9F3B-E3DD-DAB95533D491}"/>
+                <a16:creationId xmlns:a16="http://schemas.microsoft.com/office/drawing/2014/main" id="{E103D128-0096-EAA3-D9FA-FBABAFA4B431}"/>
               </a:ext>
             </a:extLst>
           </p:cNvPr>
@@ -241,7 +241,7 @@
           <p:cNvPr id="4" name="日付プレースホルダー 3">
             <a:extLst>
               <a:ext uri="{FF2B5EF4-FFF2-40B4-BE49-F238E27FC236}">
-                <a16:creationId xmlns:a16="http://schemas.microsoft.com/office/drawing/2014/main" id="{A6753E41-16B6-9DD4-A449-D85931E07686}"/>
+                <a16:creationId xmlns:a16="http://schemas.microsoft.com/office/drawing/2014/main" id="{0C450B4C-D489-62BB-42A5-E51E70CFC3CE}"/>
               </a:ext>
             </a:extLst>
           </p:cNvPr>
@@ -257,7 +257,7 @@
           <a:bodyPr/>
           <a:lstStyle/>
           <a:p>
-            <a:fld id="{38CF951B-9A95-4A04-A553-A9E1FF600C98}" type="datetimeFigureOut">
+            <a:fld id="{548A954F-6878-4CBB-85A4-08585DEC05C9}" type="datetimeFigureOut">
               <a:rPr kumimoji="1" lang="ja-JP" altLang="en-US" smtClean="0"/>
               <a:t>2026/7/30</a:t>
             </a:fld>
@@ -270,7 +270,7 @@
           <p:cNvPr id="5" name="フッター プレースホルダー 4">
             <a:extLst>
               <a:ext uri="{FF2B5EF4-FFF2-40B4-BE49-F238E27FC236}">
-                <a16:creationId xmlns:a16="http://schemas.microsoft.com/office/drawing/2014/main" id="{162FB68E-B117-C22B-B12D-794B0F76538D}"/>
+                <a16:creationId xmlns:a16="http://schemas.microsoft.com/office/drawing/2014/main" id="{906EEDDB-598C-D747-0130-D8890D855EC3}"/>
               </a:ext>
             </a:extLst>
           </p:cNvPr>
@@ -295,7 +295,7 @@
           <p:cNvPr id="6" name="スライド番号プレースホルダー 5">
             <a:extLst>
               <a:ext uri="{FF2B5EF4-FFF2-40B4-BE49-F238E27FC236}">
-                <a16:creationId xmlns:a16="http://schemas.microsoft.com/office/drawing/2014/main" id="{BD319691-3A8F-B05E-8C00-456E0E13ADDB}"/>
+                <a16:creationId xmlns:a16="http://schemas.microsoft.com/office/drawing/2014/main" id="{42600586-F2B9-D6CC-FE2A-8E1549A54E0B}"/>
               </a:ext>
             </a:extLst>
           </p:cNvPr>
@@ -311,7 +311,7 @@
           <a:bodyPr/>
           <a:lstStyle/>
           <a:p>
-            <a:fld id="{8B3C9EF3-6771-44E9-A7A2-47E6107873BF}" type="slidenum">
+            <a:fld id="{6B2941EB-36E4-47D0-8598-D5AE01190ABB}" type="slidenum">
               <a:rPr kumimoji="1" lang="ja-JP" altLang="en-US" smtClean="0"/>
               <a:t>‹#›</a:t>
             </a:fld>
@@ -322,7 +322,7 @@
     </p:spTree>
     <p:extLst>
       <p:ext uri="{BB962C8B-B14F-4D97-AF65-F5344CB8AC3E}">
-        <p14:creationId xmlns:p14="http://schemas.microsoft.com/office/powerpoint/2010/main" val="3612846971"/>
+        <p14:creationId xmlns:p14="http://schemas.microsoft.com/office/powerpoint/2010/main" val="2830542795"/>
       </p:ext>
     </p:extLst>
   </p:cSld>
@@ -354,7 +354,7 @@
           <p:cNvPr id="2" name="タイトル 1">
             <a:extLst>
               <a:ext uri="{FF2B5EF4-FFF2-40B4-BE49-F238E27FC236}">
-                <a16:creationId xmlns:a16="http://schemas.microsoft.com/office/drawing/2014/main" id="{6D4EAE5D-F0DF-FBB9-3F8F-37DBF05091C6}"/>
+                <a16:creationId xmlns:a16="http://schemas.microsoft.com/office/drawing/2014/main" id="{873F183B-51ED-787B-5953-9AEE5294ED3E}"/>
               </a:ext>
             </a:extLst>
           </p:cNvPr>
@@ -382,7 +382,7 @@
           <p:cNvPr id="3" name="縦書きテキスト プレースホルダー 2">
             <a:extLst>
               <a:ext uri="{FF2B5EF4-FFF2-40B4-BE49-F238E27FC236}">
-                <a16:creationId xmlns:a16="http://schemas.microsoft.com/office/drawing/2014/main" id="{919715D9-DA66-89A8-DDF6-A9E19A2C4761}"/>
+                <a16:creationId xmlns:a16="http://schemas.microsoft.com/office/drawing/2014/main" id="{79955776-40F8-F2CC-0A22-FA665C9DF948}"/>
               </a:ext>
             </a:extLst>
           </p:cNvPr>
@@ -471,7 +471,7 @@
           <p:cNvPr id="4" name="日付プレースホルダー 3">
             <a:extLst>
               <a:ext uri="{FF2B5EF4-FFF2-40B4-BE49-F238E27FC236}">
-                <a16:creationId xmlns:a16="http://schemas.microsoft.com/office/drawing/2014/main" id="{8494A251-0E94-4B24-A09C-F438E2D31599}"/>
+                <a16:creationId xmlns:a16="http://schemas.microsoft.com/office/drawing/2014/main" id="{060BAEA9-F7F2-A728-126F-B8D4D650E10E}"/>
               </a:ext>
             </a:extLst>
           </p:cNvPr>
@@ -487,7 +487,7 @@
           <a:bodyPr/>
           <a:lstStyle/>
           <a:p>
-            <a:fld id="{38CF951B-9A95-4A04-A553-A9E1FF600C98}" type="datetimeFigureOut">
+            <a:fld id="{548A954F-6878-4CBB-85A4-08585DEC05C9}" type="datetimeFigureOut">
               <a:rPr kumimoji="1" lang="ja-JP" altLang="en-US" smtClean="0"/>
               <a:t>2026/7/30</a:t>
             </a:fld>
@@ -500,7 +500,7 @@
           <p:cNvPr id="5" name="フッター プレースホルダー 4">
             <a:extLst>
               <a:ext uri="{FF2B5EF4-FFF2-40B4-BE49-F238E27FC236}">
-                <a16:creationId xmlns:a16="http://schemas.microsoft.com/office/drawing/2014/main" id="{E9B6970D-7B8B-D676-D7A0-D1190FB6B810}"/>
+                <a16:creationId xmlns:a16="http://schemas.microsoft.com/office/drawing/2014/main" id="{6FB6A6C4-74ED-558E-9477-822B29E5E77B}"/>
               </a:ext>
             </a:extLst>
           </p:cNvPr>
@@ -525,7 +525,7 @@
           <p:cNvPr id="6" name="スライド番号プレースホルダー 5">
             <a:extLst>
               <a:ext uri="{FF2B5EF4-FFF2-40B4-BE49-F238E27FC236}">
-                <a16:creationId xmlns:a16="http://schemas.microsoft.com/office/drawing/2014/main" id="{21745312-0F3B-C1E7-0AED-47C207706A92}"/>
+                <a16:creationId xmlns:a16="http://schemas.microsoft.com/office/drawing/2014/main" id="{7268CD16-B420-703A-CA92-56CD357E0B83}"/>
               </a:ext>
             </a:extLst>
           </p:cNvPr>
@@ -541,7 +541,7 @@
           <a:bodyPr/>
           <a:lstStyle/>
           <a:p>
-            <a:fld id="{8B3C9EF3-6771-44E9-A7A2-47E6107873BF}" type="slidenum">
+            <a:fld id="{6B2941EB-36E4-47D0-8598-D5AE01190ABB}" type="slidenum">
               <a:rPr kumimoji="1" lang="ja-JP" altLang="en-US" smtClean="0"/>
               <a:t>‹#›</a:t>
             </a:fld>
@@ -552,7 +552,7 @@
     </p:spTree>
     <p:extLst>
       <p:ext uri="{BB962C8B-B14F-4D97-AF65-F5344CB8AC3E}">
-        <p14:creationId xmlns:p14="http://schemas.microsoft.com/office/powerpoint/2010/main" val="4261437847"/>
+        <p14:creationId xmlns:p14="http://schemas.microsoft.com/office/powerpoint/2010/main" val="2512260682"/>
       </p:ext>
     </p:extLst>
   </p:cSld>
@@ -584,7 +584,7 @@
           <p:cNvPr id="2" name="縦書きタイトル 1">
             <a:extLst>
               <a:ext uri="{FF2B5EF4-FFF2-40B4-BE49-F238E27FC236}">
-                <a16:creationId xmlns:a16="http://schemas.microsoft.com/office/drawing/2014/main" id="{7D710124-45F3-6A27-5686-07FB8893AB33}"/>
+                <a16:creationId xmlns:a16="http://schemas.microsoft.com/office/drawing/2014/main" id="{53816280-9217-02A5-EBA8-A987163463F8}"/>
               </a:ext>
             </a:extLst>
           </p:cNvPr>
@@ -617,7 +617,7 @@
           <p:cNvPr id="3" name="縦書きテキスト プレースホルダー 2">
             <a:extLst>
               <a:ext uri="{FF2B5EF4-FFF2-40B4-BE49-F238E27FC236}">
-                <a16:creationId xmlns:a16="http://schemas.microsoft.com/office/drawing/2014/main" id="{CA8BFE43-F170-4677-4418-5A899F46DE03}"/>
+                <a16:creationId xmlns:a16="http://schemas.microsoft.com/office/drawing/2014/main" id="{5A2385CF-84FC-4ABE-0C2A-F55AB6649C1E}"/>
               </a:ext>
             </a:extLst>
           </p:cNvPr>
@@ -711,7 +711,7 @@
           <p:cNvPr id="4" name="日付プレースホルダー 3">
             <a:extLst>
               <a:ext uri="{FF2B5EF4-FFF2-40B4-BE49-F238E27FC236}">
-                <a16:creationId xmlns:a16="http://schemas.microsoft.com/office/drawing/2014/main" id="{B8799153-5A7F-767C-6A00-8016B4DBC5BC}"/>
+                <a16:creationId xmlns:a16="http://schemas.microsoft.com/office/drawing/2014/main" id="{5BB09E59-C170-BCEF-F855-D53328EF3801}"/>
               </a:ext>
             </a:extLst>
           </p:cNvPr>
@@ -727,7 +727,7 @@
           <a:bodyPr/>
           <a:lstStyle/>
           <a:p>
-            <a:fld id="{38CF951B-9A95-4A04-A553-A9E1FF600C98}" type="datetimeFigureOut">
+            <a:fld id="{548A954F-6878-4CBB-85A4-08585DEC05C9}" type="datetimeFigureOut">
               <a:rPr kumimoji="1" lang="ja-JP" altLang="en-US" smtClean="0"/>
               <a:t>2026/7/30</a:t>
             </a:fld>
@@ -740,7 +740,7 @@
           <p:cNvPr id="5" name="フッター プレースホルダー 4">
             <a:extLst>
               <a:ext uri="{FF2B5EF4-FFF2-40B4-BE49-F238E27FC236}">
-                <a16:creationId xmlns:a16="http://schemas.microsoft.com/office/drawing/2014/main" id="{3885CBDF-0EBC-4646-9DB7-6F5A568A12BA}"/>
+                <a16:creationId xmlns:a16="http://schemas.microsoft.com/office/drawing/2014/main" id="{E3927A0D-6FE2-9629-5698-99B387EEEA93}"/>
               </a:ext>
             </a:extLst>
           </p:cNvPr>
@@ -765,7 +765,7 @@
           <p:cNvPr id="6" name="スライド番号プレースホルダー 5">
             <a:extLst>
               <a:ext uri="{FF2B5EF4-FFF2-40B4-BE49-F238E27FC236}">
-                <a16:creationId xmlns:a16="http://schemas.microsoft.com/office/drawing/2014/main" id="{5FE5C89D-3AEA-184E-8EC0-087D600D7258}"/>
+                <a16:creationId xmlns:a16="http://schemas.microsoft.com/office/drawing/2014/main" id="{DC94D8C9-5762-B4F3-AFC9-D0A3BB9A0B6A}"/>
               </a:ext>
             </a:extLst>
           </p:cNvPr>
@@ -781,7 +781,7 @@
           <a:bodyPr/>
           <a:lstStyle/>
           <a:p>
-            <a:fld id="{8B3C9EF3-6771-44E9-A7A2-47E6107873BF}" type="slidenum">
+            <a:fld id="{6B2941EB-36E4-47D0-8598-D5AE01190ABB}" type="slidenum">
               <a:rPr kumimoji="1" lang="ja-JP" altLang="en-US" smtClean="0"/>
               <a:t>‹#›</a:t>
             </a:fld>
@@ -792,7 +792,7 @@
     </p:spTree>
     <p:extLst>
       <p:ext uri="{BB962C8B-B14F-4D97-AF65-F5344CB8AC3E}">
-        <p14:creationId xmlns:p14="http://schemas.microsoft.com/office/powerpoint/2010/main" val="311384889"/>
+        <p14:creationId xmlns:p14="http://schemas.microsoft.com/office/powerpoint/2010/main" val="3014721772"/>
       </p:ext>
     </p:extLst>
   </p:cSld>
@@ -824,7 +824,7 @@
           <p:cNvPr id="2" name="タイトル 1">
             <a:extLst>
               <a:ext uri="{FF2B5EF4-FFF2-40B4-BE49-F238E27FC236}">
-                <a16:creationId xmlns:a16="http://schemas.microsoft.com/office/drawing/2014/main" id="{454AB460-0D77-74BE-E419-9EA962BF533F}"/>
+                <a16:creationId xmlns:a16="http://schemas.microsoft.com/office/drawing/2014/main" id="{34D7C9B3-C66C-B874-7520-E093EF1C9A51}"/>
               </a:ext>
             </a:extLst>
           </p:cNvPr>
@@ -852,7 +852,7 @@
           <p:cNvPr id="3" name="コンテンツ プレースホルダー 2">
             <a:extLst>
               <a:ext uri="{FF2B5EF4-FFF2-40B4-BE49-F238E27FC236}">
-                <a16:creationId xmlns:a16="http://schemas.microsoft.com/office/drawing/2014/main" id="{790B8D9A-B05C-71DD-92DF-16FE3B42C923}"/>
+                <a16:creationId xmlns:a16="http://schemas.microsoft.com/office/drawing/2014/main" id="{7328FB8A-C258-3E93-E360-281D5B8E0CA3}"/>
               </a:ext>
             </a:extLst>
           </p:cNvPr>
@@ -941,7 +941,7 @@
           <p:cNvPr id="4" name="日付プレースホルダー 3">
             <a:extLst>
               <a:ext uri="{FF2B5EF4-FFF2-40B4-BE49-F238E27FC236}">
-                <a16:creationId xmlns:a16="http://schemas.microsoft.com/office/drawing/2014/main" id="{E9A4ED1A-3F6D-536E-CE15-75F27EB054D0}"/>
+                <a16:creationId xmlns:a16="http://schemas.microsoft.com/office/drawing/2014/main" id="{72366E61-CC05-420C-95CC-7AD784424F6E}"/>
               </a:ext>
             </a:extLst>
           </p:cNvPr>
@@ -957,7 +957,7 @@
           <a:bodyPr/>
           <a:lstStyle/>
           <a:p>
-            <a:fld id="{38CF951B-9A95-4A04-A553-A9E1FF600C98}" type="datetimeFigureOut">
+            <a:fld id="{548A954F-6878-4CBB-85A4-08585DEC05C9}" type="datetimeFigureOut">
               <a:rPr kumimoji="1" lang="ja-JP" altLang="en-US" smtClean="0"/>
               <a:t>2026/7/30</a:t>
             </a:fld>
@@ -970,7 +970,7 @@
           <p:cNvPr id="5" name="フッター プレースホルダー 4">
             <a:extLst>
               <a:ext uri="{FF2B5EF4-FFF2-40B4-BE49-F238E27FC236}">
-                <a16:creationId xmlns:a16="http://schemas.microsoft.com/office/drawing/2014/main" id="{B3932334-80B3-B151-206F-244A4C86735A}"/>
+                <a16:creationId xmlns:a16="http://schemas.microsoft.com/office/drawing/2014/main" id="{0CE58966-3D1E-8DBE-79B7-3E65B872128D}"/>
               </a:ext>
             </a:extLst>
           </p:cNvPr>
@@ -995,7 +995,7 @@
           <p:cNvPr id="6" name="スライド番号プレースホルダー 5">
             <a:extLst>
               <a:ext uri="{FF2B5EF4-FFF2-40B4-BE49-F238E27FC236}">
-                <a16:creationId xmlns:a16="http://schemas.microsoft.com/office/drawing/2014/main" id="{C1C34295-E19F-A8DA-04F1-0384A0E3C9FE}"/>
+                <a16:creationId xmlns:a16="http://schemas.microsoft.com/office/drawing/2014/main" id="{616AABA5-EE36-7490-C4C9-2A830DA8BF63}"/>
               </a:ext>
             </a:extLst>
           </p:cNvPr>
@@ -1011,7 +1011,7 @@
           <a:bodyPr/>
           <a:lstStyle/>
           <a:p>
-            <a:fld id="{8B3C9EF3-6771-44E9-A7A2-47E6107873BF}" type="slidenum">
+            <a:fld id="{6B2941EB-36E4-47D0-8598-D5AE01190ABB}" type="slidenum">
               <a:rPr kumimoji="1" lang="ja-JP" altLang="en-US" smtClean="0"/>
               <a:t>‹#›</a:t>
             </a:fld>
@@ -1022,7 +1022,7 @@
     </p:spTree>
     <p:extLst>
       <p:ext uri="{BB962C8B-B14F-4D97-AF65-F5344CB8AC3E}">
-        <p14:creationId xmlns:p14="http://schemas.microsoft.com/office/powerpoint/2010/main" val="3025664425"/>
+        <p14:creationId xmlns:p14="http://schemas.microsoft.com/office/powerpoint/2010/main" val="2196251433"/>
       </p:ext>
     </p:extLst>
   </p:cSld>
@@ -1054,7 +1054,7 @@
           <p:cNvPr id="2" name="タイトル 1">
             <a:extLst>
               <a:ext uri="{FF2B5EF4-FFF2-40B4-BE49-F238E27FC236}">
-                <a16:creationId xmlns:a16="http://schemas.microsoft.com/office/drawing/2014/main" id="{4A97739A-A5F8-9390-EA57-15DEA942498B}"/>
+                <a16:creationId xmlns:a16="http://schemas.microsoft.com/office/drawing/2014/main" id="{45BD7E0F-61C5-0B79-BB8E-8714BEB0252B}"/>
               </a:ext>
             </a:extLst>
           </p:cNvPr>
@@ -1091,7 +1091,7 @@
           <p:cNvPr id="3" name="テキスト プレースホルダー 2">
             <a:extLst>
               <a:ext uri="{FF2B5EF4-FFF2-40B4-BE49-F238E27FC236}">
-                <a16:creationId xmlns:a16="http://schemas.microsoft.com/office/drawing/2014/main" id="{A8134F45-11DD-156B-DF4C-208515A5B4F8}"/>
+                <a16:creationId xmlns:a16="http://schemas.microsoft.com/office/drawing/2014/main" id="{0055680A-8AC1-7AFE-C4BC-DE83AA5DEB5E}"/>
               </a:ext>
             </a:extLst>
           </p:cNvPr>
@@ -1216,7 +1216,7 @@
           <p:cNvPr id="4" name="日付プレースホルダー 3">
             <a:extLst>
               <a:ext uri="{FF2B5EF4-FFF2-40B4-BE49-F238E27FC236}">
-                <a16:creationId xmlns:a16="http://schemas.microsoft.com/office/drawing/2014/main" id="{39189E1B-3ACE-A9B0-83ED-9E7F658FBF98}"/>
+                <a16:creationId xmlns:a16="http://schemas.microsoft.com/office/drawing/2014/main" id="{29AEDFA0-7958-7655-D10B-B8437EB6FE43}"/>
               </a:ext>
             </a:extLst>
           </p:cNvPr>
@@ -1232,7 +1232,7 @@
           <a:bodyPr/>
           <a:lstStyle/>
           <a:p>
-            <a:fld id="{38CF951B-9A95-4A04-A553-A9E1FF600C98}" type="datetimeFigureOut">
+            <a:fld id="{548A954F-6878-4CBB-85A4-08585DEC05C9}" type="datetimeFigureOut">
               <a:rPr kumimoji="1" lang="ja-JP" altLang="en-US" smtClean="0"/>
               <a:t>2026/7/30</a:t>
             </a:fld>
@@ -1245,7 +1245,7 @@
           <p:cNvPr id="5" name="フッター プレースホルダー 4">
             <a:extLst>
               <a:ext uri="{FF2B5EF4-FFF2-40B4-BE49-F238E27FC236}">
-                <a16:creationId xmlns:a16="http://schemas.microsoft.com/office/drawing/2014/main" id="{0B64EDCB-F279-69FA-5875-081E478431CB}"/>
+                <a16:creationId xmlns:a16="http://schemas.microsoft.com/office/drawing/2014/main" id="{D3A54FC7-53C2-96C8-8A0D-04C8D6583C49}"/>
               </a:ext>
             </a:extLst>
           </p:cNvPr>
@@ -1270,7 +1270,7 @@
           <p:cNvPr id="6" name="スライド番号プレースホルダー 5">
             <a:extLst>
               <a:ext uri="{FF2B5EF4-FFF2-40B4-BE49-F238E27FC236}">
-                <a16:creationId xmlns:a16="http://schemas.microsoft.com/office/drawing/2014/main" id="{E428143C-CDFF-E420-4AB6-57B89EA3A193}"/>
+                <a16:creationId xmlns:a16="http://schemas.microsoft.com/office/drawing/2014/main" id="{0728C0F3-365B-9863-143C-42AC40A34AD9}"/>
               </a:ext>
             </a:extLst>
           </p:cNvPr>
@@ -1286,7 +1286,7 @@
           <a:bodyPr/>
           <a:lstStyle/>
           <a:p>
-            <a:fld id="{8B3C9EF3-6771-44E9-A7A2-47E6107873BF}" type="slidenum">
+            <a:fld id="{6B2941EB-36E4-47D0-8598-D5AE01190ABB}" type="slidenum">
               <a:rPr kumimoji="1" lang="ja-JP" altLang="en-US" smtClean="0"/>
               <a:t>‹#›</a:t>
             </a:fld>
@@ -1297,7 +1297,7 @@
     </p:spTree>
     <p:extLst>
       <p:ext uri="{BB962C8B-B14F-4D97-AF65-F5344CB8AC3E}">
-        <p14:creationId xmlns:p14="http://schemas.microsoft.com/office/powerpoint/2010/main" val="2908067335"/>
+        <p14:creationId xmlns:p14="http://schemas.microsoft.com/office/powerpoint/2010/main" val="3866340255"/>
       </p:ext>
     </p:extLst>
   </p:cSld>
@@ -1329,7 +1329,7 @@
           <p:cNvPr id="2" name="タイトル 1">
             <a:extLst>
               <a:ext uri="{FF2B5EF4-FFF2-40B4-BE49-F238E27FC236}">
-                <a16:creationId xmlns:a16="http://schemas.microsoft.com/office/drawing/2014/main" id="{3D61551B-00AC-A2B8-FD94-86A4219D245F}"/>
+                <a16:creationId xmlns:a16="http://schemas.microsoft.com/office/drawing/2014/main" id="{5362B1BE-850B-6CD7-0CE8-1176CDC6E1FE}"/>
               </a:ext>
             </a:extLst>
           </p:cNvPr>
@@ -1357,7 +1357,7 @@
           <p:cNvPr id="3" name="コンテンツ プレースホルダー 2">
             <a:extLst>
               <a:ext uri="{FF2B5EF4-FFF2-40B4-BE49-F238E27FC236}">
-                <a16:creationId xmlns:a16="http://schemas.microsoft.com/office/drawing/2014/main" id="{696F5679-9A39-391B-4320-7DD96D32E835}"/>
+                <a16:creationId xmlns:a16="http://schemas.microsoft.com/office/drawing/2014/main" id="{A6C55DD7-B014-DF02-061B-4521030A9824}"/>
               </a:ext>
             </a:extLst>
           </p:cNvPr>
@@ -1451,7 +1451,7 @@
           <p:cNvPr id="4" name="コンテンツ プレースホルダー 3">
             <a:extLst>
               <a:ext uri="{FF2B5EF4-FFF2-40B4-BE49-F238E27FC236}">
-                <a16:creationId xmlns:a16="http://schemas.microsoft.com/office/drawing/2014/main" id="{C1F30EAB-395F-FA43-9D94-D58D9C75983C}"/>
+                <a16:creationId xmlns:a16="http://schemas.microsoft.com/office/drawing/2014/main" id="{CB3D71D2-ED60-594E-FE90-8D988DAE980F}"/>
               </a:ext>
             </a:extLst>
           </p:cNvPr>
@@ -1545,7 +1545,7 @@
           <p:cNvPr id="5" name="日付プレースホルダー 4">
             <a:extLst>
               <a:ext uri="{FF2B5EF4-FFF2-40B4-BE49-F238E27FC236}">
-                <a16:creationId xmlns:a16="http://schemas.microsoft.com/office/drawing/2014/main" id="{154CFB2D-C11F-610F-86F8-2CF190431735}"/>
+                <a16:creationId xmlns:a16="http://schemas.microsoft.com/office/drawing/2014/main" id="{FEC10EB2-0BCE-2A1F-D2FF-DBC201BD118D}"/>
               </a:ext>
             </a:extLst>
           </p:cNvPr>
@@ -1561,7 +1561,7 @@
           <a:bodyPr/>
           <a:lstStyle/>
           <a:p>
-            <a:fld id="{38CF951B-9A95-4A04-A553-A9E1FF600C98}" type="datetimeFigureOut">
+            <a:fld id="{548A954F-6878-4CBB-85A4-08585DEC05C9}" type="datetimeFigureOut">
               <a:rPr kumimoji="1" lang="ja-JP" altLang="en-US" smtClean="0"/>
               <a:t>2026/7/30</a:t>
             </a:fld>
@@ -1574,7 +1574,7 @@
           <p:cNvPr id="6" name="フッター プレースホルダー 5">
             <a:extLst>
               <a:ext uri="{FF2B5EF4-FFF2-40B4-BE49-F238E27FC236}">
-                <a16:creationId xmlns:a16="http://schemas.microsoft.com/office/drawing/2014/main" id="{E3AD9469-6B5C-744C-57E0-D58102688462}"/>
+                <a16:creationId xmlns:a16="http://schemas.microsoft.com/office/drawing/2014/main" id="{D0F0644A-0C53-FBE0-0CE5-1B68C9348064}"/>
               </a:ext>
             </a:extLst>
           </p:cNvPr>
@@ -1599,7 +1599,7 @@
           <p:cNvPr id="7" name="スライド番号プレースホルダー 6">
             <a:extLst>
               <a:ext uri="{FF2B5EF4-FFF2-40B4-BE49-F238E27FC236}">
-                <a16:creationId xmlns:a16="http://schemas.microsoft.com/office/drawing/2014/main" id="{BA55F6E3-72C5-6659-2C3E-709B7EF881FE}"/>
+                <a16:creationId xmlns:a16="http://schemas.microsoft.com/office/drawing/2014/main" id="{DFEF56E8-7221-BE87-D783-22EB051D8389}"/>
               </a:ext>
             </a:extLst>
           </p:cNvPr>
@@ -1615,7 +1615,7 @@
           <a:bodyPr/>
           <a:lstStyle/>
           <a:p>
-            <a:fld id="{8B3C9EF3-6771-44E9-A7A2-47E6107873BF}" type="slidenum">
+            <a:fld id="{6B2941EB-36E4-47D0-8598-D5AE01190ABB}" type="slidenum">
               <a:rPr kumimoji="1" lang="ja-JP" altLang="en-US" smtClean="0"/>
               <a:t>‹#›</a:t>
             </a:fld>
@@ -1626,7 +1626,7 @@
     </p:spTree>
     <p:extLst>
       <p:ext uri="{BB962C8B-B14F-4D97-AF65-F5344CB8AC3E}">
-        <p14:creationId xmlns:p14="http://schemas.microsoft.com/office/powerpoint/2010/main" val="2900929983"/>
+        <p14:creationId xmlns:p14="http://schemas.microsoft.com/office/powerpoint/2010/main" val="822162337"/>
       </p:ext>
     </p:extLst>
   </p:cSld>
@@ -1658,7 +1658,7 @@
           <p:cNvPr id="2" name="タイトル 1">
             <a:extLst>
               <a:ext uri="{FF2B5EF4-FFF2-40B4-BE49-F238E27FC236}">
-                <a16:creationId xmlns:a16="http://schemas.microsoft.com/office/drawing/2014/main" id="{79457E70-A791-1AD4-2359-F38E48F6DA51}"/>
+                <a16:creationId xmlns:a16="http://schemas.microsoft.com/office/drawing/2014/main" id="{D3C0E66F-8E83-EADD-7231-19743B9BE720}"/>
               </a:ext>
             </a:extLst>
           </p:cNvPr>
@@ -1691,7 +1691,7 @@
           <p:cNvPr id="3" name="テキスト プレースホルダー 2">
             <a:extLst>
               <a:ext uri="{FF2B5EF4-FFF2-40B4-BE49-F238E27FC236}">
-                <a16:creationId xmlns:a16="http://schemas.microsoft.com/office/drawing/2014/main" id="{1F3AF274-90C5-B3DB-0630-3F88FAD64F5E}"/>
+                <a16:creationId xmlns:a16="http://schemas.microsoft.com/office/drawing/2014/main" id="{3693617B-51BB-882A-9138-B49C08B3DC89}"/>
               </a:ext>
             </a:extLst>
           </p:cNvPr>
@@ -1762,7 +1762,7 @@
           <p:cNvPr id="4" name="コンテンツ プレースホルダー 3">
             <a:extLst>
               <a:ext uri="{FF2B5EF4-FFF2-40B4-BE49-F238E27FC236}">
-                <a16:creationId xmlns:a16="http://schemas.microsoft.com/office/drawing/2014/main" id="{4A94B6CF-6EFF-017D-C88C-01E785395645}"/>
+                <a16:creationId xmlns:a16="http://schemas.microsoft.com/office/drawing/2014/main" id="{170AA2EA-FB85-4C74-0299-18BC609FEEBB}"/>
               </a:ext>
             </a:extLst>
           </p:cNvPr>
@@ -1856,7 +1856,7 @@
           <p:cNvPr id="5" name="テキスト プレースホルダー 4">
             <a:extLst>
               <a:ext uri="{FF2B5EF4-FFF2-40B4-BE49-F238E27FC236}">
-                <a16:creationId xmlns:a16="http://schemas.microsoft.com/office/drawing/2014/main" id="{88D53DC8-154F-B8BD-5B71-D66C161BF3AF}"/>
+                <a16:creationId xmlns:a16="http://schemas.microsoft.com/office/drawing/2014/main" id="{B4D26EC6-A440-D18E-E95D-2A4A82CD8417}"/>
               </a:ext>
             </a:extLst>
           </p:cNvPr>
@@ -1927,7 +1927,7 @@
           <p:cNvPr id="6" name="コンテンツ プレースホルダー 5">
             <a:extLst>
               <a:ext uri="{FF2B5EF4-FFF2-40B4-BE49-F238E27FC236}">
-                <a16:creationId xmlns:a16="http://schemas.microsoft.com/office/drawing/2014/main" id="{F98D5A8F-F1F3-3C45-6ACB-3AB448E36F8A}"/>
+                <a16:creationId xmlns:a16="http://schemas.microsoft.com/office/drawing/2014/main" id="{35E62FAE-0E86-4334-8D23-B97011ACBCEC}"/>
               </a:ext>
             </a:extLst>
           </p:cNvPr>
@@ -2021,7 +2021,7 @@
           <p:cNvPr id="7" name="日付プレースホルダー 6">
             <a:extLst>
               <a:ext uri="{FF2B5EF4-FFF2-40B4-BE49-F238E27FC236}">
-                <a16:creationId xmlns:a16="http://schemas.microsoft.com/office/drawing/2014/main" id="{C26A188B-00A5-00BF-4221-2FE239F2DF36}"/>
+                <a16:creationId xmlns:a16="http://schemas.microsoft.com/office/drawing/2014/main" id="{DE3BF167-6C6A-3120-73C3-C76F2BD17331}"/>
               </a:ext>
             </a:extLst>
           </p:cNvPr>
@@ -2037,7 +2037,7 @@
           <a:bodyPr/>
           <a:lstStyle/>
           <a:p>
-            <a:fld id="{38CF951B-9A95-4A04-A553-A9E1FF600C98}" type="datetimeFigureOut">
+            <a:fld id="{548A954F-6878-4CBB-85A4-08585DEC05C9}" type="datetimeFigureOut">
               <a:rPr kumimoji="1" lang="ja-JP" altLang="en-US" smtClean="0"/>
               <a:t>2026/7/30</a:t>
             </a:fld>
@@ -2050,7 +2050,7 @@
           <p:cNvPr id="8" name="フッター プレースホルダー 7">
             <a:extLst>
               <a:ext uri="{FF2B5EF4-FFF2-40B4-BE49-F238E27FC236}">
-                <a16:creationId xmlns:a16="http://schemas.microsoft.com/office/drawing/2014/main" id="{AB469C15-D101-4336-6E36-71971F78124A}"/>
+                <a16:creationId xmlns:a16="http://schemas.microsoft.com/office/drawing/2014/main" id="{AE8FCFD4-9198-6228-3B05-67D923FEC67E}"/>
               </a:ext>
             </a:extLst>
           </p:cNvPr>
@@ -2075,7 +2075,7 @@
           <p:cNvPr id="9" name="スライド番号プレースホルダー 8">
             <a:extLst>
               <a:ext uri="{FF2B5EF4-FFF2-40B4-BE49-F238E27FC236}">
-                <a16:creationId xmlns:a16="http://schemas.microsoft.com/office/drawing/2014/main" id="{F0871FF0-6FC9-765E-70C7-23C603063E99}"/>
+                <a16:creationId xmlns:a16="http://schemas.microsoft.com/office/drawing/2014/main" id="{428B019B-D3EE-59FF-7D4A-4484489C3553}"/>
               </a:ext>
             </a:extLst>
           </p:cNvPr>
@@ -2091,7 +2091,7 @@
           <a:bodyPr/>
           <a:lstStyle/>
           <a:p>
-            <a:fld id="{8B3C9EF3-6771-44E9-A7A2-47E6107873BF}" type="slidenum">
+            <a:fld id="{6B2941EB-36E4-47D0-8598-D5AE01190ABB}" type="slidenum">
               <a:rPr kumimoji="1" lang="ja-JP" altLang="en-US" smtClean="0"/>
               <a:t>‹#›</a:t>
             </a:fld>
@@ -2102,7 +2102,7 @@
     </p:spTree>
     <p:extLst>
       <p:ext uri="{BB962C8B-B14F-4D97-AF65-F5344CB8AC3E}">
-        <p14:creationId xmlns:p14="http://schemas.microsoft.com/office/powerpoint/2010/main" val="2715550178"/>
+        <p14:creationId xmlns:p14="http://schemas.microsoft.com/office/powerpoint/2010/main" val="2494259117"/>
       </p:ext>
     </p:extLst>
   </p:cSld>
@@ -2134,7 +2134,7 @@
           <p:cNvPr id="2" name="タイトル 1">
             <a:extLst>
               <a:ext uri="{FF2B5EF4-FFF2-40B4-BE49-F238E27FC236}">
-                <a16:creationId xmlns:a16="http://schemas.microsoft.com/office/drawing/2014/main" id="{B050C760-3D7B-A6DB-C54A-B6CF4DD11A30}"/>
+                <a16:creationId xmlns:a16="http://schemas.microsoft.com/office/drawing/2014/main" id="{F9637763-5047-A4CF-3719-EE5667D402E4}"/>
               </a:ext>
             </a:extLst>
           </p:cNvPr>
@@ -2162,7 +2162,7 @@
           <p:cNvPr id="3" name="日付プレースホルダー 2">
             <a:extLst>
               <a:ext uri="{FF2B5EF4-FFF2-40B4-BE49-F238E27FC236}">
-                <a16:creationId xmlns:a16="http://schemas.microsoft.com/office/drawing/2014/main" id="{267200B3-8F99-8D0A-EC10-56C48C0E559C}"/>
+                <a16:creationId xmlns:a16="http://schemas.microsoft.com/office/drawing/2014/main" id="{8D619AD6-F8A4-D393-1013-AE74222F08FA}"/>
               </a:ext>
             </a:extLst>
           </p:cNvPr>
@@ -2178,7 +2178,7 @@
           <a:bodyPr/>
           <a:lstStyle/>
           <a:p>
-            <a:fld id="{38CF951B-9A95-4A04-A553-A9E1FF600C98}" type="datetimeFigureOut">
+            <a:fld id="{548A954F-6878-4CBB-85A4-08585DEC05C9}" type="datetimeFigureOut">
               <a:rPr kumimoji="1" lang="ja-JP" altLang="en-US" smtClean="0"/>
               <a:t>2026/7/30</a:t>
             </a:fld>
@@ -2191,7 +2191,7 @@
           <p:cNvPr id="4" name="フッター プレースホルダー 3">
             <a:extLst>
               <a:ext uri="{FF2B5EF4-FFF2-40B4-BE49-F238E27FC236}">
-                <a16:creationId xmlns:a16="http://schemas.microsoft.com/office/drawing/2014/main" id="{A514DCB1-A313-D73C-BC80-246CA2F3E0C3}"/>
+                <a16:creationId xmlns:a16="http://schemas.microsoft.com/office/drawing/2014/main" id="{83B67A3A-D5D7-48BA-323D-A12E9448E5AB}"/>
               </a:ext>
             </a:extLst>
           </p:cNvPr>
@@ -2216,7 +2216,7 @@
           <p:cNvPr id="5" name="スライド番号プレースホルダー 4">
             <a:extLst>
               <a:ext uri="{FF2B5EF4-FFF2-40B4-BE49-F238E27FC236}">
-                <a16:creationId xmlns:a16="http://schemas.microsoft.com/office/drawing/2014/main" id="{B03E0FBD-9BC6-B467-7F70-942A3A7559EF}"/>
+                <a16:creationId xmlns:a16="http://schemas.microsoft.com/office/drawing/2014/main" id="{21C312EA-728B-F85C-BF42-BA5C92CC6019}"/>
               </a:ext>
             </a:extLst>
           </p:cNvPr>
@@ -2232,7 +2232,7 @@
           <a:bodyPr/>
           <a:lstStyle/>
           <a:p>
-            <a:fld id="{8B3C9EF3-6771-44E9-A7A2-47E6107873BF}" type="slidenum">
+            <a:fld id="{6B2941EB-36E4-47D0-8598-D5AE01190ABB}" type="slidenum">
               <a:rPr kumimoji="1" lang="ja-JP" altLang="en-US" smtClean="0"/>
               <a:t>‹#›</a:t>
             </a:fld>
@@ -2243,7 +2243,7 @@
     </p:spTree>
     <p:extLst>
       <p:ext uri="{BB962C8B-B14F-4D97-AF65-F5344CB8AC3E}">
-        <p14:creationId xmlns:p14="http://schemas.microsoft.com/office/powerpoint/2010/main" val="3659011906"/>
+        <p14:creationId xmlns:p14="http://schemas.microsoft.com/office/powerpoint/2010/main" val="2578242479"/>
       </p:ext>
     </p:extLst>
   </p:cSld>
@@ -2275,7 +2275,7 @@
           <p:cNvPr id="2" name="日付プレースホルダー 1">
             <a:extLst>
               <a:ext uri="{FF2B5EF4-FFF2-40B4-BE49-F238E27FC236}">
-                <a16:creationId xmlns:a16="http://schemas.microsoft.com/office/drawing/2014/main" id="{2018460D-A2FA-68EA-C45C-AED789803FBE}"/>
+                <a16:creationId xmlns:a16="http://schemas.microsoft.com/office/drawing/2014/main" id="{BC0BC18D-F5F2-0073-DEC0-3D592593C7A7}"/>
               </a:ext>
             </a:extLst>
           </p:cNvPr>
@@ -2291,7 +2291,7 @@
           <a:bodyPr/>
           <a:lstStyle/>
           <a:p>
-            <a:fld id="{38CF951B-9A95-4A04-A553-A9E1FF600C98}" type="datetimeFigureOut">
+            <a:fld id="{548A954F-6878-4CBB-85A4-08585DEC05C9}" type="datetimeFigureOut">
               <a:rPr kumimoji="1" lang="ja-JP" altLang="en-US" smtClean="0"/>
               <a:t>2026/7/30</a:t>
             </a:fld>
@@ -2304,7 +2304,7 @@
           <p:cNvPr id="3" name="フッター プレースホルダー 2">
             <a:extLst>
               <a:ext uri="{FF2B5EF4-FFF2-40B4-BE49-F238E27FC236}">
-                <a16:creationId xmlns:a16="http://schemas.microsoft.com/office/drawing/2014/main" id="{25F8B33F-6F54-D148-1E59-D166A45171F7}"/>
+                <a16:creationId xmlns:a16="http://schemas.microsoft.com/office/drawing/2014/main" id="{32116A6B-907F-4EC9-3BB4-5EC60720B900}"/>
               </a:ext>
             </a:extLst>
           </p:cNvPr>
@@ -2329,7 +2329,7 @@
           <p:cNvPr id="4" name="スライド番号プレースホルダー 3">
             <a:extLst>
               <a:ext uri="{FF2B5EF4-FFF2-40B4-BE49-F238E27FC236}">
-                <a16:creationId xmlns:a16="http://schemas.microsoft.com/office/drawing/2014/main" id="{679E1320-0AA4-C8B6-3680-8240CE818F8E}"/>
+                <a16:creationId xmlns:a16="http://schemas.microsoft.com/office/drawing/2014/main" id="{23440B8F-7ECC-D508-6257-4DB928F4CCAC}"/>
               </a:ext>
             </a:extLst>
           </p:cNvPr>
@@ -2345,7 +2345,7 @@
           <a:bodyPr/>
           <a:lstStyle/>
           <a:p>
-            <a:fld id="{8B3C9EF3-6771-44E9-A7A2-47E6107873BF}" type="slidenum">
+            <a:fld id="{6B2941EB-36E4-47D0-8598-D5AE01190ABB}" type="slidenum">
               <a:rPr kumimoji="1" lang="ja-JP" altLang="en-US" smtClean="0"/>
               <a:t>‹#›</a:t>
             </a:fld>
@@ -2356,7 +2356,7 @@
     </p:spTree>
     <p:extLst>
       <p:ext uri="{BB962C8B-B14F-4D97-AF65-F5344CB8AC3E}">
-        <p14:creationId xmlns:p14="http://schemas.microsoft.com/office/powerpoint/2010/main" val="746438809"/>
+        <p14:creationId xmlns:p14="http://schemas.microsoft.com/office/powerpoint/2010/main" val="2207557954"/>
       </p:ext>
     </p:extLst>
   </p:cSld>
@@ -2388,7 +2388,7 @@
           <p:cNvPr id="2" name="タイトル 1">
             <a:extLst>
               <a:ext uri="{FF2B5EF4-FFF2-40B4-BE49-F238E27FC236}">
-                <a16:creationId xmlns:a16="http://schemas.microsoft.com/office/drawing/2014/main" id="{62E0E7D9-6105-2F6D-BB79-13F0422A6077}"/>
+                <a16:creationId xmlns:a16="http://schemas.microsoft.com/office/drawing/2014/main" id="{C3D9FCF9-572E-E8C8-5962-12A89624A3C1}"/>
               </a:ext>
             </a:extLst>
           </p:cNvPr>
@@ -2425,7 +2425,7 @@
           <p:cNvPr id="3" name="コンテンツ プレースホルダー 2">
             <a:extLst>
               <a:ext uri="{FF2B5EF4-FFF2-40B4-BE49-F238E27FC236}">
-                <a16:creationId xmlns:a16="http://schemas.microsoft.com/office/drawing/2014/main" id="{9E1CAB00-5DF8-D3A6-44EC-2B00D693319C}"/>
+                <a16:creationId xmlns:a16="http://schemas.microsoft.com/office/drawing/2014/main" id="{18B7A2FC-B825-2BAA-E116-DB50629023A8}"/>
               </a:ext>
             </a:extLst>
           </p:cNvPr>
@@ -2547,7 +2547,7 @@
           <p:cNvPr id="4" name="テキスト プレースホルダー 3">
             <a:extLst>
               <a:ext uri="{FF2B5EF4-FFF2-40B4-BE49-F238E27FC236}">
-                <a16:creationId xmlns:a16="http://schemas.microsoft.com/office/drawing/2014/main" id="{8A31505D-128D-34EF-EB33-07DB726A0802}"/>
+                <a16:creationId xmlns:a16="http://schemas.microsoft.com/office/drawing/2014/main" id="{43BA0A2C-CFF8-CEBA-91B3-6E6F658FBE94}"/>
               </a:ext>
             </a:extLst>
           </p:cNvPr>
@@ -2618,7 +2618,7 @@
           <p:cNvPr id="5" name="日付プレースホルダー 4">
             <a:extLst>
               <a:ext uri="{FF2B5EF4-FFF2-40B4-BE49-F238E27FC236}">
-                <a16:creationId xmlns:a16="http://schemas.microsoft.com/office/drawing/2014/main" id="{955A4EC3-C969-8979-782C-DDEA06400E08}"/>
+                <a16:creationId xmlns:a16="http://schemas.microsoft.com/office/drawing/2014/main" id="{68F35A44-912C-BAAA-638D-1CE26005D9E7}"/>
               </a:ext>
             </a:extLst>
           </p:cNvPr>
@@ -2634,7 +2634,7 @@
           <a:bodyPr/>
           <a:lstStyle/>
           <a:p>
-            <a:fld id="{38CF951B-9A95-4A04-A553-A9E1FF600C98}" type="datetimeFigureOut">
+            <a:fld id="{548A954F-6878-4CBB-85A4-08585DEC05C9}" type="datetimeFigureOut">
               <a:rPr kumimoji="1" lang="ja-JP" altLang="en-US" smtClean="0"/>
               <a:t>2026/7/30</a:t>
             </a:fld>
@@ -2647,7 +2647,7 @@
           <p:cNvPr id="6" name="フッター プレースホルダー 5">
             <a:extLst>
               <a:ext uri="{FF2B5EF4-FFF2-40B4-BE49-F238E27FC236}">
-                <a16:creationId xmlns:a16="http://schemas.microsoft.com/office/drawing/2014/main" id="{B1C3C4CB-A6FE-895B-A358-2D9BDCB63491}"/>
+                <a16:creationId xmlns:a16="http://schemas.microsoft.com/office/drawing/2014/main" id="{28340A82-C63F-876E-4049-B3D47AE5BFE5}"/>
               </a:ext>
             </a:extLst>
           </p:cNvPr>
@@ -2672,7 +2672,7 @@
           <p:cNvPr id="7" name="スライド番号プレースホルダー 6">
             <a:extLst>
               <a:ext uri="{FF2B5EF4-FFF2-40B4-BE49-F238E27FC236}">
-                <a16:creationId xmlns:a16="http://schemas.microsoft.com/office/drawing/2014/main" id="{15D3379E-009D-F63C-C734-DD17B83A89C9}"/>
+                <a16:creationId xmlns:a16="http://schemas.microsoft.com/office/drawing/2014/main" id="{162401EF-E75B-DE70-17DD-F84F35971F51}"/>
               </a:ext>
             </a:extLst>
           </p:cNvPr>
@@ -2688,7 +2688,7 @@
           <a:bodyPr/>
           <a:lstStyle/>
           <a:p>
-            <a:fld id="{8B3C9EF3-6771-44E9-A7A2-47E6107873BF}" type="slidenum">
+            <a:fld id="{6B2941EB-36E4-47D0-8598-D5AE01190ABB}" type="slidenum">
               <a:rPr kumimoji="1" lang="ja-JP" altLang="en-US" smtClean="0"/>
               <a:t>‹#›</a:t>
             </a:fld>
@@ -2699,7 +2699,7 @@
     </p:spTree>
     <p:extLst>
       <p:ext uri="{BB962C8B-B14F-4D97-AF65-F5344CB8AC3E}">
-        <p14:creationId xmlns:p14="http://schemas.microsoft.com/office/powerpoint/2010/main" val="2193210623"/>
+        <p14:creationId xmlns:p14="http://schemas.microsoft.com/office/powerpoint/2010/main" val="2639997823"/>
       </p:ext>
     </p:extLst>
   </p:cSld>
@@ -2731,7 +2731,7 @@
           <p:cNvPr id="2" name="タイトル 1">
             <a:extLst>
               <a:ext uri="{FF2B5EF4-FFF2-40B4-BE49-F238E27FC236}">
-                <a16:creationId xmlns:a16="http://schemas.microsoft.com/office/drawing/2014/main" id="{6FBE29EF-B04E-D54D-320A-77B8A8A2D61C}"/>
+                <a16:creationId xmlns:a16="http://schemas.microsoft.com/office/drawing/2014/main" id="{20E66B59-00BF-30A1-4CFC-0D68B1DA8AA7}"/>
               </a:ext>
             </a:extLst>
           </p:cNvPr>
@@ -2768,7 +2768,7 @@
           <p:cNvPr id="3" name="図プレースホルダー 2">
             <a:extLst>
               <a:ext uri="{FF2B5EF4-FFF2-40B4-BE49-F238E27FC236}">
-                <a16:creationId xmlns:a16="http://schemas.microsoft.com/office/drawing/2014/main" id="{461EF0EB-DC49-4B6D-EB44-ADCA32FD1C42}"/>
+                <a16:creationId xmlns:a16="http://schemas.microsoft.com/office/drawing/2014/main" id="{185A5041-891A-6783-F890-30A8B9B70D7E}"/>
               </a:ext>
             </a:extLst>
           </p:cNvPr>
@@ -2835,7 +2835,7 @@
           <p:cNvPr id="4" name="テキスト プレースホルダー 3">
             <a:extLst>
               <a:ext uri="{FF2B5EF4-FFF2-40B4-BE49-F238E27FC236}">
-                <a16:creationId xmlns:a16="http://schemas.microsoft.com/office/drawing/2014/main" id="{65387439-AA65-9D26-6DF6-DF10BA5D43D7}"/>
+                <a16:creationId xmlns:a16="http://schemas.microsoft.com/office/drawing/2014/main" id="{7BFEB72F-9619-586D-BC38-6A0038445CDA}"/>
               </a:ext>
             </a:extLst>
           </p:cNvPr>
@@ -2906,7 +2906,7 @@
           <p:cNvPr id="5" name="日付プレースホルダー 4">
             <a:extLst>
               <a:ext uri="{FF2B5EF4-FFF2-40B4-BE49-F238E27FC236}">
-                <a16:creationId xmlns:a16="http://schemas.microsoft.com/office/drawing/2014/main" id="{65B7557B-4989-5B8B-4395-E70DC16D1586}"/>
+                <a16:creationId xmlns:a16="http://schemas.microsoft.com/office/drawing/2014/main" id="{874947A1-B3E4-39EC-DAAA-23537F642FA3}"/>
               </a:ext>
             </a:extLst>
           </p:cNvPr>
@@ -2922,7 +2922,7 @@
           <a:bodyPr/>
           <a:lstStyle/>
           <a:p>
-            <a:fld id="{38CF951B-9A95-4A04-A553-A9E1FF600C98}" type="datetimeFigureOut">
+            <a:fld id="{548A954F-6878-4CBB-85A4-08585DEC05C9}" type="datetimeFigureOut">
               <a:rPr kumimoji="1" lang="ja-JP" altLang="en-US" smtClean="0"/>
               <a:t>2026/7/30</a:t>
             </a:fld>
@@ -2935,7 +2935,7 @@
           <p:cNvPr id="6" name="フッター プレースホルダー 5">
             <a:extLst>
               <a:ext uri="{FF2B5EF4-FFF2-40B4-BE49-F238E27FC236}">
-                <a16:creationId xmlns:a16="http://schemas.microsoft.com/office/drawing/2014/main" id="{9D091082-1216-22EE-9C9C-DBCE6149E6F5}"/>
+                <a16:creationId xmlns:a16="http://schemas.microsoft.com/office/drawing/2014/main" id="{A236F4F2-6A88-452B-58B1-D39F5EE9631F}"/>
               </a:ext>
             </a:extLst>
           </p:cNvPr>
@@ -2960,7 +2960,7 @@
           <p:cNvPr id="7" name="スライド番号プレースホルダー 6">
             <a:extLst>
               <a:ext uri="{FF2B5EF4-FFF2-40B4-BE49-F238E27FC236}">
-                <a16:creationId xmlns:a16="http://schemas.microsoft.com/office/drawing/2014/main" id="{7AC71848-D48A-8978-3887-A27533D9025D}"/>
+                <a16:creationId xmlns:a16="http://schemas.microsoft.com/office/drawing/2014/main" id="{8D92AA51-E2C5-6A63-83C7-5FA9177C59CF}"/>
               </a:ext>
             </a:extLst>
           </p:cNvPr>
@@ -2976,7 +2976,7 @@
           <a:bodyPr/>
           <a:lstStyle/>
           <a:p>
-            <a:fld id="{8B3C9EF3-6771-44E9-A7A2-47E6107873BF}" type="slidenum">
+            <a:fld id="{6B2941EB-36E4-47D0-8598-D5AE01190ABB}" type="slidenum">
               <a:rPr kumimoji="1" lang="ja-JP" altLang="en-US" smtClean="0"/>
               <a:t>‹#›</a:t>
             </a:fld>
@@ -2987,7 +2987,7 @@
     </p:spTree>
     <p:extLst>
       <p:ext uri="{BB962C8B-B14F-4D97-AF65-F5344CB8AC3E}">
-        <p14:creationId xmlns:p14="http://schemas.microsoft.com/office/powerpoint/2010/main" val="3251798886"/>
+        <p14:creationId xmlns:p14="http://schemas.microsoft.com/office/powerpoint/2010/main" val="3050373341"/>
       </p:ext>
     </p:extLst>
   </p:cSld>
@@ -3024,7 +3024,7 @@
           <p:cNvPr id="2" name="タイトル プレースホルダー 1">
             <a:extLst>
               <a:ext uri="{FF2B5EF4-FFF2-40B4-BE49-F238E27FC236}">
-                <a16:creationId xmlns:a16="http://schemas.microsoft.com/office/drawing/2014/main" id="{0F2C755E-B24F-A33F-B684-82C4D2636F08}"/>
+                <a16:creationId xmlns:a16="http://schemas.microsoft.com/office/drawing/2014/main" id="{E740B48B-EC55-5FD7-6B9A-3C04DB7D86DF}"/>
               </a:ext>
             </a:extLst>
           </p:cNvPr>
@@ -3062,7 +3062,7 @@
           <p:cNvPr id="3" name="テキスト プレースホルダー 2">
             <a:extLst>
               <a:ext uri="{FF2B5EF4-FFF2-40B4-BE49-F238E27FC236}">
-                <a16:creationId xmlns:a16="http://schemas.microsoft.com/office/drawing/2014/main" id="{718A6428-39C4-DAAB-018F-F9FC2F2A30A1}"/>
+                <a16:creationId xmlns:a16="http://schemas.microsoft.com/office/drawing/2014/main" id="{8EF927D6-6A8F-63E9-828D-F109D85EAE42}"/>
               </a:ext>
             </a:extLst>
           </p:cNvPr>
@@ -3161,7 +3161,7 @@
           <p:cNvPr id="4" name="日付プレースホルダー 3">
             <a:extLst>
               <a:ext uri="{FF2B5EF4-FFF2-40B4-BE49-F238E27FC236}">
-                <a16:creationId xmlns:a16="http://schemas.microsoft.com/office/drawing/2014/main" id="{07EA9449-2ADD-0C23-5172-1CDB8FA2F044}"/>
+                <a16:creationId xmlns:a16="http://schemas.microsoft.com/office/drawing/2014/main" id="{0E13D9B0-8E9A-E969-64AD-CA0A2F73F3E3}"/>
               </a:ext>
             </a:extLst>
           </p:cNvPr>
@@ -3195,7 +3195,7 @@
             </a:lvl1pPr>
           </a:lstStyle>
           <a:p>
-            <a:fld id="{38CF951B-9A95-4A04-A553-A9E1FF600C98}" type="datetimeFigureOut">
+            <a:fld id="{548A954F-6878-4CBB-85A4-08585DEC05C9}" type="datetimeFigureOut">
               <a:rPr kumimoji="1" lang="ja-JP" altLang="en-US" smtClean="0"/>
               <a:t>2026/7/30</a:t>
             </a:fld>
@@ -3208,7 +3208,7 @@
           <p:cNvPr id="5" name="フッター プレースホルダー 4">
             <a:extLst>
               <a:ext uri="{FF2B5EF4-FFF2-40B4-BE49-F238E27FC236}">
-                <a16:creationId xmlns:a16="http://schemas.microsoft.com/office/drawing/2014/main" id="{A0C7898B-F866-42B6-F9C8-29763887D84E}"/>
+                <a16:creationId xmlns:a16="http://schemas.microsoft.com/office/drawing/2014/main" id="{6C2996CD-1B84-AD3B-1A80-0BE9870DBB71}"/>
               </a:ext>
             </a:extLst>
           </p:cNvPr>
@@ -3251,7 +3251,7 @@
           <p:cNvPr id="6" name="スライド番号プレースホルダー 5">
             <a:extLst>
               <a:ext uri="{FF2B5EF4-FFF2-40B4-BE49-F238E27FC236}">
-                <a16:creationId xmlns:a16="http://schemas.microsoft.com/office/drawing/2014/main" id="{1505A707-B09B-2B84-4C30-E24871103DFB}"/>
+                <a16:creationId xmlns:a16="http://schemas.microsoft.com/office/drawing/2014/main" id="{4F9DB3CB-DDAE-57C8-AA44-268A4E02AEA5}"/>
               </a:ext>
             </a:extLst>
           </p:cNvPr>
@@ -3285,7 +3285,7 @@
             </a:lvl1pPr>
           </a:lstStyle>
           <a:p>
-            <a:fld id="{8B3C9EF3-6771-44E9-A7A2-47E6107873BF}" type="slidenum">
+            <a:fld id="{6B2941EB-36E4-47D0-8598-D5AE01190ABB}" type="slidenum">
               <a:rPr kumimoji="1" lang="ja-JP" altLang="en-US" smtClean="0"/>
               <a:t>‹#›</a:t>
             </a:fld>
@@ -3296,7 +3296,7 @@
     </p:spTree>
     <p:extLst>
       <p:ext uri="{BB962C8B-B14F-4D97-AF65-F5344CB8AC3E}">
-        <p14:creationId xmlns:p14="http://schemas.microsoft.com/office/powerpoint/2010/main" val="1722217002"/>
+        <p14:creationId xmlns:p14="http://schemas.microsoft.com/office/powerpoint/2010/main" val="3549607288"/>
       </p:ext>
     </p:extLst>
   </p:cSld>
@@ -3619,7 +3619,7 @@
           <p:cNvPr id="2" name="テキスト ボックス 1">
             <a:extLst>
               <a:ext uri="{FF2B5EF4-FFF2-40B4-BE49-F238E27FC236}">
-                <a16:creationId xmlns:a16="http://schemas.microsoft.com/office/drawing/2014/main" id="{B27CE582-DF85-E014-56B3-8FB4682331FD}"/>
+                <a16:creationId xmlns:a16="http://schemas.microsoft.com/office/drawing/2014/main" id="{CF1A5742-F671-6475-C8C4-7010CA6087B6}"/>
               </a:ext>
             </a:extLst>
           </p:cNvPr>
@@ -3665,7 +3665,7 @@
           <p:cNvPr id="3" name="テキスト ボックス 2">
             <a:extLst>
               <a:ext uri="{FF2B5EF4-FFF2-40B4-BE49-F238E27FC236}">
-                <a16:creationId xmlns:a16="http://schemas.microsoft.com/office/drawing/2014/main" id="{719D52DB-A39D-0A52-8F1F-15676732E65F}"/>
+                <a16:creationId xmlns:a16="http://schemas.microsoft.com/office/drawing/2014/main" id="{22E8ED05-3FCB-0824-9749-ADF10541BEBF}"/>
               </a:ext>
             </a:extLst>
           </p:cNvPr>
@@ -3711,7 +3711,7 @@
           <p:cNvPr id="4" name="テキスト ボックス 3">
             <a:extLst>
               <a:ext uri="{FF2B5EF4-FFF2-40B4-BE49-F238E27FC236}">
-                <a16:creationId xmlns:a16="http://schemas.microsoft.com/office/drawing/2014/main" id="{55111330-C13B-C7DD-6971-2DF65FFC5EFC}"/>
+                <a16:creationId xmlns:a16="http://schemas.microsoft.com/office/drawing/2014/main" id="{F443CDAC-5D3C-8AE8-EDA5-4168810B28B3}"/>
               </a:ext>
             </a:extLst>
           </p:cNvPr>
@@ -3757,7 +3757,7 @@
           <p:cNvPr id="5" name="テキスト ボックス 4">
             <a:extLst>
               <a:ext uri="{FF2B5EF4-FFF2-40B4-BE49-F238E27FC236}">
-                <a16:creationId xmlns:a16="http://schemas.microsoft.com/office/drawing/2014/main" id="{C5E16A9F-FBD7-D5F9-81E3-4C2B2AB02ABB}"/>
+                <a16:creationId xmlns:a16="http://schemas.microsoft.com/office/drawing/2014/main" id="{86801D57-266A-D7DF-0442-138D5704FC6B}"/>
               </a:ext>
             </a:extLst>
           </p:cNvPr>
@@ -3804,7 +3804,7 @@
             <a:hlinkClick r:id="" action="ppaction://media"/>
             <a:extLst>
               <a:ext uri="{FF2B5EF4-FFF2-40B4-BE49-F238E27FC236}">
-                <a16:creationId xmlns:a16="http://schemas.microsoft.com/office/drawing/2014/main" id="{BA3956AA-F260-6D73-738F-B3D93CA66E92}"/>
+                <a16:creationId xmlns:a16="http://schemas.microsoft.com/office/drawing/2014/main" id="{262557DA-4B99-946A-0CFF-68DAC199FCDE}"/>
               </a:ext>
             </a:extLst>
           </p:cNvPr>
@@ -3839,7 +3839,7 @@
     </p:spTree>
     <p:extLst>
       <p:ext uri="{BB962C8B-B14F-4D97-AF65-F5344CB8AC3E}">
-        <p14:creationId xmlns:p14="http://schemas.microsoft.com/office/powerpoint/2010/main" val="2633752243"/>
+        <p14:creationId xmlns:p14="http://schemas.microsoft.com/office/powerpoint/2010/main" val="2788532313"/>
       </p:ext>
     </p:extLst>
   </p:cSld>
@@ -3963,7 +3963,7 @@
           <p:cNvPr id="2" name="テキスト ボックス 1">
             <a:extLst>
               <a:ext uri="{FF2B5EF4-FFF2-40B4-BE49-F238E27FC236}">
-                <a16:creationId xmlns:a16="http://schemas.microsoft.com/office/drawing/2014/main" id="{077F7E4D-896F-6052-A206-EBF41F0E69AB}"/>
+                <a16:creationId xmlns:a16="http://schemas.microsoft.com/office/drawing/2014/main" id="{CC0EBA27-93E1-C460-D662-8FF8AEBBCEA4}"/>
               </a:ext>
             </a:extLst>
           </p:cNvPr>
@@ -4009,7 +4009,7 @@
           <p:cNvPr id="3" name="テキスト ボックス 2">
             <a:extLst>
               <a:ext uri="{FF2B5EF4-FFF2-40B4-BE49-F238E27FC236}">
-                <a16:creationId xmlns:a16="http://schemas.microsoft.com/office/drawing/2014/main" id="{813BB027-7FC9-52C1-B6BA-DFBA8F1280BA}"/>
+                <a16:creationId xmlns:a16="http://schemas.microsoft.com/office/drawing/2014/main" id="{1851E79B-F743-7F8D-E5CD-B691D21225FA}"/>
               </a:ext>
             </a:extLst>
           </p:cNvPr>
@@ -4055,7 +4055,7 @@
           <p:cNvPr id="4" name="テキスト ボックス 3">
             <a:extLst>
               <a:ext uri="{FF2B5EF4-FFF2-40B4-BE49-F238E27FC236}">
-                <a16:creationId xmlns:a16="http://schemas.microsoft.com/office/drawing/2014/main" id="{DBE9CF34-DAA2-32F6-CBC0-45ABC1F80ECC}"/>
+                <a16:creationId xmlns:a16="http://schemas.microsoft.com/office/drawing/2014/main" id="{B73F6BF7-7774-2421-398F-673B0B719829}"/>
               </a:ext>
             </a:extLst>
           </p:cNvPr>
@@ -4104,7 +4104,7 @@
           <p:cNvPr id="5" name="テキスト ボックス 4">
             <a:extLst>
               <a:ext uri="{FF2B5EF4-FFF2-40B4-BE49-F238E27FC236}">
-                <a16:creationId xmlns:a16="http://schemas.microsoft.com/office/drawing/2014/main" id="{E1C3CAEB-69EE-7FCB-09CF-4AD8C0E040A8}"/>
+                <a16:creationId xmlns:a16="http://schemas.microsoft.com/office/drawing/2014/main" id="{305592BC-2879-04A2-0159-424A1B17153C}"/>
               </a:ext>
             </a:extLst>
           </p:cNvPr>
@@ -4151,7 +4151,7 @@
             <a:hlinkClick r:id="" action="ppaction://media"/>
             <a:extLst>
               <a:ext uri="{FF2B5EF4-FFF2-40B4-BE49-F238E27FC236}">
-                <a16:creationId xmlns:a16="http://schemas.microsoft.com/office/drawing/2014/main" id="{12B31BE8-1F43-1CED-9D0A-54DB643CA2AD}"/>
+                <a16:creationId xmlns:a16="http://schemas.microsoft.com/office/drawing/2014/main" id="{858F3FBA-3883-383A-408E-252F520C8149}"/>
               </a:ext>
             </a:extLst>
           </p:cNvPr>
@@ -4186,7 +4186,7 @@
     </p:spTree>
     <p:extLst>
       <p:ext uri="{BB962C8B-B14F-4D97-AF65-F5344CB8AC3E}">
-        <p14:creationId xmlns:p14="http://schemas.microsoft.com/office/powerpoint/2010/main" val="3451699958"/>
+        <p14:creationId xmlns:p14="http://schemas.microsoft.com/office/powerpoint/2010/main" val="1014860707"/>
       </p:ext>
     </p:extLst>
   </p:cSld>
@@ -4310,7 +4310,7 @@
           <p:cNvPr id="2" name="テキスト ボックス 1">
             <a:extLst>
               <a:ext uri="{FF2B5EF4-FFF2-40B4-BE49-F238E27FC236}">
-                <a16:creationId xmlns:a16="http://schemas.microsoft.com/office/drawing/2014/main" id="{9A92976D-BD23-D781-BA5B-45DC8BB6FCB4}"/>
+                <a16:creationId xmlns:a16="http://schemas.microsoft.com/office/drawing/2014/main" id="{A30183AD-5C27-DD74-480D-87A286B24459}"/>
               </a:ext>
             </a:extLst>
           </p:cNvPr>
@@ -4356,7 +4356,7 @@
           <p:cNvPr id="3" name="テキスト ボックス 2">
             <a:extLst>
               <a:ext uri="{FF2B5EF4-FFF2-40B4-BE49-F238E27FC236}">
-                <a16:creationId xmlns:a16="http://schemas.microsoft.com/office/drawing/2014/main" id="{13E6264D-E416-D231-9E22-482B63AD0D10}"/>
+                <a16:creationId xmlns:a16="http://schemas.microsoft.com/office/drawing/2014/main" id="{91160CC0-CB5C-B8DE-B32F-D6DC7E599F96}"/>
               </a:ext>
             </a:extLst>
           </p:cNvPr>
@@ -4402,7 +4402,7 @@
           <p:cNvPr id="4" name="テキスト ボックス 3">
             <a:extLst>
               <a:ext uri="{FF2B5EF4-FFF2-40B4-BE49-F238E27FC236}">
-                <a16:creationId xmlns:a16="http://schemas.microsoft.com/office/drawing/2014/main" id="{92708B23-6ED9-A478-5BB1-36D727DAE0BB}"/>
+                <a16:creationId xmlns:a16="http://schemas.microsoft.com/office/drawing/2014/main" id="{31509435-FB63-EBC8-F3AB-C397212F397D}"/>
               </a:ext>
             </a:extLst>
           </p:cNvPr>
@@ -4484,7 +4484,7 @@
           <p:cNvPr id="5" name="テキスト ボックス 4">
             <a:extLst>
               <a:ext uri="{FF2B5EF4-FFF2-40B4-BE49-F238E27FC236}">
-                <a16:creationId xmlns:a16="http://schemas.microsoft.com/office/drawing/2014/main" id="{E148423E-E1B9-BBE6-4306-9DB36AD2CB8C}"/>
+                <a16:creationId xmlns:a16="http://schemas.microsoft.com/office/drawing/2014/main" id="{3DFB0C52-73D0-D8DC-A785-127A44075614}"/>
               </a:ext>
             </a:extLst>
           </p:cNvPr>
@@ -4531,7 +4531,7 @@
             <a:hlinkClick r:id="" action="ppaction://media"/>
             <a:extLst>
               <a:ext uri="{FF2B5EF4-FFF2-40B4-BE49-F238E27FC236}">
-                <a16:creationId xmlns:a16="http://schemas.microsoft.com/office/drawing/2014/main" id="{15A95BBC-3AD2-820B-C7C3-20BEB2C497E8}"/>
+                <a16:creationId xmlns:a16="http://schemas.microsoft.com/office/drawing/2014/main" id="{AE0E630F-0071-8CE4-3948-96FAB70F4789}"/>
               </a:ext>
             </a:extLst>
           </p:cNvPr>
@@ -4566,7 +4566,7 @@
     </p:spTree>
     <p:extLst>
       <p:ext uri="{BB962C8B-B14F-4D97-AF65-F5344CB8AC3E}">
-        <p14:creationId xmlns:p14="http://schemas.microsoft.com/office/powerpoint/2010/main" val="1224663703"/>
+        <p14:creationId xmlns:p14="http://schemas.microsoft.com/office/powerpoint/2010/main" val="2358301902"/>
       </p:ext>
     </p:extLst>
   </p:cSld>
@@ -4690,7 +4690,7 @@
           <p:cNvPr id="2" name="テキスト ボックス 1">
             <a:extLst>
               <a:ext uri="{FF2B5EF4-FFF2-40B4-BE49-F238E27FC236}">
-                <a16:creationId xmlns:a16="http://schemas.microsoft.com/office/drawing/2014/main" id="{B6D8A88B-BC90-408D-6F82-9435BD0E3BB0}"/>
+                <a16:creationId xmlns:a16="http://schemas.microsoft.com/office/drawing/2014/main" id="{92639252-D8E8-70C5-1D64-BB93D5CFA471}"/>
               </a:ext>
             </a:extLst>
           </p:cNvPr>
@@ -4736,7 +4736,7 @@
           <p:cNvPr id="3" name="テキスト ボックス 2">
             <a:extLst>
               <a:ext uri="{FF2B5EF4-FFF2-40B4-BE49-F238E27FC236}">
-                <a16:creationId xmlns:a16="http://schemas.microsoft.com/office/drawing/2014/main" id="{27D9E256-947A-3012-2D8E-404D20A8637D}"/>
+                <a16:creationId xmlns:a16="http://schemas.microsoft.com/office/drawing/2014/main" id="{0BD7C497-DCE3-F6E9-3812-658F1DC05BA3}"/>
               </a:ext>
             </a:extLst>
           </p:cNvPr>
@@ -4782,7 +4782,7 @@
           <p:cNvPr id="4" name="テキスト ボックス 3">
             <a:extLst>
               <a:ext uri="{FF2B5EF4-FFF2-40B4-BE49-F238E27FC236}">
-                <a16:creationId xmlns:a16="http://schemas.microsoft.com/office/drawing/2014/main" id="{23DC6F1F-2CD0-A78F-D0BA-3E560F76147A}"/>
+                <a16:creationId xmlns:a16="http://schemas.microsoft.com/office/drawing/2014/main" id="{B3728809-8F6A-10F0-6EA6-671B886D4C88}"/>
               </a:ext>
             </a:extLst>
           </p:cNvPr>
@@ -4828,7 +4828,7 @@
           <p:cNvPr id="5" name="テキスト ボックス 4">
             <a:extLst>
               <a:ext uri="{FF2B5EF4-FFF2-40B4-BE49-F238E27FC236}">
-                <a16:creationId xmlns:a16="http://schemas.microsoft.com/office/drawing/2014/main" id="{89E1463F-3911-CA0E-04AF-51943638A8D3}"/>
+                <a16:creationId xmlns:a16="http://schemas.microsoft.com/office/drawing/2014/main" id="{7FC50C9C-4F93-93E3-1267-FFC256A76035}"/>
               </a:ext>
             </a:extLst>
           </p:cNvPr>
@@ -4875,7 +4875,7 @@
             <a:hlinkClick r:id="" action="ppaction://media"/>
             <a:extLst>
               <a:ext uri="{FF2B5EF4-FFF2-40B4-BE49-F238E27FC236}">
-                <a16:creationId xmlns:a16="http://schemas.microsoft.com/office/drawing/2014/main" id="{F052C2AF-9B9F-21EC-0C2E-454C7540A670}"/>
+                <a16:creationId xmlns:a16="http://schemas.microsoft.com/office/drawing/2014/main" id="{C6FD116C-F86B-DDCC-C3D8-A431FCE1576E}"/>
               </a:ext>
             </a:extLst>
           </p:cNvPr>
@@ -4910,7 +4910,7 @@
     </p:spTree>
     <p:extLst>
       <p:ext uri="{BB962C8B-B14F-4D97-AF65-F5344CB8AC3E}">
-        <p14:creationId xmlns:p14="http://schemas.microsoft.com/office/powerpoint/2010/main" val="1808461680"/>
+        <p14:creationId xmlns:p14="http://schemas.microsoft.com/office/powerpoint/2010/main" val="1091665747"/>
       </p:ext>
     </p:extLst>
   </p:cSld>
@@ -5034,7 +5034,7 @@
           <p:cNvPr id="2" name="テキスト ボックス 1">
             <a:extLst>
               <a:ext uri="{FF2B5EF4-FFF2-40B4-BE49-F238E27FC236}">
-                <a16:creationId xmlns:a16="http://schemas.microsoft.com/office/drawing/2014/main" id="{C7135224-98DA-4A34-6841-957C5FDB6E59}"/>
+                <a16:creationId xmlns:a16="http://schemas.microsoft.com/office/drawing/2014/main" id="{21502931-49D3-647D-CB49-5D3168DD6146}"/>
               </a:ext>
             </a:extLst>
           </p:cNvPr>
@@ -5080,7 +5080,7 @@
           <p:cNvPr id="3" name="テキスト ボックス 2">
             <a:extLst>
               <a:ext uri="{FF2B5EF4-FFF2-40B4-BE49-F238E27FC236}">
-                <a16:creationId xmlns:a16="http://schemas.microsoft.com/office/drawing/2014/main" id="{450FD3DD-89F4-BE49-F8B8-8BC2FFB95167}"/>
+                <a16:creationId xmlns:a16="http://schemas.microsoft.com/office/drawing/2014/main" id="{55165B0A-2C19-DDAC-9A43-C2B23E6679F9}"/>
               </a:ext>
             </a:extLst>
           </p:cNvPr>
@@ -5126,7 +5126,7 @@
           <p:cNvPr id="4" name="テキスト ボックス 3">
             <a:extLst>
               <a:ext uri="{FF2B5EF4-FFF2-40B4-BE49-F238E27FC236}">
-                <a16:creationId xmlns:a16="http://schemas.microsoft.com/office/drawing/2014/main" id="{D140A11E-5DD6-CBF9-C14E-E5100290EA08}"/>
+                <a16:creationId xmlns:a16="http://schemas.microsoft.com/office/drawing/2014/main" id="{FEAE517B-1005-C963-516D-45D0F11B49A1}"/>
               </a:ext>
             </a:extLst>
           </p:cNvPr>
@@ -5172,7 +5172,7 @@
           <p:cNvPr id="5" name="テキスト ボックス 4">
             <a:extLst>
               <a:ext uri="{FF2B5EF4-FFF2-40B4-BE49-F238E27FC236}">
-                <a16:creationId xmlns:a16="http://schemas.microsoft.com/office/drawing/2014/main" id="{5EE05954-17F1-5550-82B6-5C89B80636C3}"/>
+                <a16:creationId xmlns:a16="http://schemas.microsoft.com/office/drawing/2014/main" id="{E39597B9-A833-2685-EAF8-B2EF65BCD92E}"/>
               </a:ext>
             </a:extLst>
           </p:cNvPr>
@@ -5219,7 +5219,7 @@
             <a:hlinkClick r:id="" action="ppaction://media"/>
             <a:extLst>
               <a:ext uri="{FF2B5EF4-FFF2-40B4-BE49-F238E27FC236}">
-                <a16:creationId xmlns:a16="http://schemas.microsoft.com/office/drawing/2014/main" id="{627E01CA-C741-E754-FA15-23B27FC0AA47}"/>
+                <a16:creationId xmlns:a16="http://schemas.microsoft.com/office/drawing/2014/main" id="{2CB372C5-D34A-1E3E-30D2-5C589F2470CB}"/>
               </a:ext>
             </a:extLst>
           </p:cNvPr>
@@ -5254,7 +5254,7 @@
     </p:spTree>
     <p:extLst>
       <p:ext uri="{BB962C8B-B14F-4D97-AF65-F5344CB8AC3E}">
-        <p14:creationId xmlns:p14="http://schemas.microsoft.com/office/powerpoint/2010/main" val="3168546880"/>
+        <p14:creationId xmlns:p14="http://schemas.microsoft.com/office/powerpoint/2010/main" val="2860626785"/>
       </p:ext>
     </p:extLst>
   </p:cSld>
@@ -5378,7 +5378,7 @@
           <p:cNvPr id="2" name="テキスト ボックス 1">
             <a:extLst>
               <a:ext uri="{FF2B5EF4-FFF2-40B4-BE49-F238E27FC236}">
-                <a16:creationId xmlns:a16="http://schemas.microsoft.com/office/drawing/2014/main" id="{4C1DD282-3E68-AEB0-6A5C-274FC09CE283}"/>
+                <a16:creationId xmlns:a16="http://schemas.microsoft.com/office/drawing/2014/main" id="{1E853C12-A9E1-7B21-2A72-742A164AAC62}"/>
               </a:ext>
             </a:extLst>
           </p:cNvPr>
@@ -5424,7 +5424,7 @@
           <p:cNvPr id="3" name="テキスト ボックス 2">
             <a:extLst>
               <a:ext uri="{FF2B5EF4-FFF2-40B4-BE49-F238E27FC236}">
-                <a16:creationId xmlns:a16="http://schemas.microsoft.com/office/drawing/2014/main" id="{92548C97-81FD-68B0-38B3-2E342B27C407}"/>
+                <a16:creationId xmlns:a16="http://schemas.microsoft.com/office/drawing/2014/main" id="{CE9FE4DB-64AD-1B24-0CB3-DA6130C4B526}"/>
               </a:ext>
             </a:extLst>
           </p:cNvPr>
@@ -5470,7 +5470,7 @@
           <p:cNvPr id="4" name="テキスト ボックス 3">
             <a:extLst>
               <a:ext uri="{FF2B5EF4-FFF2-40B4-BE49-F238E27FC236}">
-                <a16:creationId xmlns:a16="http://schemas.microsoft.com/office/drawing/2014/main" id="{C02A555C-AD3C-4748-77E5-AC1FEB16282F}"/>
+                <a16:creationId xmlns:a16="http://schemas.microsoft.com/office/drawing/2014/main" id="{EE4354F0-C12B-D62B-3A83-AF3AA56F583E}"/>
               </a:ext>
             </a:extLst>
           </p:cNvPr>
@@ -5517,7 +5517,7 @@
           <p:cNvPr id="5" name="テキスト ボックス 4">
             <a:extLst>
               <a:ext uri="{FF2B5EF4-FFF2-40B4-BE49-F238E27FC236}">
-                <a16:creationId xmlns:a16="http://schemas.microsoft.com/office/drawing/2014/main" id="{600E379A-4CDA-83C8-5F6C-9166B9DF00EB}"/>
+                <a16:creationId xmlns:a16="http://schemas.microsoft.com/office/drawing/2014/main" id="{485F5193-1870-6F2A-463D-055A3B9B3DA8}"/>
               </a:ext>
             </a:extLst>
           </p:cNvPr>
@@ -5564,7 +5564,7 @@
             <a:hlinkClick r:id="" action="ppaction://media"/>
             <a:extLst>
               <a:ext uri="{FF2B5EF4-FFF2-40B4-BE49-F238E27FC236}">
-                <a16:creationId xmlns:a16="http://schemas.microsoft.com/office/drawing/2014/main" id="{A1236134-3AB7-05A4-5B52-DACFFD156789}"/>
+                <a16:creationId xmlns:a16="http://schemas.microsoft.com/office/drawing/2014/main" id="{F79D4558-4897-FC4E-7C3F-E1CC3EA0B737}"/>
               </a:ext>
             </a:extLst>
           </p:cNvPr>
@@ -5599,7 +5599,7 @@
     </p:spTree>
     <p:extLst>
       <p:ext uri="{BB962C8B-B14F-4D97-AF65-F5344CB8AC3E}">
-        <p14:creationId xmlns:p14="http://schemas.microsoft.com/office/powerpoint/2010/main" val="782596051"/>
+        <p14:creationId xmlns:p14="http://schemas.microsoft.com/office/powerpoint/2010/main" val="449606106"/>
       </p:ext>
     </p:extLst>
   </p:cSld>

--- a/public/videos/repositories/togo-kanri-tool/togo-kanri-tool-tech-preview.pptx
+++ b/public/videos/repositories/togo-kanri-tool/togo-kanri-tool-tech-preview.pptx
@@ -134,7 +134,7 @@
           <p:cNvPr id="2" name="タイトル 1">
             <a:extLst>
               <a:ext uri="{FF2B5EF4-FFF2-40B4-BE49-F238E27FC236}">
-                <a16:creationId xmlns:a16="http://schemas.microsoft.com/office/drawing/2014/main" id="{9AFE3E65-40C9-7BB2-3180-08BD0793F4EC}"/>
+                <a16:creationId xmlns:a16="http://schemas.microsoft.com/office/drawing/2014/main" id="{B00F4EE6-8876-A618-7502-D2DA4F38FE8F}"/>
               </a:ext>
             </a:extLst>
           </p:cNvPr>
@@ -171,7 +171,7 @@
           <p:cNvPr id="3" name="字幕 2">
             <a:extLst>
               <a:ext uri="{FF2B5EF4-FFF2-40B4-BE49-F238E27FC236}">
-                <a16:creationId xmlns:a16="http://schemas.microsoft.com/office/drawing/2014/main" id="{E103D128-0096-EAA3-D9FA-FBABAFA4B431}"/>
+                <a16:creationId xmlns:a16="http://schemas.microsoft.com/office/drawing/2014/main" id="{0EA11FBF-4E6C-6CE4-2F26-E045B2EF13B5}"/>
               </a:ext>
             </a:extLst>
           </p:cNvPr>
@@ -241,7 +241,7 @@
           <p:cNvPr id="4" name="日付プレースホルダー 3">
             <a:extLst>
               <a:ext uri="{FF2B5EF4-FFF2-40B4-BE49-F238E27FC236}">
-                <a16:creationId xmlns:a16="http://schemas.microsoft.com/office/drawing/2014/main" id="{0C450B4C-D489-62BB-42A5-E51E70CFC3CE}"/>
+                <a16:creationId xmlns:a16="http://schemas.microsoft.com/office/drawing/2014/main" id="{3165A4FB-8B1C-C7CF-04BD-CB99F62657B8}"/>
               </a:ext>
             </a:extLst>
           </p:cNvPr>
@@ -257,7 +257,7 @@
           <a:bodyPr/>
           <a:lstStyle/>
           <a:p>
-            <a:fld id="{548A954F-6878-4CBB-85A4-08585DEC05C9}" type="datetimeFigureOut">
+            <a:fld id="{70708204-28F4-47FC-A19E-27C932FDF4E9}" type="datetimeFigureOut">
               <a:rPr kumimoji="1" lang="ja-JP" altLang="en-US" smtClean="0"/>
               <a:t>2026/7/30</a:t>
             </a:fld>
@@ -270,7 +270,7 @@
           <p:cNvPr id="5" name="フッター プレースホルダー 4">
             <a:extLst>
               <a:ext uri="{FF2B5EF4-FFF2-40B4-BE49-F238E27FC236}">
-                <a16:creationId xmlns:a16="http://schemas.microsoft.com/office/drawing/2014/main" id="{906EEDDB-598C-D747-0130-D8890D855EC3}"/>
+                <a16:creationId xmlns:a16="http://schemas.microsoft.com/office/drawing/2014/main" id="{AA5E5B4D-4CC7-5256-17C1-30DD951E10B3}"/>
               </a:ext>
             </a:extLst>
           </p:cNvPr>
@@ -295,7 +295,7 @@
           <p:cNvPr id="6" name="スライド番号プレースホルダー 5">
             <a:extLst>
               <a:ext uri="{FF2B5EF4-FFF2-40B4-BE49-F238E27FC236}">
-                <a16:creationId xmlns:a16="http://schemas.microsoft.com/office/drawing/2014/main" id="{42600586-F2B9-D6CC-FE2A-8E1549A54E0B}"/>
+                <a16:creationId xmlns:a16="http://schemas.microsoft.com/office/drawing/2014/main" id="{CCF3CD24-CA55-675B-9241-C330EC16CB1E}"/>
               </a:ext>
             </a:extLst>
           </p:cNvPr>
@@ -311,7 +311,7 @@
           <a:bodyPr/>
           <a:lstStyle/>
           <a:p>
-            <a:fld id="{6B2941EB-36E4-47D0-8598-D5AE01190ABB}" type="slidenum">
+            <a:fld id="{859497F0-5F34-405D-A7F3-3E7DF3B2637B}" type="slidenum">
               <a:rPr kumimoji="1" lang="ja-JP" altLang="en-US" smtClean="0"/>
               <a:t>‹#›</a:t>
             </a:fld>
@@ -322,7 +322,7 @@
     </p:spTree>
     <p:extLst>
       <p:ext uri="{BB962C8B-B14F-4D97-AF65-F5344CB8AC3E}">
-        <p14:creationId xmlns:p14="http://schemas.microsoft.com/office/powerpoint/2010/main" val="2830542795"/>
+        <p14:creationId xmlns:p14="http://schemas.microsoft.com/office/powerpoint/2010/main" val="2518605197"/>
       </p:ext>
     </p:extLst>
   </p:cSld>
@@ -354,7 +354,7 @@
           <p:cNvPr id="2" name="タイトル 1">
             <a:extLst>
               <a:ext uri="{FF2B5EF4-FFF2-40B4-BE49-F238E27FC236}">
-                <a16:creationId xmlns:a16="http://schemas.microsoft.com/office/drawing/2014/main" id="{873F183B-51ED-787B-5953-9AEE5294ED3E}"/>
+                <a16:creationId xmlns:a16="http://schemas.microsoft.com/office/drawing/2014/main" id="{74182253-91B4-7C07-3F09-5F3FC3F7B073}"/>
               </a:ext>
             </a:extLst>
           </p:cNvPr>
@@ -382,7 +382,7 @@
           <p:cNvPr id="3" name="縦書きテキスト プレースホルダー 2">
             <a:extLst>
               <a:ext uri="{FF2B5EF4-FFF2-40B4-BE49-F238E27FC236}">
-                <a16:creationId xmlns:a16="http://schemas.microsoft.com/office/drawing/2014/main" id="{79955776-40F8-F2CC-0A22-FA665C9DF948}"/>
+                <a16:creationId xmlns:a16="http://schemas.microsoft.com/office/drawing/2014/main" id="{739F0287-7185-77F3-A62C-25DE51262353}"/>
               </a:ext>
             </a:extLst>
           </p:cNvPr>
@@ -471,7 +471,7 @@
           <p:cNvPr id="4" name="日付プレースホルダー 3">
             <a:extLst>
               <a:ext uri="{FF2B5EF4-FFF2-40B4-BE49-F238E27FC236}">
-                <a16:creationId xmlns:a16="http://schemas.microsoft.com/office/drawing/2014/main" id="{060BAEA9-F7F2-A728-126F-B8D4D650E10E}"/>
+                <a16:creationId xmlns:a16="http://schemas.microsoft.com/office/drawing/2014/main" id="{77E1B2F1-911A-F898-9911-4AB5D0AD12EC}"/>
               </a:ext>
             </a:extLst>
           </p:cNvPr>
@@ -487,7 +487,7 @@
           <a:bodyPr/>
           <a:lstStyle/>
           <a:p>
-            <a:fld id="{548A954F-6878-4CBB-85A4-08585DEC05C9}" type="datetimeFigureOut">
+            <a:fld id="{70708204-28F4-47FC-A19E-27C932FDF4E9}" type="datetimeFigureOut">
               <a:rPr kumimoji="1" lang="ja-JP" altLang="en-US" smtClean="0"/>
               <a:t>2026/7/30</a:t>
             </a:fld>
@@ -500,7 +500,7 @@
           <p:cNvPr id="5" name="フッター プレースホルダー 4">
             <a:extLst>
               <a:ext uri="{FF2B5EF4-FFF2-40B4-BE49-F238E27FC236}">
-                <a16:creationId xmlns:a16="http://schemas.microsoft.com/office/drawing/2014/main" id="{6FB6A6C4-74ED-558E-9477-822B29E5E77B}"/>
+                <a16:creationId xmlns:a16="http://schemas.microsoft.com/office/drawing/2014/main" id="{C0CA0E52-71CA-FEF7-3543-86F71F060258}"/>
               </a:ext>
             </a:extLst>
           </p:cNvPr>
@@ -525,7 +525,7 @@
           <p:cNvPr id="6" name="スライド番号プレースホルダー 5">
             <a:extLst>
               <a:ext uri="{FF2B5EF4-FFF2-40B4-BE49-F238E27FC236}">
-                <a16:creationId xmlns:a16="http://schemas.microsoft.com/office/drawing/2014/main" id="{7268CD16-B420-703A-CA92-56CD357E0B83}"/>
+                <a16:creationId xmlns:a16="http://schemas.microsoft.com/office/drawing/2014/main" id="{48091360-AA69-FD4B-3433-E3F2D895CEC9}"/>
               </a:ext>
             </a:extLst>
           </p:cNvPr>
@@ -541,7 +541,7 @@
           <a:bodyPr/>
           <a:lstStyle/>
           <a:p>
-            <a:fld id="{6B2941EB-36E4-47D0-8598-D5AE01190ABB}" type="slidenum">
+            <a:fld id="{859497F0-5F34-405D-A7F3-3E7DF3B2637B}" type="slidenum">
               <a:rPr kumimoji="1" lang="ja-JP" altLang="en-US" smtClean="0"/>
               <a:t>‹#›</a:t>
             </a:fld>
@@ -552,7 +552,7 @@
     </p:spTree>
     <p:extLst>
       <p:ext uri="{BB962C8B-B14F-4D97-AF65-F5344CB8AC3E}">
-        <p14:creationId xmlns:p14="http://schemas.microsoft.com/office/powerpoint/2010/main" val="2512260682"/>
+        <p14:creationId xmlns:p14="http://schemas.microsoft.com/office/powerpoint/2010/main" val="3764314020"/>
       </p:ext>
     </p:extLst>
   </p:cSld>
@@ -584,7 +584,7 @@
           <p:cNvPr id="2" name="縦書きタイトル 1">
             <a:extLst>
               <a:ext uri="{FF2B5EF4-FFF2-40B4-BE49-F238E27FC236}">
-                <a16:creationId xmlns:a16="http://schemas.microsoft.com/office/drawing/2014/main" id="{53816280-9217-02A5-EBA8-A987163463F8}"/>
+                <a16:creationId xmlns:a16="http://schemas.microsoft.com/office/drawing/2014/main" id="{3FB60E49-913C-CB49-61B8-5EBDB6C631B5}"/>
               </a:ext>
             </a:extLst>
           </p:cNvPr>
@@ -617,7 +617,7 @@
           <p:cNvPr id="3" name="縦書きテキスト プレースホルダー 2">
             <a:extLst>
               <a:ext uri="{FF2B5EF4-FFF2-40B4-BE49-F238E27FC236}">
-                <a16:creationId xmlns:a16="http://schemas.microsoft.com/office/drawing/2014/main" id="{5A2385CF-84FC-4ABE-0C2A-F55AB6649C1E}"/>
+                <a16:creationId xmlns:a16="http://schemas.microsoft.com/office/drawing/2014/main" id="{5B20BBAC-7B82-4EB0-5301-710537322FA3}"/>
               </a:ext>
             </a:extLst>
           </p:cNvPr>
@@ -711,7 +711,7 @@
           <p:cNvPr id="4" name="日付プレースホルダー 3">
             <a:extLst>
               <a:ext uri="{FF2B5EF4-FFF2-40B4-BE49-F238E27FC236}">
-                <a16:creationId xmlns:a16="http://schemas.microsoft.com/office/drawing/2014/main" id="{5BB09E59-C170-BCEF-F855-D53328EF3801}"/>
+                <a16:creationId xmlns:a16="http://schemas.microsoft.com/office/drawing/2014/main" id="{4C782A91-961F-D9AB-EAE2-4B496821237A}"/>
               </a:ext>
             </a:extLst>
           </p:cNvPr>
@@ -727,7 +727,7 @@
           <a:bodyPr/>
           <a:lstStyle/>
           <a:p>
-            <a:fld id="{548A954F-6878-4CBB-85A4-08585DEC05C9}" type="datetimeFigureOut">
+            <a:fld id="{70708204-28F4-47FC-A19E-27C932FDF4E9}" type="datetimeFigureOut">
               <a:rPr kumimoji="1" lang="ja-JP" altLang="en-US" smtClean="0"/>
               <a:t>2026/7/30</a:t>
             </a:fld>
@@ -740,7 +740,7 @@
           <p:cNvPr id="5" name="フッター プレースホルダー 4">
             <a:extLst>
               <a:ext uri="{FF2B5EF4-FFF2-40B4-BE49-F238E27FC236}">
-                <a16:creationId xmlns:a16="http://schemas.microsoft.com/office/drawing/2014/main" id="{E3927A0D-6FE2-9629-5698-99B387EEEA93}"/>
+                <a16:creationId xmlns:a16="http://schemas.microsoft.com/office/drawing/2014/main" id="{B81D5391-DAA6-4CBF-B6B6-5B9076FCB379}"/>
               </a:ext>
             </a:extLst>
           </p:cNvPr>
@@ -765,7 +765,7 @@
           <p:cNvPr id="6" name="スライド番号プレースホルダー 5">
             <a:extLst>
               <a:ext uri="{FF2B5EF4-FFF2-40B4-BE49-F238E27FC236}">
-                <a16:creationId xmlns:a16="http://schemas.microsoft.com/office/drawing/2014/main" id="{DC94D8C9-5762-B4F3-AFC9-D0A3BB9A0B6A}"/>
+                <a16:creationId xmlns:a16="http://schemas.microsoft.com/office/drawing/2014/main" id="{43BB0224-D62A-F693-C4AF-0075204C5497}"/>
               </a:ext>
             </a:extLst>
           </p:cNvPr>
@@ -781,7 +781,7 @@
           <a:bodyPr/>
           <a:lstStyle/>
           <a:p>
-            <a:fld id="{6B2941EB-36E4-47D0-8598-D5AE01190ABB}" type="slidenum">
+            <a:fld id="{859497F0-5F34-405D-A7F3-3E7DF3B2637B}" type="slidenum">
               <a:rPr kumimoji="1" lang="ja-JP" altLang="en-US" smtClean="0"/>
               <a:t>‹#›</a:t>
             </a:fld>
@@ -792,7 +792,7 @@
     </p:spTree>
     <p:extLst>
       <p:ext uri="{BB962C8B-B14F-4D97-AF65-F5344CB8AC3E}">
-        <p14:creationId xmlns:p14="http://schemas.microsoft.com/office/powerpoint/2010/main" val="3014721772"/>
+        <p14:creationId xmlns:p14="http://schemas.microsoft.com/office/powerpoint/2010/main" val="1731546225"/>
       </p:ext>
     </p:extLst>
   </p:cSld>
@@ -824,7 +824,7 @@
           <p:cNvPr id="2" name="タイトル 1">
             <a:extLst>
               <a:ext uri="{FF2B5EF4-FFF2-40B4-BE49-F238E27FC236}">
-                <a16:creationId xmlns:a16="http://schemas.microsoft.com/office/drawing/2014/main" id="{34D7C9B3-C66C-B874-7520-E093EF1C9A51}"/>
+                <a16:creationId xmlns:a16="http://schemas.microsoft.com/office/drawing/2014/main" id="{B74DB692-F540-29E4-1C4F-2E509C077559}"/>
               </a:ext>
             </a:extLst>
           </p:cNvPr>
@@ -852,7 +852,7 @@
           <p:cNvPr id="3" name="コンテンツ プレースホルダー 2">
             <a:extLst>
               <a:ext uri="{FF2B5EF4-FFF2-40B4-BE49-F238E27FC236}">
-                <a16:creationId xmlns:a16="http://schemas.microsoft.com/office/drawing/2014/main" id="{7328FB8A-C258-3E93-E360-281D5B8E0CA3}"/>
+                <a16:creationId xmlns:a16="http://schemas.microsoft.com/office/drawing/2014/main" id="{78BC8138-8D5E-BC31-9888-4BE3836493BD}"/>
               </a:ext>
             </a:extLst>
           </p:cNvPr>
@@ -941,7 +941,7 @@
           <p:cNvPr id="4" name="日付プレースホルダー 3">
             <a:extLst>
               <a:ext uri="{FF2B5EF4-FFF2-40B4-BE49-F238E27FC236}">
-                <a16:creationId xmlns:a16="http://schemas.microsoft.com/office/drawing/2014/main" id="{72366E61-CC05-420C-95CC-7AD784424F6E}"/>
+                <a16:creationId xmlns:a16="http://schemas.microsoft.com/office/drawing/2014/main" id="{4B48C9EA-5899-13A7-73C8-D87E44A10266}"/>
               </a:ext>
             </a:extLst>
           </p:cNvPr>
@@ -957,7 +957,7 @@
           <a:bodyPr/>
           <a:lstStyle/>
           <a:p>
-            <a:fld id="{548A954F-6878-4CBB-85A4-08585DEC05C9}" type="datetimeFigureOut">
+            <a:fld id="{70708204-28F4-47FC-A19E-27C932FDF4E9}" type="datetimeFigureOut">
               <a:rPr kumimoji="1" lang="ja-JP" altLang="en-US" smtClean="0"/>
               <a:t>2026/7/30</a:t>
             </a:fld>
@@ -970,7 +970,7 @@
           <p:cNvPr id="5" name="フッター プレースホルダー 4">
             <a:extLst>
               <a:ext uri="{FF2B5EF4-FFF2-40B4-BE49-F238E27FC236}">
-                <a16:creationId xmlns:a16="http://schemas.microsoft.com/office/drawing/2014/main" id="{0CE58966-3D1E-8DBE-79B7-3E65B872128D}"/>
+                <a16:creationId xmlns:a16="http://schemas.microsoft.com/office/drawing/2014/main" id="{B66EDA6B-E587-FEC3-1B01-B44391490050}"/>
               </a:ext>
             </a:extLst>
           </p:cNvPr>
@@ -995,7 +995,7 @@
           <p:cNvPr id="6" name="スライド番号プレースホルダー 5">
             <a:extLst>
               <a:ext uri="{FF2B5EF4-FFF2-40B4-BE49-F238E27FC236}">
-                <a16:creationId xmlns:a16="http://schemas.microsoft.com/office/drawing/2014/main" id="{616AABA5-EE36-7490-C4C9-2A830DA8BF63}"/>
+                <a16:creationId xmlns:a16="http://schemas.microsoft.com/office/drawing/2014/main" id="{DB814F14-94C0-4773-31AA-D56E846A1801}"/>
               </a:ext>
             </a:extLst>
           </p:cNvPr>
@@ -1011,7 +1011,7 @@
           <a:bodyPr/>
           <a:lstStyle/>
           <a:p>
-            <a:fld id="{6B2941EB-36E4-47D0-8598-D5AE01190ABB}" type="slidenum">
+            <a:fld id="{859497F0-5F34-405D-A7F3-3E7DF3B2637B}" type="slidenum">
               <a:rPr kumimoji="1" lang="ja-JP" altLang="en-US" smtClean="0"/>
               <a:t>‹#›</a:t>
             </a:fld>
@@ -1022,7 +1022,7 @@
     </p:spTree>
     <p:extLst>
       <p:ext uri="{BB962C8B-B14F-4D97-AF65-F5344CB8AC3E}">
-        <p14:creationId xmlns:p14="http://schemas.microsoft.com/office/powerpoint/2010/main" val="2196251433"/>
+        <p14:creationId xmlns:p14="http://schemas.microsoft.com/office/powerpoint/2010/main" val="22545073"/>
       </p:ext>
     </p:extLst>
   </p:cSld>
@@ -1054,7 +1054,7 @@
           <p:cNvPr id="2" name="タイトル 1">
             <a:extLst>
               <a:ext uri="{FF2B5EF4-FFF2-40B4-BE49-F238E27FC236}">
-                <a16:creationId xmlns:a16="http://schemas.microsoft.com/office/drawing/2014/main" id="{45BD7E0F-61C5-0B79-BB8E-8714BEB0252B}"/>
+                <a16:creationId xmlns:a16="http://schemas.microsoft.com/office/drawing/2014/main" id="{8B4425D0-27A4-8FD1-A645-D4EC182897D3}"/>
               </a:ext>
             </a:extLst>
           </p:cNvPr>
@@ -1091,7 +1091,7 @@
           <p:cNvPr id="3" name="テキスト プレースホルダー 2">
             <a:extLst>
               <a:ext uri="{FF2B5EF4-FFF2-40B4-BE49-F238E27FC236}">
-                <a16:creationId xmlns:a16="http://schemas.microsoft.com/office/drawing/2014/main" id="{0055680A-8AC1-7AFE-C4BC-DE83AA5DEB5E}"/>
+                <a16:creationId xmlns:a16="http://schemas.microsoft.com/office/drawing/2014/main" id="{DCD1F0F6-1E2F-3FB4-7E0D-DD6EC7106134}"/>
               </a:ext>
             </a:extLst>
           </p:cNvPr>
@@ -1216,7 +1216,7 @@
           <p:cNvPr id="4" name="日付プレースホルダー 3">
             <a:extLst>
               <a:ext uri="{FF2B5EF4-FFF2-40B4-BE49-F238E27FC236}">
-                <a16:creationId xmlns:a16="http://schemas.microsoft.com/office/drawing/2014/main" id="{29AEDFA0-7958-7655-D10B-B8437EB6FE43}"/>
+                <a16:creationId xmlns:a16="http://schemas.microsoft.com/office/drawing/2014/main" id="{B3111325-256E-3F3F-9E9E-511852ECB6D6}"/>
               </a:ext>
             </a:extLst>
           </p:cNvPr>
@@ -1232,7 +1232,7 @@
           <a:bodyPr/>
           <a:lstStyle/>
           <a:p>
-            <a:fld id="{548A954F-6878-4CBB-85A4-08585DEC05C9}" type="datetimeFigureOut">
+            <a:fld id="{70708204-28F4-47FC-A19E-27C932FDF4E9}" type="datetimeFigureOut">
               <a:rPr kumimoji="1" lang="ja-JP" altLang="en-US" smtClean="0"/>
               <a:t>2026/7/30</a:t>
             </a:fld>
@@ -1245,7 +1245,7 @@
           <p:cNvPr id="5" name="フッター プレースホルダー 4">
             <a:extLst>
               <a:ext uri="{FF2B5EF4-FFF2-40B4-BE49-F238E27FC236}">
-                <a16:creationId xmlns:a16="http://schemas.microsoft.com/office/drawing/2014/main" id="{D3A54FC7-53C2-96C8-8A0D-04C8D6583C49}"/>
+                <a16:creationId xmlns:a16="http://schemas.microsoft.com/office/drawing/2014/main" id="{FACEB060-DD31-4C81-3991-A05E8A1A3119}"/>
               </a:ext>
             </a:extLst>
           </p:cNvPr>
@@ -1270,7 +1270,7 @@
           <p:cNvPr id="6" name="スライド番号プレースホルダー 5">
             <a:extLst>
               <a:ext uri="{FF2B5EF4-FFF2-40B4-BE49-F238E27FC236}">
-                <a16:creationId xmlns:a16="http://schemas.microsoft.com/office/drawing/2014/main" id="{0728C0F3-365B-9863-143C-42AC40A34AD9}"/>
+                <a16:creationId xmlns:a16="http://schemas.microsoft.com/office/drawing/2014/main" id="{2F39EEA7-D8C9-1EF3-7A07-D4ABB8D8D14C}"/>
               </a:ext>
             </a:extLst>
           </p:cNvPr>
@@ -1286,7 +1286,7 @@
           <a:bodyPr/>
           <a:lstStyle/>
           <a:p>
-            <a:fld id="{6B2941EB-36E4-47D0-8598-D5AE01190ABB}" type="slidenum">
+            <a:fld id="{859497F0-5F34-405D-A7F3-3E7DF3B2637B}" type="slidenum">
               <a:rPr kumimoji="1" lang="ja-JP" altLang="en-US" smtClean="0"/>
               <a:t>‹#›</a:t>
             </a:fld>
@@ -1297,7 +1297,7 @@
     </p:spTree>
     <p:extLst>
       <p:ext uri="{BB962C8B-B14F-4D97-AF65-F5344CB8AC3E}">
-        <p14:creationId xmlns:p14="http://schemas.microsoft.com/office/powerpoint/2010/main" val="3866340255"/>
+        <p14:creationId xmlns:p14="http://schemas.microsoft.com/office/powerpoint/2010/main" val="3532374513"/>
       </p:ext>
     </p:extLst>
   </p:cSld>
@@ -1329,7 +1329,7 @@
           <p:cNvPr id="2" name="タイトル 1">
             <a:extLst>
               <a:ext uri="{FF2B5EF4-FFF2-40B4-BE49-F238E27FC236}">
-                <a16:creationId xmlns:a16="http://schemas.microsoft.com/office/drawing/2014/main" id="{5362B1BE-850B-6CD7-0CE8-1176CDC6E1FE}"/>
+                <a16:creationId xmlns:a16="http://schemas.microsoft.com/office/drawing/2014/main" id="{1DFAFE55-11BF-58BC-F0B0-147D73D2AD76}"/>
               </a:ext>
             </a:extLst>
           </p:cNvPr>
@@ -1357,7 +1357,7 @@
           <p:cNvPr id="3" name="コンテンツ プレースホルダー 2">
             <a:extLst>
               <a:ext uri="{FF2B5EF4-FFF2-40B4-BE49-F238E27FC236}">
-                <a16:creationId xmlns:a16="http://schemas.microsoft.com/office/drawing/2014/main" id="{A6C55DD7-B014-DF02-061B-4521030A9824}"/>
+                <a16:creationId xmlns:a16="http://schemas.microsoft.com/office/drawing/2014/main" id="{D1332E7D-9944-2E7E-B2D7-F384F39F797E}"/>
               </a:ext>
             </a:extLst>
           </p:cNvPr>
@@ -1451,7 +1451,7 @@
           <p:cNvPr id="4" name="コンテンツ プレースホルダー 3">
             <a:extLst>
               <a:ext uri="{FF2B5EF4-FFF2-40B4-BE49-F238E27FC236}">
-                <a16:creationId xmlns:a16="http://schemas.microsoft.com/office/drawing/2014/main" id="{CB3D71D2-ED60-594E-FE90-8D988DAE980F}"/>
+                <a16:creationId xmlns:a16="http://schemas.microsoft.com/office/drawing/2014/main" id="{413E126B-F0A3-663E-F934-0B0B5B7D7F6F}"/>
               </a:ext>
             </a:extLst>
           </p:cNvPr>
@@ -1545,7 +1545,7 @@
           <p:cNvPr id="5" name="日付プレースホルダー 4">
             <a:extLst>
               <a:ext uri="{FF2B5EF4-FFF2-40B4-BE49-F238E27FC236}">
-                <a16:creationId xmlns:a16="http://schemas.microsoft.com/office/drawing/2014/main" id="{FEC10EB2-0BCE-2A1F-D2FF-DBC201BD118D}"/>
+                <a16:creationId xmlns:a16="http://schemas.microsoft.com/office/drawing/2014/main" id="{9C4B7EFA-B8E6-6069-86D3-B19D70B700B4}"/>
               </a:ext>
             </a:extLst>
           </p:cNvPr>
@@ -1561,7 +1561,7 @@
           <a:bodyPr/>
           <a:lstStyle/>
           <a:p>
-            <a:fld id="{548A954F-6878-4CBB-85A4-08585DEC05C9}" type="datetimeFigureOut">
+            <a:fld id="{70708204-28F4-47FC-A19E-27C932FDF4E9}" type="datetimeFigureOut">
               <a:rPr kumimoji="1" lang="ja-JP" altLang="en-US" smtClean="0"/>
               <a:t>2026/7/30</a:t>
             </a:fld>
@@ -1574,7 +1574,7 @@
           <p:cNvPr id="6" name="フッター プレースホルダー 5">
             <a:extLst>
               <a:ext uri="{FF2B5EF4-FFF2-40B4-BE49-F238E27FC236}">
-                <a16:creationId xmlns:a16="http://schemas.microsoft.com/office/drawing/2014/main" id="{D0F0644A-0C53-FBE0-0CE5-1B68C9348064}"/>
+                <a16:creationId xmlns:a16="http://schemas.microsoft.com/office/drawing/2014/main" id="{DD8C6C00-987F-8851-547B-3415A8C399B5}"/>
               </a:ext>
             </a:extLst>
           </p:cNvPr>
@@ -1599,7 +1599,7 @@
           <p:cNvPr id="7" name="スライド番号プレースホルダー 6">
             <a:extLst>
               <a:ext uri="{FF2B5EF4-FFF2-40B4-BE49-F238E27FC236}">
-                <a16:creationId xmlns:a16="http://schemas.microsoft.com/office/drawing/2014/main" id="{DFEF56E8-7221-BE87-D783-22EB051D8389}"/>
+                <a16:creationId xmlns:a16="http://schemas.microsoft.com/office/drawing/2014/main" id="{A649BC1B-F461-29A4-D190-A21FA5BCF83F}"/>
               </a:ext>
             </a:extLst>
           </p:cNvPr>
@@ -1615,7 +1615,7 @@
           <a:bodyPr/>
           <a:lstStyle/>
           <a:p>
-            <a:fld id="{6B2941EB-36E4-47D0-8598-D5AE01190ABB}" type="slidenum">
+            <a:fld id="{859497F0-5F34-405D-A7F3-3E7DF3B2637B}" type="slidenum">
               <a:rPr kumimoji="1" lang="ja-JP" altLang="en-US" smtClean="0"/>
               <a:t>‹#›</a:t>
             </a:fld>
@@ -1626,7 +1626,7 @@
     </p:spTree>
     <p:extLst>
       <p:ext uri="{BB962C8B-B14F-4D97-AF65-F5344CB8AC3E}">
-        <p14:creationId xmlns:p14="http://schemas.microsoft.com/office/powerpoint/2010/main" val="822162337"/>
+        <p14:creationId xmlns:p14="http://schemas.microsoft.com/office/powerpoint/2010/main" val="396184302"/>
       </p:ext>
     </p:extLst>
   </p:cSld>
@@ -1658,7 +1658,7 @@
           <p:cNvPr id="2" name="タイトル 1">
             <a:extLst>
               <a:ext uri="{FF2B5EF4-FFF2-40B4-BE49-F238E27FC236}">
-                <a16:creationId xmlns:a16="http://schemas.microsoft.com/office/drawing/2014/main" id="{D3C0E66F-8E83-EADD-7231-19743B9BE720}"/>
+                <a16:creationId xmlns:a16="http://schemas.microsoft.com/office/drawing/2014/main" id="{84252190-6698-647F-2CF6-737A133094C4}"/>
               </a:ext>
             </a:extLst>
           </p:cNvPr>
@@ -1691,7 +1691,7 @@
           <p:cNvPr id="3" name="テキスト プレースホルダー 2">
             <a:extLst>
               <a:ext uri="{FF2B5EF4-FFF2-40B4-BE49-F238E27FC236}">
-                <a16:creationId xmlns:a16="http://schemas.microsoft.com/office/drawing/2014/main" id="{3693617B-51BB-882A-9138-B49C08B3DC89}"/>
+                <a16:creationId xmlns:a16="http://schemas.microsoft.com/office/drawing/2014/main" id="{8965B709-7D62-8652-796D-065BD52BDFD4}"/>
               </a:ext>
             </a:extLst>
           </p:cNvPr>
@@ -1762,7 +1762,7 @@
           <p:cNvPr id="4" name="コンテンツ プレースホルダー 3">
             <a:extLst>
               <a:ext uri="{FF2B5EF4-FFF2-40B4-BE49-F238E27FC236}">
-                <a16:creationId xmlns:a16="http://schemas.microsoft.com/office/drawing/2014/main" id="{170AA2EA-FB85-4C74-0299-18BC609FEEBB}"/>
+                <a16:creationId xmlns:a16="http://schemas.microsoft.com/office/drawing/2014/main" id="{547DA133-C188-C2D7-6DC0-9C5AC69C1528}"/>
               </a:ext>
             </a:extLst>
           </p:cNvPr>
@@ -1856,7 +1856,7 @@
           <p:cNvPr id="5" name="テキスト プレースホルダー 4">
             <a:extLst>
               <a:ext uri="{FF2B5EF4-FFF2-40B4-BE49-F238E27FC236}">
-                <a16:creationId xmlns:a16="http://schemas.microsoft.com/office/drawing/2014/main" id="{B4D26EC6-A440-D18E-E95D-2A4A82CD8417}"/>
+                <a16:creationId xmlns:a16="http://schemas.microsoft.com/office/drawing/2014/main" id="{422F621E-55A1-1B46-19BD-2CAB8F4A8BD6}"/>
               </a:ext>
             </a:extLst>
           </p:cNvPr>
@@ -1927,7 +1927,7 @@
           <p:cNvPr id="6" name="コンテンツ プレースホルダー 5">
             <a:extLst>
               <a:ext uri="{FF2B5EF4-FFF2-40B4-BE49-F238E27FC236}">
-                <a16:creationId xmlns:a16="http://schemas.microsoft.com/office/drawing/2014/main" id="{35E62FAE-0E86-4334-8D23-B97011ACBCEC}"/>
+                <a16:creationId xmlns:a16="http://schemas.microsoft.com/office/drawing/2014/main" id="{225E6604-61F2-BC0A-CCB4-B6D217D13F82}"/>
               </a:ext>
             </a:extLst>
           </p:cNvPr>
@@ -2021,7 +2021,7 @@
           <p:cNvPr id="7" name="日付プレースホルダー 6">
             <a:extLst>
               <a:ext uri="{FF2B5EF4-FFF2-40B4-BE49-F238E27FC236}">
-                <a16:creationId xmlns:a16="http://schemas.microsoft.com/office/drawing/2014/main" id="{DE3BF167-6C6A-3120-73C3-C76F2BD17331}"/>
+                <a16:creationId xmlns:a16="http://schemas.microsoft.com/office/drawing/2014/main" id="{EEB8089E-D57F-4F00-D7EE-1A59E3E7C2EA}"/>
               </a:ext>
             </a:extLst>
           </p:cNvPr>
@@ -2037,7 +2037,7 @@
           <a:bodyPr/>
           <a:lstStyle/>
           <a:p>
-            <a:fld id="{548A954F-6878-4CBB-85A4-08585DEC05C9}" type="datetimeFigureOut">
+            <a:fld id="{70708204-28F4-47FC-A19E-27C932FDF4E9}" type="datetimeFigureOut">
               <a:rPr kumimoji="1" lang="ja-JP" altLang="en-US" smtClean="0"/>
               <a:t>2026/7/30</a:t>
             </a:fld>
@@ -2050,7 +2050,7 @@
           <p:cNvPr id="8" name="フッター プレースホルダー 7">
             <a:extLst>
               <a:ext uri="{FF2B5EF4-FFF2-40B4-BE49-F238E27FC236}">
-                <a16:creationId xmlns:a16="http://schemas.microsoft.com/office/drawing/2014/main" id="{AE8FCFD4-9198-6228-3B05-67D923FEC67E}"/>
+                <a16:creationId xmlns:a16="http://schemas.microsoft.com/office/drawing/2014/main" id="{E3954074-E3D1-5EC0-8A41-A3D3AFF3A6FB}"/>
               </a:ext>
             </a:extLst>
           </p:cNvPr>
@@ -2075,7 +2075,7 @@
           <p:cNvPr id="9" name="スライド番号プレースホルダー 8">
             <a:extLst>
               <a:ext uri="{FF2B5EF4-FFF2-40B4-BE49-F238E27FC236}">
-                <a16:creationId xmlns:a16="http://schemas.microsoft.com/office/drawing/2014/main" id="{428B019B-D3EE-59FF-7D4A-4484489C3553}"/>
+                <a16:creationId xmlns:a16="http://schemas.microsoft.com/office/drawing/2014/main" id="{60FA2B8C-8221-0FA3-BD64-F4DA83505BDE}"/>
               </a:ext>
             </a:extLst>
           </p:cNvPr>
@@ -2091,7 +2091,7 @@
           <a:bodyPr/>
           <a:lstStyle/>
           <a:p>
-            <a:fld id="{6B2941EB-36E4-47D0-8598-D5AE01190ABB}" type="slidenum">
+            <a:fld id="{859497F0-5F34-405D-A7F3-3E7DF3B2637B}" type="slidenum">
               <a:rPr kumimoji="1" lang="ja-JP" altLang="en-US" smtClean="0"/>
               <a:t>‹#›</a:t>
             </a:fld>
@@ -2102,7 +2102,7 @@
     </p:spTree>
     <p:extLst>
       <p:ext uri="{BB962C8B-B14F-4D97-AF65-F5344CB8AC3E}">
-        <p14:creationId xmlns:p14="http://schemas.microsoft.com/office/powerpoint/2010/main" val="2494259117"/>
+        <p14:creationId xmlns:p14="http://schemas.microsoft.com/office/powerpoint/2010/main" val="1712026362"/>
       </p:ext>
     </p:extLst>
   </p:cSld>
@@ -2134,7 +2134,7 @@
           <p:cNvPr id="2" name="タイトル 1">
             <a:extLst>
               <a:ext uri="{FF2B5EF4-FFF2-40B4-BE49-F238E27FC236}">
-                <a16:creationId xmlns:a16="http://schemas.microsoft.com/office/drawing/2014/main" id="{F9637763-5047-A4CF-3719-EE5667D402E4}"/>
+                <a16:creationId xmlns:a16="http://schemas.microsoft.com/office/drawing/2014/main" id="{951DC4D6-9086-ABD4-AC04-65DCE778E4AC}"/>
               </a:ext>
             </a:extLst>
           </p:cNvPr>
@@ -2162,7 +2162,7 @@
           <p:cNvPr id="3" name="日付プレースホルダー 2">
             <a:extLst>
               <a:ext uri="{FF2B5EF4-FFF2-40B4-BE49-F238E27FC236}">
-                <a16:creationId xmlns:a16="http://schemas.microsoft.com/office/drawing/2014/main" id="{8D619AD6-F8A4-D393-1013-AE74222F08FA}"/>
+                <a16:creationId xmlns:a16="http://schemas.microsoft.com/office/drawing/2014/main" id="{AF6C699F-D8FF-2C53-74FD-035EF105C1FD}"/>
               </a:ext>
             </a:extLst>
           </p:cNvPr>
@@ -2178,7 +2178,7 @@
           <a:bodyPr/>
           <a:lstStyle/>
           <a:p>
-            <a:fld id="{548A954F-6878-4CBB-85A4-08585DEC05C9}" type="datetimeFigureOut">
+            <a:fld id="{70708204-28F4-47FC-A19E-27C932FDF4E9}" type="datetimeFigureOut">
               <a:rPr kumimoji="1" lang="ja-JP" altLang="en-US" smtClean="0"/>
               <a:t>2026/7/30</a:t>
             </a:fld>
@@ -2191,7 +2191,7 @@
           <p:cNvPr id="4" name="フッター プレースホルダー 3">
             <a:extLst>
               <a:ext uri="{FF2B5EF4-FFF2-40B4-BE49-F238E27FC236}">
-                <a16:creationId xmlns:a16="http://schemas.microsoft.com/office/drawing/2014/main" id="{83B67A3A-D5D7-48BA-323D-A12E9448E5AB}"/>
+                <a16:creationId xmlns:a16="http://schemas.microsoft.com/office/drawing/2014/main" id="{CC7E91FE-B66F-ADAA-9DB6-6B36BB630131}"/>
               </a:ext>
             </a:extLst>
           </p:cNvPr>
@@ -2216,7 +2216,7 @@
           <p:cNvPr id="5" name="スライド番号プレースホルダー 4">
             <a:extLst>
               <a:ext uri="{FF2B5EF4-FFF2-40B4-BE49-F238E27FC236}">
-                <a16:creationId xmlns:a16="http://schemas.microsoft.com/office/drawing/2014/main" id="{21C312EA-728B-F85C-BF42-BA5C92CC6019}"/>
+                <a16:creationId xmlns:a16="http://schemas.microsoft.com/office/drawing/2014/main" id="{537DD7C3-1FAC-8396-2697-63E18EA72A88}"/>
               </a:ext>
             </a:extLst>
           </p:cNvPr>
@@ -2232,7 +2232,7 @@
           <a:bodyPr/>
           <a:lstStyle/>
           <a:p>
-            <a:fld id="{6B2941EB-36E4-47D0-8598-D5AE01190ABB}" type="slidenum">
+            <a:fld id="{859497F0-5F34-405D-A7F3-3E7DF3B2637B}" type="slidenum">
               <a:rPr kumimoji="1" lang="ja-JP" altLang="en-US" smtClean="0"/>
               <a:t>‹#›</a:t>
             </a:fld>
@@ -2243,7 +2243,7 @@
     </p:spTree>
     <p:extLst>
       <p:ext uri="{BB962C8B-B14F-4D97-AF65-F5344CB8AC3E}">
-        <p14:creationId xmlns:p14="http://schemas.microsoft.com/office/powerpoint/2010/main" val="2578242479"/>
+        <p14:creationId xmlns:p14="http://schemas.microsoft.com/office/powerpoint/2010/main" val="1988273966"/>
       </p:ext>
     </p:extLst>
   </p:cSld>
@@ -2275,7 +2275,7 @@
           <p:cNvPr id="2" name="日付プレースホルダー 1">
             <a:extLst>
               <a:ext uri="{FF2B5EF4-FFF2-40B4-BE49-F238E27FC236}">
-                <a16:creationId xmlns:a16="http://schemas.microsoft.com/office/drawing/2014/main" id="{BC0BC18D-F5F2-0073-DEC0-3D592593C7A7}"/>
+                <a16:creationId xmlns:a16="http://schemas.microsoft.com/office/drawing/2014/main" id="{C6E06601-3728-A1A9-3B5D-25937868E759}"/>
               </a:ext>
             </a:extLst>
           </p:cNvPr>
@@ -2291,7 +2291,7 @@
           <a:bodyPr/>
           <a:lstStyle/>
           <a:p>
-            <a:fld id="{548A954F-6878-4CBB-85A4-08585DEC05C9}" type="datetimeFigureOut">
+            <a:fld id="{70708204-28F4-47FC-A19E-27C932FDF4E9}" type="datetimeFigureOut">
               <a:rPr kumimoji="1" lang="ja-JP" altLang="en-US" smtClean="0"/>
               <a:t>2026/7/30</a:t>
             </a:fld>
@@ -2304,7 +2304,7 @@
           <p:cNvPr id="3" name="フッター プレースホルダー 2">
             <a:extLst>
               <a:ext uri="{FF2B5EF4-FFF2-40B4-BE49-F238E27FC236}">
-                <a16:creationId xmlns:a16="http://schemas.microsoft.com/office/drawing/2014/main" id="{32116A6B-907F-4EC9-3BB4-5EC60720B900}"/>
+                <a16:creationId xmlns:a16="http://schemas.microsoft.com/office/drawing/2014/main" id="{BB81FD58-04F7-5E9A-E028-40FFA1DDABE9}"/>
               </a:ext>
             </a:extLst>
           </p:cNvPr>
@@ -2329,7 +2329,7 @@
           <p:cNvPr id="4" name="スライド番号プレースホルダー 3">
             <a:extLst>
               <a:ext uri="{FF2B5EF4-FFF2-40B4-BE49-F238E27FC236}">
-                <a16:creationId xmlns:a16="http://schemas.microsoft.com/office/drawing/2014/main" id="{23440B8F-7ECC-D508-6257-4DB928F4CCAC}"/>
+                <a16:creationId xmlns:a16="http://schemas.microsoft.com/office/drawing/2014/main" id="{94A3D8D9-1BAC-5FE9-C7EB-CBB5109A56A7}"/>
               </a:ext>
             </a:extLst>
           </p:cNvPr>
@@ -2345,7 +2345,7 @@
           <a:bodyPr/>
           <a:lstStyle/>
           <a:p>
-            <a:fld id="{6B2941EB-36E4-47D0-8598-D5AE01190ABB}" type="slidenum">
+            <a:fld id="{859497F0-5F34-405D-A7F3-3E7DF3B2637B}" type="slidenum">
               <a:rPr kumimoji="1" lang="ja-JP" altLang="en-US" smtClean="0"/>
               <a:t>‹#›</a:t>
             </a:fld>
@@ -2356,7 +2356,7 @@
     </p:spTree>
     <p:extLst>
       <p:ext uri="{BB962C8B-B14F-4D97-AF65-F5344CB8AC3E}">
-        <p14:creationId xmlns:p14="http://schemas.microsoft.com/office/powerpoint/2010/main" val="2207557954"/>
+        <p14:creationId xmlns:p14="http://schemas.microsoft.com/office/powerpoint/2010/main" val="1780789149"/>
       </p:ext>
     </p:extLst>
   </p:cSld>
@@ -2388,7 +2388,7 @@
           <p:cNvPr id="2" name="タイトル 1">
             <a:extLst>
               <a:ext uri="{FF2B5EF4-FFF2-40B4-BE49-F238E27FC236}">
-                <a16:creationId xmlns:a16="http://schemas.microsoft.com/office/drawing/2014/main" id="{C3D9FCF9-572E-E8C8-5962-12A89624A3C1}"/>
+                <a16:creationId xmlns:a16="http://schemas.microsoft.com/office/drawing/2014/main" id="{C9D18027-EE59-6955-A03D-BBB5A535311A}"/>
               </a:ext>
             </a:extLst>
           </p:cNvPr>
@@ -2425,7 +2425,7 @@
           <p:cNvPr id="3" name="コンテンツ プレースホルダー 2">
             <a:extLst>
               <a:ext uri="{FF2B5EF4-FFF2-40B4-BE49-F238E27FC236}">
-                <a16:creationId xmlns:a16="http://schemas.microsoft.com/office/drawing/2014/main" id="{18B7A2FC-B825-2BAA-E116-DB50629023A8}"/>
+                <a16:creationId xmlns:a16="http://schemas.microsoft.com/office/drawing/2014/main" id="{82662581-43FB-66DF-91B4-BF94D20E11EE}"/>
               </a:ext>
             </a:extLst>
           </p:cNvPr>
@@ -2547,7 +2547,7 @@
           <p:cNvPr id="4" name="テキスト プレースホルダー 3">
             <a:extLst>
               <a:ext uri="{FF2B5EF4-FFF2-40B4-BE49-F238E27FC236}">
-                <a16:creationId xmlns:a16="http://schemas.microsoft.com/office/drawing/2014/main" id="{43BA0A2C-CFF8-CEBA-91B3-6E6F658FBE94}"/>
+                <a16:creationId xmlns:a16="http://schemas.microsoft.com/office/drawing/2014/main" id="{87B14B77-A6D4-EE40-9D6C-B095A4EE7672}"/>
               </a:ext>
             </a:extLst>
           </p:cNvPr>
@@ -2618,7 +2618,7 @@
           <p:cNvPr id="5" name="日付プレースホルダー 4">
             <a:extLst>
               <a:ext uri="{FF2B5EF4-FFF2-40B4-BE49-F238E27FC236}">
-                <a16:creationId xmlns:a16="http://schemas.microsoft.com/office/drawing/2014/main" id="{68F35A44-912C-BAAA-638D-1CE26005D9E7}"/>
+                <a16:creationId xmlns:a16="http://schemas.microsoft.com/office/drawing/2014/main" id="{D95B6CB9-269E-5D72-6A3B-E0B61BA42D5C}"/>
               </a:ext>
             </a:extLst>
           </p:cNvPr>
@@ -2634,7 +2634,7 @@
           <a:bodyPr/>
           <a:lstStyle/>
           <a:p>
-            <a:fld id="{548A954F-6878-4CBB-85A4-08585DEC05C9}" type="datetimeFigureOut">
+            <a:fld id="{70708204-28F4-47FC-A19E-27C932FDF4E9}" type="datetimeFigureOut">
               <a:rPr kumimoji="1" lang="ja-JP" altLang="en-US" smtClean="0"/>
               <a:t>2026/7/30</a:t>
             </a:fld>
@@ -2647,7 +2647,7 @@
           <p:cNvPr id="6" name="フッター プレースホルダー 5">
             <a:extLst>
               <a:ext uri="{FF2B5EF4-FFF2-40B4-BE49-F238E27FC236}">
-                <a16:creationId xmlns:a16="http://schemas.microsoft.com/office/drawing/2014/main" id="{28340A82-C63F-876E-4049-B3D47AE5BFE5}"/>
+                <a16:creationId xmlns:a16="http://schemas.microsoft.com/office/drawing/2014/main" id="{2FAA1F57-CE18-361B-7946-CC3396B7D558}"/>
               </a:ext>
             </a:extLst>
           </p:cNvPr>
@@ -2672,7 +2672,7 @@
           <p:cNvPr id="7" name="スライド番号プレースホルダー 6">
             <a:extLst>
               <a:ext uri="{FF2B5EF4-FFF2-40B4-BE49-F238E27FC236}">
-                <a16:creationId xmlns:a16="http://schemas.microsoft.com/office/drawing/2014/main" id="{162401EF-E75B-DE70-17DD-F84F35971F51}"/>
+                <a16:creationId xmlns:a16="http://schemas.microsoft.com/office/drawing/2014/main" id="{31CCD89F-96C5-543A-BC96-CE35BD8DC8E1}"/>
               </a:ext>
             </a:extLst>
           </p:cNvPr>
@@ -2688,7 +2688,7 @@
           <a:bodyPr/>
           <a:lstStyle/>
           <a:p>
-            <a:fld id="{6B2941EB-36E4-47D0-8598-D5AE01190ABB}" type="slidenum">
+            <a:fld id="{859497F0-5F34-405D-A7F3-3E7DF3B2637B}" type="slidenum">
               <a:rPr kumimoji="1" lang="ja-JP" altLang="en-US" smtClean="0"/>
               <a:t>‹#›</a:t>
             </a:fld>
@@ -2699,7 +2699,7 @@
     </p:spTree>
     <p:extLst>
       <p:ext uri="{BB962C8B-B14F-4D97-AF65-F5344CB8AC3E}">
-        <p14:creationId xmlns:p14="http://schemas.microsoft.com/office/powerpoint/2010/main" val="2639997823"/>
+        <p14:creationId xmlns:p14="http://schemas.microsoft.com/office/powerpoint/2010/main" val="1550171300"/>
       </p:ext>
     </p:extLst>
   </p:cSld>
@@ -2731,7 +2731,7 @@
           <p:cNvPr id="2" name="タイトル 1">
             <a:extLst>
               <a:ext uri="{FF2B5EF4-FFF2-40B4-BE49-F238E27FC236}">
-                <a16:creationId xmlns:a16="http://schemas.microsoft.com/office/drawing/2014/main" id="{20E66B59-00BF-30A1-4CFC-0D68B1DA8AA7}"/>
+                <a16:creationId xmlns:a16="http://schemas.microsoft.com/office/drawing/2014/main" id="{E14C171E-CC8A-6B95-E6A1-86532BEAE721}"/>
               </a:ext>
             </a:extLst>
           </p:cNvPr>
@@ -2768,7 +2768,7 @@
           <p:cNvPr id="3" name="図プレースホルダー 2">
             <a:extLst>
               <a:ext uri="{FF2B5EF4-FFF2-40B4-BE49-F238E27FC236}">
-                <a16:creationId xmlns:a16="http://schemas.microsoft.com/office/drawing/2014/main" id="{185A5041-891A-6783-F890-30A8B9B70D7E}"/>
+                <a16:creationId xmlns:a16="http://schemas.microsoft.com/office/drawing/2014/main" id="{1AE8FBDA-0B0C-4982-64D9-26319FFF9944}"/>
               </a:ext>
             </a:extLst>
           </p:cNvPr>
@@ -2835,7 +2835,7 @@
           <p:cNvPr id="4" name="テキスト プレースホルダー 3">
             <a:extLst>
               <a:ext uri="{FF2B5EF4-FFF2-40B4-BE49-F238E27FC236}">
-                <a16:creationId xmlns:a16="http://schemas.microsoft.com/office/drawing/2014/main" id="{7BFEB72F-9619-586D-BC38-6A0038445CDA}"/>
+                <a16:creationId xmlns:a16="http://schemas.microsoft.com/office/drawing/2014/main" id="{F5F76442-0F7F-D3FB-43C3-FAC69EA2A553}"/>
               </a:ext>
             </a:extLst>
           </p:cNvPr>
@@ -2906,7 +2906,7 @@
           <p:cNvPr id="5" name="日付プレースホルダー 4">
             <a:extLst>
               <a:ext uri="{FF2B5EF4-FFF2-40B4-BE49-F238E27FC236}">
-                <a16:creationId xmlns:a16="http://schemas.microsoft.com/office/drawing/2014/main" id="{874947A1-B3E4-39EC-DAAA-23537F642FA3}"/>
+                <a16:creationId xmlns:a16="http://schemas.microsoft.com/office/drawing/2014/main" id="{DA77E107-3EAF-1BE0-BFC8-D3B112CFCB13}"/>
               </a:ext>
             </a:extLst>
           </p:cNvPr>
@@ -2922,7 +2922,7 @@
           <a:bodyPr/>
           <a:lstStyle/>
           <a:p>
-            <a:fld id="{548A954F-6878-4CBB-85A4-08585DEC05C9}" type="datetimeFigureOut">
+            <a:fld id="{70708204-28F4-47FC-A19E-27C932FDF4E9}" type="datetimeFigureOut">
               <a:rPr kumimoji="1" lang="ja-JP" altLang="en-US" smtClean="0"/>
               <a:t>2026/7/30</a:t>
             </a:fld>
@@ -2935,7 +2935,7 @@
           <p:cNvPr id="6" name="フッター プレースホルダー 5">
             <a:extLst>
               <a:ext uri="{FF2B5EF4-FFF2-40B4-BE49-F238E27FC236}">
-                <a16:creationId xmlns:a16="http://schemas.microsoft.com/office/drawing/2014/main" id="{A236F4F2-6A88-452B-58B1-D39F5EE9631F}"/>
+                <a16:creationId xmlns:a16="http://schemas.microsoft.com/office/drawing/2014/main" id="{ED4319E1-8A83-BD70-3208-2B3E7FFA2BB3}"/>
               </a:ext>
             </a:extLst>
           </p:cNvPr>
@@ -2960,7 +2960,7 @@
           <p:cNvPr id="7" name="スライド番号プレースホルダー 6">
             <a:extLst>
               <a:ext uri="{FF2B5EF4-FFF2-40B4-BE49-F238E27FC236}">
-                <a16:creationId xmlns:a16="http://schemas.microsoft.com/office/drawing/2014/main" id="{8D92AA51-E2C5-6A63-83C7-5FA9177C59CF}"/>
+                <a16:creationId xmlns:a16="http://schemas.microsoft.com/office/drawing/2014/main" id="{045F53E7-DECF-15D1-4320-E09B7FC3FEEC}"/>
               </a:ext>
             </a:extLst>
           </p:cNvPr>
@@ -2976,7 +2976,7 @@
           <a:bodyPr/>
           <a:lstStyle/>
           <a:p>
-            <a:fld id="{6B2941EB-36E4-47D0-8598-D5AE01190ABB}" type="slidenum">
+            <a:fld id="{859497F0-5F34-405D-A7F3-3E7DF3B2637B}" type="slidenum">
               <a:rPr kumimoji="1" lang="ja-JP" altLang="en-US" smtClean="0"/>
               <a:t>‹#›</a:t>
             </a:fld>
@@ -2987,7 +2987,7 @@
     </p:spTree>
     <p:extLst>
       <p:ext uri="{BB962C8B-B14F-4D97-AF65-F5344CB8AC3E}">
-        <p14:creationId xmlns:p14="http://schemas.microsoft.com/office/powerpoint/2010/main" val="3050373341"/>
+        <p14:creationId xmlns:p14="http://schemas.microsoft.com/office/powerpoint/2010/main" val="4173457103"/>
       </p:ext>
     </p:extLst>
   </p:cSld>
@@ -3024,7 +3024,7 @@
           <p:cNvPr id="2" name="タイトル プレースホルダー 1">
             <a:extLst>
               <a:ext uri="{FF2B5EF4-FFF2-40B4-BE49-F238E27FC236}">
-                <a16:creationId xmlns:a16="http://schemas.microsoft.com/office/drawing/2014/main" id="{E740B48B-EC55-5FD7-6B9A-3C04DB7D86DF}"/>
+                <a16:creationId xmlns:a16="http://schemas.microsoft.com/office/drawing/2014/main" id="{1386F6AA-A4FD-1EC7-E91C-362644880FF2}"/>
               </a:ext>
             </a:extLst>
           </p:cNvPr>
@@ -3062,7 +3062,7 @@
           <p:cNvPr id="3" name="テキスト プレースホルダー 2">
             <a:extLst>
               <a:ext uri="{FF2B5EF4-FFF2-40B4-BE49-F238E27FC236}">
-                <a16:creationId xmlns:a16="http://schemas.microsoft.com/office/drawing/2014/main" id="{8EF927D6-6A8F-63E9-828D-F109D85EAE42}"/>
+                <a16:creationId xmlns:a16="http://schemas.microsoft.com/office/drawing/2014/main" id="{114AE272-E84F-2061-8FB8-A1641EEEE11C}"/>
               </a:ext>
             </a:extLst>
           </p:cNvPr>
@@ -3161,7 +3161,7 @@
           <p:cNvPr id="4" name="日付プレースホルダー 3">
             <a:extLst>
               <a:ext uri="{FF2B5EF4-FFF2-40B4-BE49-F238E27FC236}">
-                <a16:creationId xmlns:a16="http://schemas.microsoft.com/office/drawing/2014/main" id="{0E13D9B0-8E9A-E969-64AD-CA0A2F73F3E3}"/>
+                <a16:creationId xmlns:a16="http://schemas.microsoft.com/office/drawing/2014/main" id="{1FB167E5-E146-1CDD-C4E4-905FA839B0F0}"/>
               </a:ext>
             </a:extLst>
           </p:cNvPr>
@@ -3195,7 +3195,7 @@
             </a:lvl1pPr>
           </a:lstStyle>
           <a:p>
-            <a:fld id="{548A954F-6878-4CBB-85A4-08585DEC05C9}" type="datetimeFigureOut">
+            <a:fld id="{70708204-28F4-47FC-A19E-27C932FDF4E9}" type="datetimeFigureOut">
               <a:rPr kumimoji="1" lang="ja-JP" altLang="en-US" smtClean="0"/>
               <a:t>2026/7/30</a:t>
             </a:fld>
@@ -3208,7 +3208,7 @@
           <p:cNvPr id="5" name="フッター プレースホルダー 4">
             <a:extLst>
               <a:ext uri="{FF2B5EF4-FFF2-40B4-BE49-F238E27FC236}">
-                <a16:creationId xmlns:a16="http://schemas.microsoft.com/office/drawing/2014/main" id="{6C2996CD-1B84-AD3B-1A80-0BE9870DBB71}"/>
+                <a16:creationId xmlns:a16="http://schemas.microsoft.com/office/drawing/2014/main" id="{B13A5086-CE87-311E-53DC-563764DCD15F}"/>
               </a:ext>
             </a:extLst>
           </p:cNvPr>
@@ -3251,7 +3251,7 @@
           <p:cNvPr id="6" name="スライド番号プレースホルダー 5">
             <a:extLst>
               <a:ext uri="{FF2B5EF4-FFF2-40B4-BE49-F238E27FC236}">
-                <a16:creationId xmlns:a16="http://schemas.microsoft.com/office/drawing/2014/main" id="{4F9DB3CB-DDAE-57C8-AA44-268A4E02AEA5}"/>
+                <a16:creationId xmlns:a16="http://schemas.microsoft.com/office/drawing/2014/main" id="{092695C6-BEDA-D8A9-94F0-8A6E270A799F}"/>
               </a:ext>
             </a:extLst>
           </p:cNvPr>
@@ -3285,7 +3285,7 @@
             </a:lvl1pPr>
           </a:lstStyle>
           <a:p>
-            <a:fld id="{6B2941EB-36E4-47D0-8598-D5AE01190ABB}" type="slidenum">
+            <a:fld id="{859497F0-5F34-405D-A7F3-3E7DF3B2637B}" type="slidenum">
               <a:rPr kumimoji="1" lang="ja-JP" altLang="en-US" smtClean="0"/>
               <a:t>‹#›</a:t>
             </a:fld>
@@ -3296,7 +3296,7 @@
     </p:spTree>
     <p:extLst>
       <p:ext uri="{BB962C8B-B14F-4D97-AF65-F5344CB8AC3E}">
-        <p14:creationId xmlns:p14="http://schemas.microsoft.com/office/powerpoint/2010/main" val="3549607288"/>
+        <p14:creationId xmlns:p14="http://schemas.microsoft.com/office/powerpoint/2010/main" val="181101170"/>
       </p:ext>
     </p:extLst>
   </p:cSld>
@@ -3619,7 +3619,7 @@
           <p:cNvPr id="2" name="テキスト ボックス 1">
             <a:extLst>
               <a:ext uri="{FF2B5EF4-FFF2-40B4-BE49-F238E27FC236}">
-                <a16:creationId xmlns:a16="http://schemas.microsoft.com/office/drawing/2014/main" id="{CF1A5742-F671-6475-C8C4-7010CA6087B6}"/>
+                <a16:creationId xmlns:a16="http://schemas.microsoft.com/office/drawing/2014/main" id="{9A3E7B71-EBFF-C7B0-195B-4A72B07681BA}"/>
               </a:ext>
             </a:extLst>
           </p:cNvPr>
@@ -3665,7 +3665,7 @@
           <p:cNvPr id="3" name="テキスト ボックス 2">
             <a:extLst>
               <a:ext uri="{FF2B5EF4-FFF2-40B4-BE49-F238E27FC236}">
-                <a16:creationId xmlns:a16="http://schemas.microsoft.com/office/drawing/2014/main" id="{22E8ED05-3FCB-0824-9749-ADF10541BEBF}"/>
+                <a16:creationId xmlns:a16="http://schemas.microsoft.com/office/drawing/2014/main" id="{8BB2FA81-6DA6-800E-7D71-78F80796D75A}"/>
               </a:ext>
             </a:extLst>
           </p:cNvPr>
@@ -3695,14 +3695,17 @@
                 </a:solidFill>
                 <a:latin typeface="Arial" panose="020B0604020202020204" pitchFamily="34" charset="0"/>
               </a:rPr>
-              <a:t>togo-kanri-tool TECH EXPLANATION</a:t>
-            </a:r>
-            <a:endParaRPr kumimoji="1" lang="ja-JP" altLang="en-US" sz="3400" b="1">
-              <a:solidFill>
-                <a:srgbClr val="111111"/>
-              </a:solidFill>
-              <a:latin typeface="Arial" panose="020B0604020202020204" pitchFamily="34" charset="0"/>
-            </a:endParaRPr>
+              <a:t>Togo Kanri Tool</a:t>
+            </a:r>
+            <a:r>
+              <a:rPr kumimoji="1" lang="ja-JP" altLang="en-US" sz="3400" b="1">
+                <a:solidFill>
+                  <a:srgbClr val="111111"/>
+                </a:solidFill>
+                <a:latin typeface="Arial" panose="020B0604020202020204" pitchFamily="34" charset="0"/>
+              </a:rPr>
+              <a:t>の技術解説</a:t>
+            </a:r>
           </a:p>
         </p:txBody>
       </p:sp>
@@ -3711,7 +3714,7 @@
           <p:cNvPr id="4" name="テキスト ボックス 3">
             <a:extLst>
               <a:ext uri="{FF2B5EF4-FFF2-40B4-BE49-F238E27FC236}">
-                <a16:creationId xmlns:a16="http://schemas.microsoft.com/office/drawing/2014/main" id="{F443CDAC-5D3C-8AE8-EDA5-4168810B28B3}"/>
+                <a16:creationId xmlns:a16="http://schemas.microsoft.com/office/drawing/2014/main" id="{D7322EFA-5F3C-42BF-D7B7-3D4CB2C7A8E6}"/>
               </a:ext>
             </a:extLst>
           </p:cNvPr>
@@ -3735,20 +3738,14 @@
           <a:lstStyle/>
           <a:p>
             <a:r>
-              <a:rPr kumimoji="1" lang="en-US" altLang="ja-JP" sz="2000">
+              <a:rPr kumimoji="1" lang="ja-JP" altLang="en-US" sz="2000">
                 <a:solidFill>
                   <a:srgbClr val="333333"/>
                 </a:solidFill>
                 <a:latin typeface="Arial" panose="020B0604020202020204" pitchFamily="34" charset="0"/>
               </a:rPr>
-              <a:t>Architecture, implementation and commit history in 75 seconds</a:t>
-            </a:r>
-            <a:endParaRPr kumimoji="1" lang="ja-JP" altLang="en-US" sz="2000">
-              <a:solidFill>
-                <a:srgbClr val="333333"/>
-              </a:solidFill>
-              <a:latin typeface="Arial" panose="020B0604020202020204" pitchFamily="34" charset="0"/>
-            </a:endParaRPr>
+              <a:t>設計・実装・コミットから学ぶ短時間プレビュー</a:t>
+            </a:r>
           </a:p>
         </p:txBody>
       </p:sp>
@@ -3757,7 +3754,7 @@
           <p:cNvPr id="5" name="テキスト ボックス 4">
             <a:extLst>
               <a:ext uri="{FF2B5EF4-FFF2-40B4-BE49-F238E27FC236}">
-                <a16:creationId xmlns:a16="http://schemas.microsoft.com/office/drawing/2014/main" id="{86801D57-266A-D7DF-0442-138D5704FC6B}"/>
+                <a16:creationId xmlns:a16="http://schemas.microsoft.com/office/drawing/2014/main" id="{B3AA4590-06A5-851B-1CC7-113EBCB67471}"/>
               </a:ext>
             </a:extLst>
           </p:cNvPr>
@@ -3804,7 +3801,7 @@
             <a:hlinkClick r:id="" action="ppaction://media"/>
             <a:extLst>
               <a:ext uri="{FF2B5EF4-FFF2-40B4-BE49-F238E27FC236}">
-                <a16:creationId xmlns:a16="http://schemas.microsoft.com/office/drawing/2014/main" id="{262557DA-4B99-946A-0CFF-68DAC199FCDE}"/>
+                <a16:creationId xmlns:a16="http://schemas.microsoft.com/office/drawing/2014/main" id="{08C28796-8DD6-E696-2FF8-48F4C1FACB99}"/>
               </a:ext>
             </a:extLst>
           </p:cNvPr>
@@ -3839,7 +3836,7 @@
     </p:spTree>
     <p:extLst>
       <p:ext uri="{BB962C8B-B14F-4D97-AF65-F5344CB8AC3E}">
-        <p14:creationId xmlns:p14="http://schemas.microsoft.com/office/powerpoint/2010/main" val="2788532313"/>
+        <p14:creationId xmlns:p14="http://schemas.microsoft.com/office/powerpoint/2010/main" val="3873583293"/>
       </p:ext>
     </p:extLst>
   </p:cSld>
@@ -3963,7 +3960,7 @@
           <p:cNvPr id="2" name="テキスト ボックス 1">
             <a:extLst>
               <a:ext uri="{FF2B5EF4-FFF2-40B4-BE49-F238E27FC236}">
-                <a16:creationId xmlns:a16="http://schemas.microsoft.com/office/drawing/2014/main" id="{CC0EBA27-93E1-C460-D662-8FF8AEBBCEA4}"/>
+                <a16:creationId xmlns:a16="http://schemas.microsoft.com/office/drawing/2014/main" id="{22535AE3-A9CB-AB06-300E-DA4314CADBDB}"/>
               </a:ext>
             </a:extLst>
           </p:cNvPr>
@@ -4009,7 +4006,7 @@
           <p:cNvPr id="3" name="テキスト ボックス 2">
             <a:extLst>
               <a:ext uri="{FF2B5EF4-FFF2-40B4-BE49-F238E27FC236}">
-                <a16:creationId xmlns:a16="http://schemas.microsoft.com/office/drawing/2014/main" id="{1851E79B-F743-7F8D-E5CD-B691D21225FA}"/>
+                <a16:creationId xmlns:a16="http://schemas.microsoft.com/office/drawing/2014/main" id="{526E0BCB-FD3F-1AD3-E68F-A07505FB1085}"/>
               </a:ext>
             </a:extLst>
           </p:cNvPr>
@@ -4033,20 +4030,14 @@
           <a:lstStyle/>
           <a:p>
             <a:r>
-              <a:rPr kumimoji="1" lang="en-US" altLang="ja-JP" sz="3400" b="1">
+              <a:rPr kumimoji="1" lang="ja-JP" altLang="en-US" sz="3400" b="1">
                 <a:solidFill>
                   <a:srgbClr val="111111"/>
                 </a:solidFill>
                 <a:latin typeface="Arial" panose="020B0604020202020204" pitchFamily="34" charset="0"/>
               </a:rPr>
-              <a:t>WHAT DOES IT SOLVE?</a:t>
-            </a:r>
-            <a:endParaRPr kumimoji="1" lang="ja-JP" altLang="en-US" sz="3400" b="1">
-              <a:solidFill>
-                <a:srgbClr val="111111"/>
-              </a:solidFill>
-              <a:latin typeface="Arial" panose="020B0604020202020204" pitchFamily="34" charset="0"/>
-            </a:endParaRPr>
+              <a:t>このプロジェクトは何を解決する？</a:t>
+            </a:r>
           </a:p>
         </p:txBody>
       </p:sp>
@@ -4055,7 +4046,7 @@
           <p:cNvPr id="4" name="テキスト ボックス 3">
             <a:extLst>
               <a:ext uri="{FF2B5EF4-FFF2-40B4-BE49-F238E27FC236}">
-                <a16:creationId xmlns:a16="http://schemas.microsoft.com/office/drawing/2014/main" id="{B73F6BF7-7774-2421-398F-673B0B719829}"/>
+                <a16:creationId xmlns:a16="http://schemas.microsoft.com/office/drawing/2014/main" id="{9D72F943-24A1-9B46-F147-F066453D215B}"/>
               </a:ext>
             </a:extLst>
           </p:cNvPr>
@@ -4104,7 +4095,7 @@
           <p:cNvPr id="5" name="テキスト ボックス 4">
             <a:extLst>
               <a:ext uri="{FF2B5EF4-FFF2-40B4-BE49-F238E27FC236}">
-                <a16:creationId xmlns:a16="http://schemas.microsoft.com/office/drawing/2014/main" id="{305592BC-2879-04A2-0159-424A1B17153C}"/>
+                <a16:creationId xmlns:a16="http://schemas.microsoft.com/office/drawing/2014/main" id="{ECBD86F2-3579-B4FF-5DAE-0EA540D42D1A}"/>
               </a:ext>
             </a:extLst>
           </p:cNvPr>
@@ -4151,7 +4142,7 @@
             <a:hlinkClick r:id="" action="ppaction://media"/>
             <a:extLst>
               <a:ext uri="{FF2B5EF4-FFF2-40B4-BE49-F238E27FC236}">
-                <a16:creationId xmlns:a16="http://schemas.microsoft.com/office/drawing/2014/main" id="{858F3FBA-3883-383A-408E-252F520C8149}"/>
+                <a16:creationId xmlns:a16="http://schemas.microsoft.com/office/drawing/2014/main" id="{0FAAEB2C-C091-F831-2AA1-FC807710D23E}"/>
               </a:ext>
             </a:extLst>
           </p:cNvPr>
@@ -4186,7 +4177,7 @@
     </p:spTree>
     <p:extLst>
       <p:ext uri="{BB962C8B-B14F-4D97-AF65-F5344CB8AC3E}">
-        <p14:creationId xmlns:p14="http://schemas.microsoft.com/office/powerpoint/2010/main" val="1014860707"/>
+        <p14:creationId xmlns:p14="http://schemas.microsoft.com/office/powerpoint/2010/main" val="2588711453"/>
       </p:ext>
     </p:extLst>
   </p:cSld>
@@ -4310,7 +4301,7 @@
           <p:cNvPr id="2" name="テキスト ボックス 1">
             <a:extLst>
               <a:ext uri="{FF2B5EF4-FFF2-40B4-BE49-F238E27FC236}">
-                <a16:creationId xmlns:a16="http://schemas.microsoft.com/office/drawing/2014/main" id="{A30183AD-5C27-DD74-480D-87A286B24459}"/>
+                <a16:creationId xmlns:a16="http://schemas.microsoft.com/office/drawing/2014/main" id="{5A9B1C66-FCC5-09F4-35D8-8404883ADF25}"/>
               </a:ext>
             </a:extLst>
           </p:cNvPr>
@@ -4356,7 +4347,7 @@
           <p:cNvPr id="3" name="テキスト ボックス 2">
             <a:extLst>
               <a:ext uri="{FF2B5EF4-FFF2-40B4-BE49-F238E27FC236}">
-                <a16:creationId xmlns:a16="http://schemas.microsoft.com/office/drawing/2014/main" id="{91160CC0-CB5C-B8DE-B32F-D6DC7E599F96}"/>
+                <a16:creationId xmlns:a16="http://schemas.microsoft.com/office/drawing/2014/main" id="{0A29874B-24AF-D262-E96D-4F9FE0E26CD0}"/>
               </a:ext>
             </a:extLst>
           </p:cNvPr>
@@ -4380,20 +4371,14 @@
           <a:lstStyle/>
           <a:p>
             <a:r>
-              <a:rPr kumimoji="1" lang="en-US" altLang="ja-JP" sz="3400" b="1">
+              <a:rPr kumimoji="1" lang="ja-JP" altLang="en-US" sz="3400" b="1">
                 <a:solidFill>
                   <a:srgbClr val="111111"/>
                 </a:solidFill>
                 <a:latin typeface="Arial" panose="020B0604020202020204" pitchFamily="34" charset="0"/>
               </a:rPr>
-              <a:t>TECH STACK</a:t>
-            </a:r>
-            <a:endParaRPr kumimoji="1" lang="ja-JP" altLang="en-US" sz="3400" b="1">
-              <a:solidFill>
-                <a:srgbClr val="111111"/>
-              </a:solidFill>
-              <a:latin typeface="Arial" panose="020B0604020202020204" pitchFamily="34" charset="0"/>
-            </a:endParaRPr>
+              <a:t>技術スタック</a:t>
+            </a:r>
           </a:p>
         </p:txBody>
       </p:sp>
@@ -4402,7 +4387,7 @@
           <p:cNvPr id="4" name="テキスト ボックス 3">
             <a:extLst>
               <a:ext uri="{FF2B5EF4-FFF2-40B4-BE49-F238E27FC236}">
-                <a16:creationId xmlns:a16="http://schemas.microsoft.com/office/drawing/2014/main" id="{31509435-FB63-EBC8-F3AB-C397212F397D}"/>
+                <a16:creationId xmlns:a16="http://schemas.microsoft.com/office/drawing/2014/main" id="{7A9E9F6B-6E6E-E92F-C962-7DFBE0655AE9}"/>
               </a:ext>
             </a:extLst>
           </p:cNvPr>
@@ -4412,7 +4397,7 @@
         <p:spPr>
           <a:xfrm>
             <a:off x="533400" y="3429000"/>
-            <a:ext cx="10795000" cy="400110"/>
+            <a:ext cx="10795000" cy="707886"/>
           </a:xfrm>
           <a:prstGeom prst="rect">
             <a:avLst/>
@@ -4426,13 +4411,22 @@
           <a:lstStyle/>
           <a:p>
             <a:r>
+              <a:rPr kumimoji="1" lang="ja-JP" altLang="en-US" sz="2000">
+                <a:solidFill>
+                  <a:srgbClr val="333333"/>
+                </a:solidFill>
+                <a:latin typeface="Arial" panose="020B0604020202020204" pitchFamily="34" charset="0"/>
+              </a:rPr>
+              <a:t>主要技術：</a:t>
+            </a:r>
+            <a:r>
               <a:rPr kumimoji="1" lang="en-US" altLang="ja-JP" sz="2000">
                 <a:solidFill>
                   <a:srgbClr val="333333"/>
                 </a:solidFill>
                 <a:latin typeface="Arial" panose="020B0604020202020204" pitchFamily="34" charset="0"/>
               </a:rPr>
-              <a:t>Primary technologies: TypeScript</a:t>
+              <a:t>TypeScript</a:t>
             </a:r>
             <a:r>
               <a:rPr kumimoji="1" lang="ja-JP" altLang="en-US" sz="2000">
@@ -4468,14 +4462,18 @@
                 </a:solidFill>
                 <a:latin typeface="Arial" panose="020B0604020202020204" pitchFamily="34" charset="0"/>
               </a:rPr>
-              <a:t>CSS</a:t>
-            </a:r>
-            <a:endParaRPr kumimoji="1" lang="ja-JP" altLang="en-US" sz="2000">
-              <a:solidFill>
-                <a:srgbClr val="333333"/>
-              </a:solidFill>
-              <a:latin typeface="Arial" panose="020B0604020202020204" pitchFamily="34" charset="0"/>
-            </a:endParaRPr>
+              <a:t>CSS
+</a:t>
+            </a:r>
+            <a:r>
+              <a:rPr kumimoji="1" lang="ja-JP" altLang="en-US" sz="2000">
+                <a:solidFill>
+                  <a:srgbClr val="333333"/>
+                </a:solidFill>
+                <a:latin typeface="Arial" panose="020B0604020202020204" pitchFamily="34" charset="0"/>
+              </a:rPr>
+              <a:t>役割を分け、保守しやすい構成を目指しています。</a:t>
+            </a:r>
           </a:p>
         </p:txBody>
       </p:sp>
@@ -4484,7 +4482,7 @@
           <p:cNvPr id="5" name="テキスト ボックス 4">
             <a:extLst>
               <a:ext uri="{FF2B5EF4-FFF2-40B4-BE49-F238E27FC236}">
-                <a16:creationId xmlns:a16="http://schemas.microsoft.com/office/drawing/2014/main" id="{3DFB0C52-73D0-D8DC-A785-127A44075614}"/>
+                <a16:creationId xmlns:a16="http://schemas.microsoft.com/office/drawing/2014/main" id="{6B463191-8DAB-453F-B498-5AFF0DA87AB5}"/>
               </a:ext>
             </a:extLst>
           </p:cNvPr>
@@ -4531,7 +4529,7 @@
             <a:hlinkClick r:id="" action="ppaction://media"/>
             <a:extLst>
               <a:ext uri="{FF2B5EF4-FFF2-40B4-BE49-F238E27FC236}">
-                <a16:creationId xmlns:a16="http://schemas.microsoft.com/office/drawing/2014/main" id="{AE0E630F-0071-8CE4-3948-96FAB70F4789}"/>
+                <a16:creationId xmlns:a16="http://schemas.microsoft.com/office/drawing/2014/main" id="{599DBE19-A770-B968-374B-F1421DF68CC7}"/>
               </a:ext>
             </a:extLst>
           </p:cNvPr>
@@ -4566,7 +4564,7 @@
     </p:spTree>
     <p:extLst>
       <p:ext uri="{BB962C8B-B14F-4D97-AF65-F5344CB8AC3E}">
-        <p14:creationId xmlns:p14="http://schemas.microsoft.com/office/powerpoint/2010/main" val="2358301902"/>
+        <p14:creationId xmlns:p14="http://schemas.microsoft.com/office/powerpoint/2010/main" val="518633560"/>
       </p:ext>
     </p:extLst>
   </p:cSld>
@@ -4690,7 +4688,7 @@
           <p:cNvPr id="2" name="テキスト ボックス 1">
             <a:extLst>
               <a:ext uri="{FF2B5EF4-FFF2-40B4-BE49-F238E27FC236}">
-                <a16:creationId xmlns:a16="http://schemas.microsoft.com/office/drawing/2014/main" id="{92639252-D8E8-70C5-1D64-BB93D5CFA471}"/>
+                <a16:creationId xmlns:a16="http://schemas.microsoft.com/office/drawing/2014/main" id="{8E8350B5-4132-38AA-E3C0-A20EDDAA3838}"/>
               </a:ext>
             </a:extLst>
           </p:cNvPr>
@@ -4736,7 +4734,7 @@
           <p:cNvPr id="3" name="テキスト ボックス 2">
             <a:extLst>
               <a:ext uri="{FF2B5EF4-FFF2-40B4-BE49-F238E27FC236}">
-                <a16:creationId xmlns:a16="http://schemas.microsoft.com/office/drawing/2014/main" id="{0BD7C497-DCE3-F6E9-3812-658F1DC05BA3}"/>
+                <a16:creationId xmlns:a16="http://schemas.microsoft.com/office/drawing/2014/main" id="{3CEE7307-CC56-C966-FF69-911FA9564EE0}"/>
               </a:ext>
             </a:extLst>
           </p:cNvPr>
@@ -4760,20 +4758,14 @@
           <a:lstStyle/>
           <a:p>
             <a:r>
-              <a:rPr kumimoji="1" lang="en-US" altLang="ja-JP" sz="3400" b="1">
+              <a:rPr kumimoji="1" lang="ja-JP" altLang="en-US" sz="3400" b="1">
                 <a:solidFill>
                   <a:srgbClr val="111111"/>
                 </a:solidFill>
                 <a:latin typeface="Arial" panose="020B0604020202020204" pitchFamily="34" charset="0"/>
               </a:rPr>
-              <a:t>REPOSITORY HIGHLIGHTS</a:t>
-            </a:r>
-            <a:endParaRPr kumimoji="1" lang="ja-JP" altLang="en-US" sz="3400" b="1">
-              <a:solidFill>
-                <a:srgbClr val="111111"/>
-              </a:solidFill>
-              <a:latin typeface="Arial" panose="020B0604020202020204" pitchFamily="34" charset="0"/>
-            </a:endParaRPr>
+              <a:t>リポジトリの読みどころ</a:t>
+            </a:r>
           </a:p>
         </p:txBody>
       </p:sp>
@@ -4782,7 +4774,7 @@
           <p:cNvPr id="4" name="テキスト ボックス 3">
             <a:extLst>
               <a:ext uri="{FF2B5EF4-FFF2-40B4-BE49-F238E27FC236}">
-                <a16:creationId xmlns:a16="http://schemas.microsoft.com/office/drawing/2014/main" id="{B3728809-8F6A-10F0-6EA6-671B886D4C88}"/>
+                <a16:creationId xmlns:a16="http://schemas.microsoft.com/office/drawing/2014/main" id="{E3E8A0DD-B77F-A1A2-8CB8-29017C560B4A}"/>
               </a:ext>
             </a:extLst>
           </p:cNvPr>
@@ -4792,7 +4784,7 @@
         <p:spPr>
           <a:xfrm>
             <a:off x="533400" y="3429000"/>
-            <a:ext cx="10795000" cy="400110"/>
+            <a:ext cx="10795000" cy="707886"/>
           </a:xfrm>
           <a:prstGeom prst="rect">
             <a:avLst/>
@@ -4806,13 +4798,77 @@
           <a:lstStyle/>
           <a:p>
             <a:r>
+              <a:rPr kumimoji="1" lang="ja-JP" altLang="en-US" sz="2000">
+                <a:solidFill>
+                  <a:srgbClr val="333333"/>
+                </a:solidFill>
+                <a:latin typeface="Arial" panose="020B0604020202020204" pitchFamily="34" charset="0"/>
+              </a:rPr>
+              <a:t>公開コード、</a:t>
+            </a:r>
+            <a:r>
               <a:rPr kumimoji="1" lang="en-US" altLang="ja-JP" sz="2000">
                 <a:solidFill>
                   <a:srgbClr val="333333"/>
                 </a:solidFill>
                 <a:latin typeface="Arial" panose="020B0604020202020204" pitchFamily="34" charset="0"/>
               </a:rPr>
-              <a:t>Public source code, README and commit history reveal the design decisions.</a:t>
+              <a:t>README</a:t>
+            </a:r>
+            <a:r>
+              <a:rPr kumimoji="1" lang="ja-JP" altLang="en-US" sz="2000">
+                <a:solidFill>
+                  <a:srgbClr val="333333"/>
+                </a:solidFill>
+                <a:latin typeface="Arial" panose="020B0604020202020204" pitchFamily="34" charset="0"/>
+              </a:rPr>
+              <a:t>、コミット履歴から設計判断を確認できます。
+主なファイル：</a:t>
+            </a:r>
+            <a:r>
+              <a:rPr kumimoji="1" lang="en-US" altLang="ja-JP" sz="2000">
+                <a:solidFill>
+                  <a:srgbClr val="333333"/>
+                </a:solidFill>
+                <a:latin typeface="Arial" panose="020B0604020202020204" pitchFamily="34" charset="0"/>
+              </a:rPr>
+              <a:t>app</a:t>
+            </a:r>
+            <a:r>
+              <a:rPr kumimoji="1" lang="ja-JP" altLang="en-US" sz="2000">
+                <a:solidFill>
+                  <a:srgbClr val="333333"/>
+                </a:solidFill>
+                <a:latin typeface="Arial" panose="020B0604020202020204" pitchFamily="34" charset="0"/>
+              </a:rPr>
+              <a:t>、</a:t>
+            </a:r>
+            <a:r>
+              <a:rPr kumimoji="1" lang="en-US" altLang="ja-JP" sz="2000">
+                <a:solidFill>
+                  <a:srgbClr val="333333"/>
+                </a:solidFill>
+                <a:latin typeface="Arial" panose="020B0604020202020204" pitchFamily="34" charset="0"/>
+              </a:rPr>
+              <a:t>eslint.config.mjs</a:t>
+            </a:r>
+            <a:r>
+              <a:rPr kumimoji="1" lang="ja-JP" altLang="en-US" sz="2000">
+                <a:solidFill>
+                  <a:srgbClr val="333333"/>
+                </a:solidFill>
+                <a:latin typeface="Arial" panose="020B0604020202020204" pitchFamily="34" charset="0"/>
+              </a:rPr>
+              <a:t>、</a:t>
+            </a:r>
+            <a:r>
+              <a:rPr kumimoji="1" lang="en-US" altLang="ja-JP" sz="2000">
+                <a:solidFill>
+                  <a:srgbClr val="333333"/>
+                </a:solidFill>
+                <a:latin typeface="Arial" panose="020B0604020202020204" pitchFamily="34" charset="0"/>
+              </a:rPr>
+              <a:t>lib</a:t>
             </a:r>
             <a:endParaRPr kumimoji="1" lang="ja-JP" altLang="en-US" sz="2000">
               <a:solidFill>
@@ -4828,7 +4884,7 @@
           <p:cNvPr id="5" name="テキスト ボックス 4">
             <a:extLst>
               <a:ext uri="{FF2B5EF4-FFF2-40B4-BE49-F238E27FC236}">
-                <a16:creationId xmlns:a16="http://schemas.microsoft.com/office/drawing/2014/main" id="{7FC50C9C-4F93-93E3-1267-FFC256A76035}"/>
+                <a16:creationId xmlns:a16="http://schemas.microsoft.com/office/drawing/2014/main" id="{D5BDDA7B-1BF8-CED1-0CC6-E8128D4C712F}"/>
               </a:ext>
             </a:extLst>
           </p:cNvPr>
@@ -4875,7 +4931,7 @@
             <a:hlinkClick r:id="" action="ppaction://media"/>
             <a:extLst>
               <a:ext uri="{FF2B5EF4-FFF2-40B4-BE49-F238E27FC236}">
-                <a16:creationId xmlns:a16="http://schemas.microsoft.com/office/drawing/2014/main" id="{C6FD116C-F86B-DDCC-C3D8-A431FCE1576E}"/>
+                <a16:creationId xmlns:a16="http://schemas.microsoft.com/office/drawing/2014/main" id="{3A46D2F5-5C75-5598-CD0F-D757D882E551}"/>
               </a:ext>
             </a:extLst>
           </p:cNvPr>
@@ -4910,7 +4966,7 @@
     </p:spTree>
     <p:extLst>
       <p:ext uri="{BB962C8B-B14F-4D97-AF65-F5344CB8AC3E}">
-        <p14:creationId xmlns:p14="http://schemas.microsoft.com/office/powerpoint/2010/main" val="1091665747"/>
+        <p14:creationId xmlns:p14="http://schemas.microsoft.com/office/powerpoint/2010/main" val="1116846873"/>
       </p:ext>
     </p:extLst>
   </p:cSld>
@@ -5034,7 +5090,7 @@
           <p:cNvPr id="2" name="テキスト ボックス 1">
             <a:extLst>
               <a:ext uri="{FF2B5EF4-FFF2-40B4-BE49-F238E27FC236}">
-                <a16:creationId xmlns:a16="http://schemas.microsoft.com/office/drawing/2014/main" id="{21502931-49D3-647D-CB49-5D3168DD6146}"/>
+                <a16:creationId xmlns:a16="http://schemas.microsoft.com/office/drawing/2014/main" id="{3D211C7E-3F21-D923-A315-D22DFC00CFDF}"/>
               </a:ext>
             </a:extLst>
           </p:cNvPr>
@@ -5080,7 +5136,7 @@
           <p:cNvPr id="3" name="テキスト ボックス 2">
             <a:extLst>
               <a:ext uri="{FF2B5EF4-FFF2-40B4-BE49-F238E27FC236}">
-                <a16:creationId xmlns:a16="http://schemas.microsoft.com/office/drawing/2014/main" id="{55165B0A-2C19-DDAC-9A43-C2B23E6679F9}"/>
+                <a16:creationId xmlns:a16="http://schemas.microsoft.com/office/drawing/2014/main" id="{50C70C5C-CEF7-E08B-0228-97041E9184AB}"/>
               </a:ext>
             </a:extLst>
           </p:cNvPr>
@@ -5104,20 +5160,14 @@
           <a:lstStyle/>
           <a:p>
             <a:r>
-              <a:rPr kumimoji="1" lang="en-US" altLang="ja-JP" sz="3400" b="1">
+              <a:rPr kumimoji="1" lang="ja-JP" altLang="en-US" sz="3400" b="1">
                 <a:solidFill>
                   <a:srgbClr val="111111"/>
                 </a:solidFill>
                 <a:latin typeface="Arial" panose="020B0604020202020204" pitchFamily="34" charset="0"/>
               </a:rPr>
-              <a:t>ITERATIVE IMPROVEMENT</a:t>
-            </a:r>
-            <a:endParaRPr kumimoji="1" lang="ja-JP" altLang="en-US" sz="3400" b="1">
-              <a:solidFill>
-                <a:srgbClr val="111111"/>
-              </a:solidFill>
-              <a:latin typeface="Arial" panose="020B0604020202020204" pitchFamily="34" charset="0"/>
-            </a:endParaRPr>
+              <a:t>コミットから分かる改善</a:t>
+            </a:r>
           </a:p>
         </p:txBody>
       </p:sp>
@@ -5126,7 +5176,7 @@
           <p:cNvPr id="4" name="テキスト ボックス 3">
             <a:extLst>
               <a:ext uri="{FF2B5EF4-FFF2-40B4-BE49-F238E27FC236}">
-                <a16:creationId xmlns:a16="http://schemas.microsoft.com/office/drawing/2014/main" id="{FEAE517B-1005-C963-516D-45D0F11B49A1}"/>
+                <a16:creationId xmlns:a16="http://schemas.microsoft.com/office/drawing/2014/main" id="{66FA5F7A-AD1A-6D1A-B35F-83900100AB99}"/>
               </a:ext>
             </a:extLst>
           </p:cNvPr>
@@ -5156,7 +5206,7 @@
                 </a:solidFill>
                 <a:latin typeface="Arial" panose="020B0604020202020204" pitchFamily="34" charset="0"/>
               </a:rPr>
-              <a:t>Small commits continuously improve features, quality and release readiness.</a:t>
+              <a:t>Scaffold togo-kanri-tool: cross-site GSC dashboard with rule-based suggestions</a:t>
             </a:r>
             <a:endParaRPr kumimoji="1" lang="ja-JP" altLang="en-US" sz="2000">
               <a:solidFill>
@@ -5172,7 +5222,7 @@
           <p:cNvPr id="5" name="テキスト ボックス 4">
             <a:extLst>
               <a:ext uri="{FF2B5EF4-FFF2-40B4-BE49-F238E27FC236}">
-                <a16:creationId xmlns:a16="http://schemas.microsoft.com/office/drawing/2014/main" id="{E39597B9-A833-2685-EAF8-B2EF65BCD92E}"/>
+                <a16:creationId xmlns:a16="http://schemas.microsoft.com/office/drawing/2014/main" id="{5EC1E2F3-A8A5-F9B7-5414-FED0F6AB5934}"/>
               </a:ext>
             </a:extLst>
           </p:cNvPr>
@@ -5219,7 +5269,7 @@
             <a:hlinkClick r:id="" action="ppaction://media"/>
             <a:extLst>
               <a:ext uri="{FF2B5EF4-FFF2-40B4-BE49-F238E27FC236}">
-                <a16:creationId xmlns:a16="http://schemas.microsoft.com/office/drawing/2014/main" id="{2CB372C5-D34A-1E3E-30D2-5C589F2470CB}"/>
+                <a16:creationId xmlns:a16="http://schemas.microsoft.com/office/drawing/2014/main" id="{CAF86386-4E33-DEFE-84D0-34748033DB79}"/>
               </a:ext>
             </a:extLst>
           </p:cNvPr>
@@ -5254,7 +5304,7 @@
     </p:spTree>
     <p:extLst>
       <p:ext uri="{BB962C8B-B14F-4D97-AF65-F5344CB8AC3E}">
-        <p14:creationId xmlns:p14="http://schemas.microsoft.com/office/powerpoint/2010/main" val="2860626785"/>
+        <p14:creationId xmlns:p14="http://schemas.microsoft.com/office/powerpoint/2010/main" val="3123807633"/>
       </p:ext>
     </p:extLst>
   </p:cSld>
@@ -5378,7 +5428,7 @@
           <p:cNvPr id="2" name="テキスト ボックス 1">
             <a:extLst>
               <a:ext uri="{FF2B5EF4-FFF2-40B4-BE49-F238E27FC236}">
-                <a16:creationId xmlns:a16="http://schemas.microsoft.com/office/drawing/2014/main" id="{1E853C12-A9E1-7B21-2A72-742A164AAC62}"/>
+                <a16:creationId xmlns:a16="http://schemas.microsoft.com/office/drawing/2014/main" id="{698D7920-E716-0A6C-9434-9A171756A6FB}"/>
               </a:ext>
             </a:extLst>
           </p:cNvPr>
@@ -5424,7 +5474,7 @@
           <p:cNvPr id="3" name="テキスト ボックス 2">
             <a:extLst>
               <a:ext uri="{FF2B5EF4-FFF2-40B4-BE49-F238E27FC236}">
-                <a16:creationId xmlns:a16="http://schemas.microsoft.com/office/drawing/2014/main" id="{CE9FE4DB-64AD-1B24-0CB3-DA6130C4B526}"/>
+                <a16:creationId xmlns:a16="http://schemas.microsoft.com/office/drawing/2014/main" id="{9A6DA4C4-CC99-AB1F-D761-2F0B3B3BE48E}"/>
               </a:ext>
             </a:extLst>
           </p:cNvPr>
@@ -5448,20 +5498,14 @@
           <a:lstStyle/>
           <a:p>
             <a:r>
-              <a:rPr kumimoji="1" lang="en-US" altLang="ja-JP" sz="3400" b="1">
+              <a:rPr kumimoji="1" lang="ja-JP" altLang="en-US" sz="3400" b="1">
                 <a:solidFill>
                   <a:srgbClr val="111111"/>
                 </a:solidFill>
                 <a:latin typeface="Arial" panose="020B0604020202020204" pitchFamily="34" charset="0"/>
               </a:rPr>
-              <a:t>READ THE FULL ARTICLE</a:t>
-            </a:r>
-            <a:endParaRPr kumimoji="1" lang="ja-JP" altLang="en-US" sz="3400" b="1">
-              <a:solidFill>
-                <a:srgbClr val="111111"/>
-              </a:solidFill>
-              <a:latin typeface="Arial" panose="020B0604020202020204" pitchFamily="34" charset="0"/>
-            </a:endParaRPr>
+              <a:t>詳しくは積み上げログへ</a:t>
+            </a:r>
           </a:p>
         </p:txBody>
       </p:sp>
@@ -5470,7 +5514,7 @@
           <p:cNvPr id="4" name="テキスト ボックス 3">
             <a:extLst>
               <a:ext uri="{FF2B5EF4-FFF2-40B4-BE49-F238E27FC236}">
-                <a16:creationId xmlns:a16="http://schemas.microsoft.com/office/drawing/2014/main" id="{EE4354F0-C12B-D62B-3A83-AF3AA56F583E}"/>
+                <a16:creationId xmlns:a16="http://schemas.microsoft.com/office/drawing/2014/main" id="{A898EFA3-5E1A-E80B-B8B9-660B338E1265}"/>
               </a:ext>
             </a:extLst>
           </p:cNvPr>
@@ -5494,14 +5538,32 @@
           <a:lstStyle/>
           <a:p>
             <a:r>
-              <a:rPr kumimoji="1" lang="sv-SE" altLang="ja-JP" sz="2000">
+              <a:rPr kumimoji="1" lang="zh-TW" altLang="en-US" sz="2000">
+                <a:solidFill>
+                  <a:srgbClr val="333333"/>
+                </a:solidFill>
+                <a:latin typeface="Arial" panose="020B0604020202020204" pitchFamily="34" charset="0"/>
+              </a:rPr>
+              <a:t>記事： </a:t>
+            </a:r>
+            <a:r>
+              <a:rPr kumimoji="1" lang="en-US" altLang="zh-TW" sz="2000">
                 <a:solidFill>
                   <a:srgbClr val="333333"/>
                 </a:solidFill>
                 <a:latin typeface="Arial" panose="020B0604020202020204" pitchFamily="34" charset="0"/>
               </a:rPr>
               <a:t>https://syunnjack.dev/articles/togo-kanri-tool
-TSUMIAGE LOG</a:t>
+</a:t>
+            </a:r>
+            <a:r>
+              <a:rPr kumimoji="1" lang="zh-TW" altLang="en-US" sz="2000">
+                <a:solidFill>
+                  <a:srgbClr val="333333"/>
+                </a:solidFill>
+                <a:latin typeface="Arial" panose="020B0604020202020204" pitchFamily="34" charset="0"/>
+              </a:rPr>
+              <a:t>学び、作り、振り返る開発記録。</a:t>
             </a:r>
             <a:endParaRPr kumimoji="1" lang="ja-JP" altLang="en-US" sz="2000">
               <a:solidFill>
@@ -5517,7 +5579,7 @@
           <p:cNvPr id="5" name="テキスト ボックス 4">
             <a:extLst>
               <a:ext uri="{FF2B5EF4-FFF2-40B4-BE49-F238E27FC236}">
-                <a16:creationId xmlns:a16="http://schemas.microsoft.com/office/drawing/2014/main" id="{485F5193-1870-6F2A-463D-055A3B9B3DA8}"/>
+                <a16:creationId xmlns:a16="http://schemas.microsoft.com/office/drawing/2014/main" id="{B57FB804-8346-7CA3-1E9E-066632C60B54}"/>
               </a:ext>
             </a:extLst>
           </p:cNvPr>
@@ -5564,7 +5626,7 @@
             <a:hlinkClick r:id="" action="ppaction://media"/>
             <a:extLst>
               <a:ext uri="{FF2B5EF4-FFF2-40B4-BE49-F238E27FC236}">
-                <a16:creationId xmlns:a16="http://schemas.microsoft.com/office/drawing/2014/main" id="{F79D4558-4897-FC4E-7C3F-E1CC3EA0B737}"/>
+                <a16:creationId xmlns:a16="http://schemas.microsoft.com/office/drawing/2014/main" id="{685E5531-2CE4-8A25-1735-0B526E3AE624}"/>
               </a:ext>
             </a:extLst>
           </p:cNvPr>
@@ -5599,7 +5661,7 @@
     </p:spTree>
     <p:extLst>
       <p:ext uri="{BB962C8B-B14F-4D97-AF65-F5344CB8AC3E}">
-        <p14:creationId xmlns:p14="http://schemas.microsoft.com/office/powerpoint/2010/main" val="449606106"/>
+        <p14:creationId xmlns:p14="http://schemas.microsoft.com/office/powerpoint/2010/main" val="522847924"/>
       </p:ext>
     </p:extLst>
   </p:cSld>

--- a/public/videos/repositories/togo-kanri-tool/togo-kanri-tool-tech-preview.pptx
+++ b/public/videos/repositories/togo-kanri-tool/togo-kanri-tool-tech-preview.pptx
@@ -134,7 +134,7 @@
           <p:cNvPr id="2" name="タイトル 1">
             <a:extLst>
               <a:ext uri="{FF2B5EF4-FFF2-40B4-BE49-F238E27FC236}">
-                <a16:creationId xmlns:a16="http://schemas.microsoft.com/office/drawing/2014/main" id="{B00F4EE6-8876-A618-7502-D2DA4F38FE8F}"/>
+                <a16:creationId xmlns:a16="http://schemas.microsoft.com/office/drawing/2014/main" id="{908A9F6F-71EA-036F-5BB3-E2BA262B3ADA}"/>
               </a:ext>
             </a:extLst>
           </p:cNvPr>
@@ -171,7 +171,7 @@
           <p:cNvPr id="3" name="字幕 2">
             <a:extLst>
               <a:ext uri="{FF2B5EF4-FFF2-40B4-BE49-F238E27FC236}">
-                <a16:creationId xmlns:a16="http://schemas.microsoft.com/office/drawing/2014/main" id="{0EA11FBF-4E6C-6CE4-2F26-E045B2EF13B5}"/>
+                <a16:creationId xmlns:a16="http://schemas.microsoft.com/office/drawing/2014/main" id="{4AE9DB59-7611-EF75-9EB1-E3F39D532859}"/>
               </a:ext>
             </a:extLst>
           </p:cNvPr>
@@ -241,7 +241,7 @@
           <p:cNvPr id="4" name="日付プレースホルダー 3">
             <a:extLst>
               <a:ext uri="{FF2B5EF4-FFF2-40B4-BE49-F238E27FC236}">
-                <a16:creationId xmlns:a16="http://schemas.microsoft.com/office/drawing/2014/main" id="{3165A4FB-8B1C-C7CF-04BD-CB99F62657B8}"/>
+                <a16:creationId xmlns:a16="http://schemas.microsoft.com/office/drawing/2014/main" id="{1BFDB24A-53ED-DF16-D206-B22B7A6A60CD}"/>
               </a:ext>
             </a:extLst>
           </p:cNvPr>
@@ -257,7 +257,7 @@
           <a:bodyPr/>
           <a:lstStyle/>
           <a:p>
-            <a:fld id="{70708204-28F4-47FC-A19E-27C932FDF4E9}" type="datetimeFigureOut">
+            <a:fld id="{F5B233DF-252A-4B94-878C-18039E32C17E}" type="datetimeFigureOut">
               <a:rPr kumimoji="1" lang="ja-JP" altLang="en-US" smtClean="0"/>
               <a:t>2026/7/30</a:t>
             </a:fld>
@@ -270,7 +270,7 @@
           <p:cNvPr id="5" name="フッター プレースホルダー 4">
             <a:extLst>
               <a:ext uri="{FF2B5EF4-FFF2-40B4-BE49-F238E27FC236}">
-                <a16:creationId xmlns:a16="http://schemas.microsoft.com/office/drawing/2014/main" id="{AA5E5B4D-4CC7-5256-17C1-30DD951E10B3}"/>
+                <a16:creationId xmlns:a16="http://schemas.microsoft.com/office/drawing/2014/main" id="{90D18E07-2C71-34E9-C6E6-D7160926321F}"/>
               </a:ext>
             </a:extLst>
           </p:cNvPr>
@@ -295,7 +295,7 @@
           <p:cNvPr id="6" name="スライド番号プレースホルダー 5">
             <a:extLst>
               <a:ext uri="{FF2B5EF4-FFF2-40B4-BE49-F238E27FC236}">
-                <a16:creationId xmlns:a16="http://schemas.microsoft.com/office/drawing/2014/main" id="{CCF3CD24-CA55-675B-9241-C330EC16CB1E}"/>
+                <a16:creationId xmlns:a16="http://schemas.microsoft.com/office/drawing/2014/main" id="{BDF2C299-B69C-C05D-A44C-E9EFF0B21D6D}"/>
               </a:ext>
             </a:extLst>
           </p:cNvPr>
@@ -311,7 +311,7 @@
           <a:bodyPr/>
           <a:lstStyle/>
           <a:p>
-            <a:fld id="{859497F0-5F34-405D-A7F3-3E7DF3B2637B}" type="slidenum">
+            <a:fld id="{79AA7089-380A-477E-86B0-D7663003EF2E}" type="slidenum">
               <a:rPr kumimoji="1" lang="ja-JP" altLang="en-US" smtClean="0"/>
               <a:t>‹#›</a:t>
             </a:fld>
@@ -322,7 +322,7 @@
     </p:spTree>
     <p:extLst>
       <p:ext uri="{BB962C8B-B14F-4D97-AF65-F5344CB8AC3E}">
-        <p14:creationId xmlns:p14="http://schemas.microsoft.com/office/powerpoint/2010/main" val="2518605197"/>
+        <p14:creationId xmlns:p14="http://schemas.microsoft.com/office/powerpoint/2010/main" val="1024740504"/>
       </p:ext>
     </p:extLst>
   </p:cSld>
@@ -354,7 +354,7 @@
           <p:cNvPr id="2" name="タイトル 1">
             <a:extLst>
               <a:ext uri="{FF2B5EF4-FFF2-40B4-BE49-F238E27FC236}">
-                <a16:creationId xmlns:a16="http://schemas.microsoft.com/office/drawing/2014/main" id="{74182253-91B4-7C07-3F09-5F3FC3F7B073}"/>
+                <a16:creationId xmlns:a16="http://schemas.microsoft.com/office/drawing/2014/main" id="{F423BED2-E52A-D5B9-7B9B-C48E96445C16}"/>
               </a:ext>
             </a:extLst>
           </p:cNvPr>
@@ -382,7 +382,7 @@
           <p:cNvPr id="3" name="縦書きテキスト プレースホルダー 2">
             <a:extLst>
               <a:ext uri="{FF2B5EF4-FFF2-40B4-BE49-F238E27FC236}">
-                <a16:creationId xmlns:a16="http://schemas.microsoft.com/office/drawing/2014/main" id="{739F0287-7185-77F3-A62C-25DE51262353}"/>
+                <a16:creationId xmlns:a16="http://schemas.microsoft.com/office/drawing/2014/main" id="{1FD12DCF-8158-EF92-8250-C8D13461B8BB}"/>
               </a:ext>
             </a:extLst>
           </p:cNvPr>
@@ -471,7 +471,7 @@
           <p:cNvPr id="4" name="日付プレースホルダー 3">
             <a:extLst>
               <a:ext uri="{FF2B5EF4-FFF2-40B4-BE49-F238E27FC236}">
-                <a16:creationId xmlns:a16="http://schemas.microsoft.com/office/drawing/2014/main" id="{77E1B2F1-911A-F898-9911-4AB5D0AD12EC}"/>
+                <a16:creationId xmlns:a16="http://schemas.microsoft.com/office/drawing/2014/main" id="{7B809B55-AA49-A9A2-8E4D-009A62888886}"/>
               </a:ext>
             </a:extLst>
           </p:cNvPr>
@@ -487,7 +487,7 @@
           <a:bodyPr/>
           <a:lstStyle/>
           <a:p>
-            <a:fld id="{70708204-28F4-47FC-A19E-27C932FDF4E9}" type="datetimeFigureOut">
+            <a:fld id="{F5B233DF-252A-4B94-878C-18039E32C17E}" type="datetimeFigureOut">
               <a:rPr kumimoji="1" lang="ja-JP" altLang="en-US" smtClean="0"/>
               <a:t>2026/7/30</a:t>
             </a:fld>
@@ -500,7 +500,7 @@
           <p:cNvPr id="5" name="フッター プレースホルダー 4">
             <a:extLst>
               <a:ext uri="{FF2B5EF4-FFF2-40B4-BE49-F238E27FC236}">
-                <a16:creationId xmlns:a16="http://schemas.microsoft.com/office/drawing/2014/main" id="{C0CA0E52-71CA-FEF7-3543-86F71F060258}"/>
+                <a16:creationId xmlns:a16="http://schemas.microsoft.com/office/drawing/2014/main" id="{1E09BBCF-A975-69FA-D272-BDE969627FA0}"/>
               </a:ext>
             </a:extLst>
           </p:cNvPr>
@@ -525,7 +525,7 @@
           <p:cNvPr id="6" name="スライド番号プレースホルダー 5">
             <a:extLst>
               <a:ext uri="{FF2B5EF4-FFF2-40B4-BE49-F238E27FC236}">
-                <a16:creationId xmlns:a16="http://schemas.microsoft.com/office/drawing/2014/main" id="{48091360-AA69-FD4B-3433-E3F2D895CEC9}"/>
+                <a16:creationId xmlns:a16="http://schemas.microsoft.com/office/drawing/2014/main" id="{EA586AA2-7311-C59A-BC17-387FA299B2A7}"/>
               </a:ext>
             </a:extLst>
           </p:cNvPr>
@@ -541,7 +541,7 @@
           <a:bodyPr/>
           <a:lstStyle/>
           <a:p>
-            <a:fld id="{859497F0-5F34-405D-A7F3-3E7DF3B2637B}" type="slidenum">
+            <a:fld id="{79AA7089-380A-477E-86B0-D7663003EF2E}" type="slidenum">
               <a:rPr kumimoji="1" lang="ja-JP" altLang="en-US" smtClean="0"/>
               <a:t>‹#›</a:t>
             </a:fld>
@@ -552,7 +552,7 @@
     </p:spTree>
     <p:extLst>
       <p:ext uri="{BB962C8B-B14F-4D97-AF65-F5344CB8AC3E}">
-        <p14:creationId xmlns:p14="http://schemas.microsoft.com/office/powerpoint/2010/main" val="3764314020"/>
+        <p14:creationId xmlns:p14="http://schemas.microsoft.com/office/powerpoint/2010/main" val="725315165"/>
       </p:ext>
     </p:extLst>
   </p:cSld>
@@ -584,7 +584,7 @@
           <p:cNvPr id="2" name="縦書きタイトル 1">
             <a:extLst>
               <a:ext uri="{FF2B5EF4-FFF2-40B4-BE49-F238E27FC236}">
-                <a16:creationId xmlns:a16="http://schemas.microsoft.com/office/drawing/2014/main" id="{3FB60E49-913C-CB49-61B8-5EBDB6C631B5}"/>
+                <a16:creationId xmlns:a16="http://schemas.microsoft.com/office/drawing/2014/main" id="{FD0ADEBC-D84A-D537-EB23-5EDC558EBD34}"/>
               </a:ext>
             </a:extLst>
           </p:cNvPr>
@@ -617,7 +617,7 @@
           <p:cNvPr id="3" name="縦書きテキスト プレースホルダー 2">
             <a:extLst>
               <a:ext uri="{FF2B5EF4-FFF2-40B4-BE49-F238E27FC236}">
-                <a16:creationId xmlns:a16="http://schemas.microsoft.com/office/drawing/2014/main" id="{5B20BBAC-7B82-4EB0-5301-710537322FA3}"/>
+                <a16:creationId xmlns:a16="http://schemas.microsoft.com/office/drawing/2014/main" id="{DD7D40CC-2EB2-4A85-14CD-B855D51E98CD}"/>
               </a:ext>
             </a:extLst>
           </p:cNvPr>
@@ -711,7 +711,7 @@
           <p:cNvPr id="4" name="日付プレースホルダー 3">
             <a:extLst>
               <a:ext uri="{FF2B5EF4-FFF2-40B4-BE49-F238E27FC236}">
-                <a16:creationId xmlns:a16="http://schemas.microsoft.com/office/drawing/2014/main" id="{4C782A91-961F-D9AB-EAE2-4B496821237A}"/>
+                <a16:creationId xmlns:a16="http://schemas.microsoft.com/office/drawing/2014/main" id="{6599149D-3CCD-063E-DFB6-AABC41B253E6}"/>
               </a:ext>
             </a:extLst>
           </p:cNvPr>
@@ -727,7 +727,7 @@
           <a:bodyPr/>
           <a:lstStyle/>
           <a:p>
-            <a:fld id="{70708204-28F4-47FC-A19E-27C932FDF4E9}" type="datetimeFigureOut">
+            <a:fld id="{F5B233DF-252A-4B94-878C-18039E32C17E}" type="datetimeFigureOut">
               <a:rPr kumimoji="1" lang="ja-JP" altLang="en-US" smtClean="0"/>
               <a:t>2026/7/30</a:t>
             </a:fld>
@@ -740,7 +740,7 @@
           <p:cNvPr id="5" name="フッター プレースホルダー 4">
             <a:extLst>
               <a:ext uri="{FF2B5EF4-FFF2-40B4-BE49-F238E27FC236}">
-                <a16:creationId xmlns:a16="http://schemas.microsoft.com/office/drawing/2014/main" id="{B81D5391-DAA6-4CBF-B6B6-5B9076FCB379}"/>
+                <a16:creationId xmlns:a16="http://schemas.microsoft.com/office/drawing/2014/main" id="{341D1883-FF6F-FD1F-6F0E-98FA7AE24C6E}"/>
               </a:ext>
             </a:extLst>
           </p:cNvPr>
@@ -765,7 +765,7 @@
           <p:cNvPr id="6" name="スライド番号プレースホルダー 5">
             <a:extLst>
               <a:ext uri="{FF2B5EF4-FFF2-40B4-BE49-F238E27FC236}">
-                <a16:creationId xmlns:a16="http://schemas.microsoft.com/office/drawing/2014/main" id="{43BB0224-D62A-F693-C4AF-0075204C5497}"/>
+                <a16:creationId xmlns:a16="http://schemas.microsoft.com/office/drawing/2014/main" id="{5C50C616-2057-8073-07A8-492C215BBF69}"/>
               </a:ext>
             </a:extLst>
           </p:cNvPr>
@@ -781,7 +781,7 @@
           <a:bodyPr/>
           <a:lstStyle/>
           <a:p>
-            <a:fld id="{859497F0-5F34-405D-A7F3-3E7DF3B2637B}" type="slidenum">
+            <a:fld id="{79AA7089-380A-477E-86B0-D7663003EF2E}" type="slidenum">
               <a:rPr kumimoji="1" lang="ja-JP" altLang="en-US" smtClean="0"/>
               <a:t>‹#›</a:t>
             </a:fld>
@@ -792,7 +792,7 @@
     </p:spTree>
     <p:extLst>
       <p:ext uri="{BB962C8B-B14F-4D97-AF65-F5344CB8AC3E}">
-        <p14:creationId xmlns:p14="http://schemas.microsoft.com/office/powerpoint/2010/main" val="1731546225"/>
+        <p14:creationId xmlns:p14="http://schemas.microsoft.com/office/powerpoint/2010/main" val="3648647636"/>
       </p:ext>
     </p:extLst>
   </p:cSld>
@@ -824,7 +824,7 @@
           <p:cNvPr id="2" name="タイトル 1">
             <a:extLst>
               <a:ext uri="{FF2B5EF4-FFF2-40B4-BE49-F238E27FC236}">
-                <a16:creationId xmlns:a16="http://schemas.microsoft.com/office/drawing/2014/main" id="{B74DB692-F540-29E4-1C4F-2E509C077559}"/>
+                <a16:creationId xmlns:a16="http://schemas.microsoft.com/office/drawing/2014/main" id="{3F9C9AFB-68F4-8056-49A8-F9E51549D075}"/>
               </a:ext>
             </a:extLst>
           </p:cNvPr>
@@ -852,7 +852,7 @@
           <p:cNvPr id="3" name="コンテンツ プレースホルダー 2">
             <a:extLst>
               <a:ext uri="{FF2B5EF4-FFF2-40B4-BE49-F238E27FC236}">
-                <a16:creationId xmlns:a16="http://schemas.microsoft.com/office/drawing/2014/main" id="{78BC8138-8D5E-BC31-9888-4BE3836493BD}"/>
+                <a16:creationId xmlns:a16="http://schemas.microsoft.com/office/drawing/2014/main" id="{0405B6E6-F593-0BFC-4A62-BD0D9E5CA935}"/>
               </a:ext>
             </a:extLst>
           </p:cNvPr>
@@ -941,7 +941,7 @@
           <p:cNvPr id="4" name="日付プレースホルダー 3">
             <a:extLst>
               <a:ext uri="{FF2B5EF4-FFF2-40B4-BE49-F238E27FC236}">
-                <a16:creationId xmlns:a16="http://schemas.microsoft.com/office/drawing/2014/main" id="{4B48C9EA-5899-13A7-73C8-D87E44A10266}"/>
+                <a16:creationId xmlns:a16="http://schemas.microsoft.com/office/drawing/2014/main" id="{40C04CE5-2798-A1C2-43BF-38CD9D32D4C6}"/>
               </a:ext>
             </a:extLst>
           </p:cNvPr>
@@ -957,7 +957,7 @@
           <a:bodyPr/>
           <a:lstStyle/>
           <a:p>
-            <a:fld id="{70708204-28F4-47FC-A19E-27C932FDF4E9}" type="datetimeFigureOut">
+            <a:fld id="{F5B233DF-252A-4B94-878C-18039E32C17E}" type="datetimeFigureOut">
               <a:rPr kumimoji="1" lang="ja-JP" altLang="en-US" smtClean="0"/>
               <a:t>2026/7/30</a:t>
             </a:fld>
@@ -970,7 +970,7 @@
           <p:cNvPr id="5" name="フッター プレースホルダー 4">
             <a:extLst>
               <a:ext uri="{FF2B5EF4-FFF2-40B4-BE49-F238E27FC236}">
-                <a16:creationId xmlns:a16="http://schemas.microsoft.com/office/drawing/2014/main" id="{B66EDA6B-E587-FEC3-1B01-B44391490050}"/>
+                <a16:creationId xmlns:a16="http://schemas.microsoft.com/office/drawing/2014/main" id="{5BB9DFDC-501D-1324-D461-81E55899F41F}"/>
               </a:ext>
             </a:extLst>
           </p:cNvPr>
@@ -995,7 +995,7 @@
           <p:cNvPr id="6" name="スライド番号プレースホルダー 5">
             <a:extLst>
               <a:ext uri="{FF2B5EF4-FFF2-40B4-BE49-F238E27FC236}">
-                <a16:creationId xmlns:a16="http://schemas.microsoft.com/office/drawing/2014/main" id="{DB814F14-94C0-4773-31AA-D56E846A1801}"/>
+                <a16:creationId xmlns:a16="http://schemas.microsoft.com/office/drawing/2014/main" id="{CD0BE741-05A3-FD87-2374-AE4D98ECA55B}"/>
               </a:ext>
             </a:extLst>
           </p:cNvPr>
@@ -1011,7 +1011,7 @@
           <a:bodyPr/>
           <a:lstStyle/>
           <a:p>
-            <a:fld id="{859497F0-5F34-405D-A7F3-3E7DF3B2637B}" type="slidenum">
+            <a:fld id="{79AA7089-380A-477E-86B0-D7663003EF2E}" type="slidenum">
               <a:rPr kumimoji="1" lang="ja-JP" altLang="en-US" smtClean="0"/>
               <a:t>‹#›</a:t>
             </a:fld>
@@ -1022,7 +1022,7 @@
     </p:spTree>
     <p:extLst>
       <p:ext uri="{BB962C8B-B14F-4D97-AF65-F5344CB8AC3E}">
-        <p14:creationId xmlns:p14="http://schemas.microsoft.com/office/powerpoint/2010/main" val="22545073"/>
+        <p14:creationId xmlns:p14="http://schemas.microsoft.com/office/powerpoint/2010/main" val="1447944312"/>
       </p:ext>
     </p:extLst>
   </p:cSld>
@@ -1054,7 +1054,7 @@
           <p:cNvPr id="2" name="タイトル 1">
             <a:extLst>
               <a:ext uri="{FF2B5EF4-FFF2-40B4-BE49-F238E27FC236}">
-                <a16:creationId xmlns:a16="http://schemas.microsoft.com/office/drawing/2014/main" id="{8B4425D0-27A4-8FD1-A645-D4EC182897D3}"/>
+                <a16:creationId xmlns:a16="http://schemas.microsoft.com/office/drawing/2014/main" id="{986EBBB7-D99F-3398-6DE3-69B7334E85E4}"/>
               </a:ext>
             </a:extLst>
           </p:cNvPr>
@@ -1091,7 +1091,7 @@
           <p:cNvPr id="3" name="テキスト プレースホルダー 2">
             <a:extLst>
               <a:ext uri="{FF2B5EF4-FFF2-40B4-BE49-F238E27FC236}">
-                <a16:creationId xmlns:a16="http://schemas.microsoft.com/office/drawing/2014/main" id="{DCD1F0F6-1E2F-3FB4-7E0D-DD6EC7106134}"/>
+                <a16:creationId xmlns:a16="http://schemas.microsoft.com/office/drawing/2014/main" id="{2E4D64BB-2856-13F7-FE49-538E6C6971D9}"/>
               </a:ext>
             </a:extLst>
           </p:cNvPr>
@@ -1216,7 +1216,7 @@
           <p:cNvPr id="4" name="日付プレースホルダー 3">
             <a:extLst>
               <a:ext uri="{FF2B5EF4-FFF2-40B4-BE49-F238E27FC236}">
-                <a16:creationId xmlns:a16="http://schemas.microsoft.com/office/drawing/2014/main" id="{B3111325-256E-3F3F-9E9E-511852ECB6D6}"/>
+                <a16:creationId xmlns:a16="http://schemas.microsoft.com/office/drawing/2014/main" id="{B0CBB1D0-4B03-F676-5440-FC14AF69BB51}"/>
               </a:ext>
             </a:extLst>
           </p:cNvPr>
@@ -1232,7 +1232,7 @@
           <a:bodyPr/>
           <a:lstStyle/>
           <a:p>
-            <a:fld id="{70708204-28F4-47FC-A19E-27C932FDF4E9}" type="datetimeFigureOut">
+            <a:fld id="{F5B233DF-252A-4B94-878C-18039E32C17E}" type="datetimeFigureOut">
               <a:rPr kumimoji="1" lang="ja-JP" altLang="en-US" smtClean="0"/>
               <a:t>2026/7/30</a:t>
             </a:fld>
@@ -1245,7 +1245,7 @@
           <p:cNvPr id="5" name="フッター プレースホルダー 4">
             <a:extLst>
               <a:ext uri="{FF2B5EF4-FFF2-40B4-BE49-F238E27FC236}">
-                <a16:creationId xmlns:a16="http://schemas.microsoft.com/office/drawing/2014/main" id="{FACEB060-DD31-4C81-3991-A05E8A1A3119}"/>
+                <a16:creationId xmlns:a16="http://schemas.microsoft.com/office/drawing/2014/main" id="{01C02655-D11E-DE7A-E5C3-CC77B807143D}"/>
               </a:ext>
             </a:extLst>
           </p:cNvPr>
@@ -1270,7 +1270,7 @@
           <p:cNvPr id="6" name="スライド番号プレースホルダー 5">
             <a:extLst>
               <a:ext uri="{FF2B5EF4-FFF2-40B4-BE49-F238E27FC236}">
-                <a16:creationId xmlns:a16="http://schemas.microsoft.com/office/drawing/2014/main" id="{2F39EEA7-D8C9-1EF3-7A07-D4ABB8D8D14C}"/>
+                <a16:creationId xmlns:a16="http://schemas.microsoft.com/office/drawing/2014/main" id="{164723EB-6373-47CB-021B-E28DEF32A84A}"/>
               </a:ext>
             </a:extLst>
           </p:cNvPr>
@@ -1286,7 +1286,7 @@
           <a:bodyPr/>
           <a:lstStyle/>
           <a:p>
-            <a:fld id="{859497F0-5F34-405D-A7F3-3E7DF3B2637B}" type="slidenum">
+            <a:fld id="{79AA7089-380A-477E-86B0-D7663003EF2E}" type="slidenum">
               <a:rPr kumimoji="1" lang="ja-JP" altLang="en-US" smtClean="0"/>
               <a:t>‹#›</a:t>
             </a:fld>
@@ -1297,7 +1297,7 @@
     </p:spTree>
     <p:extLst>
       <p:ext uri="{BB962C8B-B14F-4D97-AF65-F5344CB8AC3E}">
-        <p14:creationId xmlns:p14="http://schemas.microsoft.com/office/powerpoint/2010/main" val="3532374513"/>
+        <p14:creationId xmlns:p14="http://schemas.microsoft.com/office/powerpoint/2010/main" val="2397046183"/>
       </p:ext>
     </p:extLst>
   </p:cSld>
@@ -1329,7 +1329,7 @@
           <p:cNvPr id="2" name="タイトル 1">
             <a:extLst>
               <a:ext uri="{FF2B5EF4-FFF2-40B4-BE49-F238E27FC236}">
-                <a16:creationId xmlns:a16="http://schemas.microsoft.com/office/drawing/2014/main" id="{1DFAFE55-11BF-58BC-F0B0-147D73D2AD76}"/>
+                <a16:creationId xmlns:a16="http://schemas.microsoft.com/office/drawing/2014/main" id="{C75C6C30-B4E1-AA40-677A-EAC7E620F803}"/>
               </a:ext>
             </a:extLst>
           </p:cNvPr>
@@ -1357,7 +1357,7 @@
           <p:cNvPr id="3" name="コンテンツ プレースホルダー 2">
             <a:extLst>
               <a:ext uri="{FF2B5EF4-FFF2-40B4-BE49-F238E27FC236}">
-                <a16:creationId xmlns:a16="http://schemas.microsoft.com/office/drawing/2014/main" id="{D1332E7D-9944-2E7E-B2D7-F384F39F797E}"/>
+                <a16:creationId xmlns:a16="http://schemas.microsoft.com/office/drawing/2014/main" id="{239C0B77-8F2F-451F-98C3-D5D3CF8C481C}"/>
               </a:ext>
             </a:extLst>
           </p:cNvPr>
@@ -1451,7 +1451,7 @@
           <p:cNvPr id="4" name="コンテンツ プレースホルダー 3">
             <a:extLst>
               <a:ext uri="{FF2B5EF4-FFF2-40B4-BE49-F238E27FC236}">
-                <a16:creationId xmlns:a16="http://schemas.microsoft.com/office/drawing/2014/main" id="{413E126B-F0A3-663E-F934-0B0B5B7D7F6F}"/>
+                <a16:creationId xmlns:a16="http://schemas.microsoft.com/office/drawing/2014/main" id="{128E1B7B-3461-FABF-F84A-5FD2DD17417F}"/>
               </a:ext>
             </a:extLst>
           </p:cNvPr>
@@ -1545,7 +1545,7 @@
           <p:cNvPr id="5" name="日付プレースホルダー 4">
             <a:extLst>
               <a:ext uri="{FF2B5EF4-FFF2-40B4-BE49-F238E27FC236}">
-                <a16:creationId xmlns:a16="http://schemas.microsoft.com/office/drawing/2014/main" id="{9C4B7EFA-B8E6-6069-86D3-B19D70B700B4}"/>
+                <a16:creationId xmlns:a16="http://schemas.microsoft.com/office/drawing/2014/main" id="{1F947981-3F2E-B2DC-4AA7-DBC7C9492E61}"/>
               </a:ext>
             </a:extLst>
           </p:cNvPr>
@@ -1561,7 +1561,7 @@
           <a:bodyPr/>
           <a:lstStyle/>
           <a:p>
-            <a:fld id="{70708204-28F4-47FC-A19E-27C932FDF4E9}" type="datetimeFigureOut">
+            <a:fld id="{F5B233DF-252A-4B94-878C-18039E32C17E}" type="datetimeFigureOut">
               <a:rPr kumimoji="1" lang="ja-JP" altLang="en-US" smtClean="0"/>
               <a:t>2026/7/30</a:t>
             </a:fld>
@@ -1574,7 +1574,7 @@
           <p:cNvPr id="6" name="フッター プレースホルダー 5">
             <a:extLst>
               <a:ext uri="{FF2B5EF4-FFF2-40B4-BE49-F238E27FC236}">
-                <a16:creationId xmlns:a16="http://schemas.microsoft.com/office/drawing/2014/main" id="{DD8C6C00-987F-8851-547B-3415A8C399B5}"/>
+                <a16:creationId xmlns:a16="http://schemas.microsoft.com/office/drawing/2014/main" id="{DB645281-D40B-97C4-E6AF-C11BA613EF56}"/>
               </a:ext>
             </a:extLst>
           </p:cNvPr>
@@ -1599,7 +1599,7 @@
           <p:cNvPr id="7" name="スライド番号プレースホルダー 6">
             <a:extLst>
               <a:ext uri="{FF2B5EF4-FFF2-40B4-BE49-F238E27FC236}">
-                <a16:creationId xmlns:a16="http://schemas.microsoft.com/office/drawing/2014/main" id="{A649BC1B-F461-29A4-D190-A21FA5BCF83F}"/>
+                <a16:creationId xmlns:a16="http://schemas.microsoft.com/office/drawing/2014/main" id="{7FB4761E-CE0F-975B-6CA5-C78CB2D64EF2}"/>
               </a:ext>
             </a:extLst>
           </p:cNvPr>
@@ -1615,7 +1615,7 @@
           <a:bodyPr/>
           <a:lstStyle/>
           <a:p>
-            <a:fld id="{859497F0-5F34-405D-A7F3-3E7DF3B2637B}" type="slidenum">
+            <a:fld id="{79AA7089-380A-477E-86B0-D7663003EF2E}" type="slidenum">
               <a:rPr kumimoji="1" lang="ja-JP" altLang="en-US" smtClean="0"/>
               <a:t>‹#›</a:t>
             </a:fld>
@@ -1626,7 +1626,7 @@
     </p:spTree>
     <p:extLst>
       <p:ext uri="{BB962C8B-B14F-4D97-AF65-F5344CB8AC3E}">
-        <p14:creationId xmlns:p14="http://schemas.microsoft.com/office/powerpoint/2010/main" val="396184302"/>
+        <p14:creationId xmlns:p14="http://schemas.microsoft.com/office/powerpoint/2010/main" val="82722344"/>
       </p:ext>
     </p:extLst>
   </p:cSld>
@@ -1658,7 +1658,7 @@
           <p:cNvPr id="2" name="タイトル 1">
             <a:extLst>
               <a:ext uri="{FF2B5EF4-FFF2-40B4-BE49-F238E27FC236}">
-                <a16:creationId xmlns:a16="http://schemas.microsoft.com/office/drawing/2014/main" id="{84252190-6698-647F-2CF6-737A133094C4}"/>
+                <a16:creationId xmlns:a16="http://schemas.microsoft.com/office/drawing/2014/main" id="{70532A6B-1B59-9846-4DE4-089523D8D006}"/>
               </a:ext>
             </a:extLst>
           </p:cNvPr>
@@ -1691,7 +1691,7 @@
           <p:cNvPr id="3" name="テキスト プレースホルダー 2">
             <a:extLst>
               <a:ext uri="{FF2B5EF4-FFF2-40B4-BE49-F238E27FC236}">
-                <a16:creationId xmlns:a16="http://schemas.microsoft.com/office/drawing/2014/main" id="{8965B709-7D62-8652-796D-065BD52BDFD4}"/>
+                <a16:creationId xmlns:a16="http://schemas.microsoft.com/office/drawing/2014/main" id="{7EA99EB4-3B2B-9AD4-A92B-217F58C50EB2}"/>
               </a:ext>
             </a:extLst>
           </p:cNvPr>
@@ -1762,7 +1762,7 @@
           <p:cNvPr id="4" name="コンテンツ プレースホルダー 3">
             <a:extLst>
               <a:ext uri="{FF2B5EF4-FFF2-40B4-BE49-F238E27FC236}">
-                <a16:creationId xmlns:a16="http://schemas.microsoft.com/office/drawing/2014/main" id="{547DA133-C188-C2D7-6DC0-9C5AC69C1528}"/>
+                <a16:creationId xmlns:a16="http://schemas.microsoft.com/office/drawing/2014/main" id="{ED552052-7D18-7E50-C06D-73FF717DD774}"/>
               </a:ext>
             </a:extLst>
           </p:cNvPr>
@@ -1856,7 +1856,7 @@
           <p:cNvPr id="5" name="テキスト プレースホルダー 4">
             <a:extLst>
               <a:ext uri="{FF2B5EF4-FFF2-40B4-BE49-F238E27FC236}">
-                <a16:creationId xmlns:a16="http://schemas.microsoft.com/office/drawing/2014/main" id="{422F621E-55A1-1B46-19BD-2CAB8F4A8BD6}"/>
+                <a16:creationId xmlns:a16="http://schemas.microsoft.com/office/drawing/2014/main" id="{09D574FB-8475-718D-8880-B2487469C880}"/>
               </a:ext>
             </a:extLst>
           </p:cNvPr>
@@ -1927,7 +1927,7 @@
           <p:cNvPr id="6" name="コンテンツ プレースホルダー 5">
             <a:extLst>
               <a:ext uri="{FF2B5EF4-FFF2-40B4-BE49-F238E27FC236}">
-                <a16:creationId xmlns:a16="http://schemas.microsoft.com/office/drawing/2014/main" id="{225E6604-61F2-BC0A-CCB4-B6D217D13F82}"/>
+                <a16:creationId xmlns:a16="http://schemas.microsoft.com/office/drawing/2014/main" id="{FA9C1E5E-E2A8-6B01-E5C5-02B61DF22902}"/>
               </a:ext>
             </a:extLst>
           </p:cNvPr>
@@ -2021,7 +2021,7 @@
           <p:cNvPr id="7" name="日付プレースホルダー 6">
             <a:extLst>
               <a:ext uri="{FF2B5EF4-FFF2-40B4-BE49-F238E27FC236}">
-                <a16:creationId xmlns:a16="http://schemas.microsoft.com/office/drawing/2014/main" id="{EEB8089E-D57F-4F00-D7EE-1A59E3E7C2EA}"/>
+                <a16:creationId xmlns:a16="http://schemas.microsoft.com/office/drawing/2014/main" id="{4824218A-C237-DD8B-F688-F6D8FBD839AD}"/>
               </a:ext>
             </a:extLst>
           </p:cNvPr>
@@ -2037,7 +2037,7 @@
           <a:bodyPr/>
           <a:lstStyle/>
           <a:p>
-            <a:fld id="{70708204-28F4-47FC-A19E-27C932FDF4E9}" type="datetimeFigureOut">
+            <a:fld id="{F5B233DF-252A-4B94-878C-18039E32C17E}" type="datetimeFigureOut">
               <a:rPr kumimoji="1" lang="ja-JP" altLang="en-US" smtClean="0"/>
               <a:t>2026/7/30</a:t>
             </a:fld>
@@ -2050,7 +2050,7 @@
           <p:cNvPr id="8" name="フッター プレースホルダー 7">
             <a:extLst>
               <a:ext uri="{FF2B5EF4-FFF2-40B4-BE49-F238E27FC236}">
-                <a16:creationId xmlns:a16="http://schemas.microsoft.com/office/drawing/2014/main" id="{E3954074-E3D1-5EC0-8A41-A3D3AFF3A6FB}"/>
+                <a16:creationId xmlns:a16="http://schemas.microsoft.com/office/drawing/2014/main" id="{4AD3E218-E3BE-8A9F-0634-4005D77EF48F}"/>
               </a:ext>
             </a:extLst>
           </p:cNvPr>
@@ -2075,7 +2075,7 @@
           <p:cNvPr id="9" name="スライド番号プレースホルダー 8">
             <a:extLst>
               <a:ext uri="{FF2B5EF4-FFF2-40B4-BE49-F238E27FC236}">
-                <a16:creationId xmlns:a16="http://schemas.microsoft.com/office/drawing/2014/main" id="{60FA2B8C-8221-0FA3-BD64-F4DA83505BDE}"/>
+                <a16:creationId xmlns:a16="http://schemas.microsoft.com/office/drawing/2014/main" id="{B9410CB1-E568-69D1-912D-54FECD3207AC}"/>
               </a:ext>
             </a:extLst>
           </p:cNvPr>
@@ -2091,7 +2091,7 @@
           <a:bodyPr/>
           <a:lstStyle/>
           <a:p>
-            <a:fld id="{859497F0-5F34-405D-A7F3-3E7DF3B2637B}" type="slidenum">
+            <a:fld id="{79AA7089-380A-477E-86B0-D7663003EF2E}" type="slidenum">
               <a:rPr kumimoji="1" lang="ja-JP" altLang="en-US" smtClean="0"/>
               <a:t>‹#›</a:t>
             </a:fld>
@@ -2102,7 +2102,7 @@
     </p:spTree>
     <p:extLst>
       <p:ext uri="{BB962C8B-B14F-4D97-AF65-F5344CB8AC3E}">
-        <p14:creationId xmlns:p14="http://schemas.microsoft.com/office/powerpoint/2010/main" val="1712026362"/>
+        <p14:creationId xmlns:p14="http://schemas.microsoft.com/office/powerpoint/2010/main" val="2251434278"/>
       </p:ext>
     </p:extLst>
   </p:cSld>
@@ -2134,7 +2134,7 @@
           <p:cNvPr id="2" name="タイトル 1">
             <a:extLst>
               <a:ext uri="{FF2B5EF4-FFF2-40B4-BE49-F238E27FC236}">
-                <a16:creationId xmlns:a16="http://schemas.microsoft.com/office/drawing/2014/main" id="{951DC4D6-9086-ABD4-AC04-65DCE778E4AC}"/>
+                <a16:creationId xmlns:a16="http://schemas.microsoft.com/office/drawing/2014/main" id="{5FB64711-3B3D-2EBE-A75D-2743A54B04CF}"/>
               </a:ext>
             </a:extLst>
           </p:cNvPr>
@@ -2162,7 +2162,7 @@
           <p:cNvPr id="3" name="日付プレースホルダー 2">
             <a:extLst>
               <a:ext uri="{FF2B5EF4-FFF2-40B4-BE49-F238E27FC236}">
-                <a16:creationId xmlns:a16="http://schemas.microsoft.com/office/drawing/2014/main" id="{AF6C699F-D8FF-2C53-74FD-035EF105C1FD}"/>
+                <a16:creationId xmlns:a16="http://schemas.microsoft.com/office/drawing/2014/main" id="{6DF9F4D4-EEE7-560B-CB73-6DAA036D3560}"/>
               </a:ext>
             </a:extLst>
           </p:cNvPr>
@@ -2178,7 +2178,7 @@
           <a:bodyPr/>
           <a:lstStyle/>
           <a:p>
-            <a:fld id="{70708204-28F4-47FC-A19E-27C932FDF4E9}" type="datetimeFigureOut">
+            <a:fld id="{F5B233DF-252A-4B94-878C-18039E32C17E}" type="datetimeFigureOut">
               <a:rPr kumimoji="1" lang="ja-JP" altLang="en-US" smtClean="0"/>
               <a:t>2026/7/30</a:t>
             </a:fld>
@@ -2191,7 +2191,7 @@
           <p:cNvPr id="4" name="フッター プレースホルダー 3">
             <a:extLst>
               <a:ext uri="{FF2B5EF4-FFF2-40B4-BE49-F238E27FC236}">
-                <a16:creationId xmlns:a16="http://schemas.microsoft.com/office/drawing/2014/main" id="{CC7E91FE-B66F-ADAA-9DB6-6B36BB630131}"/>
+                <a16:creationId xmlns:a16="http://schemas.microsoft.com/office/drawing/2014/main" id="{9AC78843-5D6B-C8A4-6C50-2EF7832AA1D1}"/>
               </a:ext>
             </a:extLst>
           </p:cNvPr>
@@ -2216,7 +2216,7 @@
           <p:cNvPr id="5" name="スライド番号プレースホルダー 4">
             <a:extLst>
               <a:ext uri="{FF2B5EF4-FFF2-40B4-BE49-F238E27FC236}">
-                <a16:creationId xmlns:a16="http://schemas.microsoft.com/office/drawing/2014/main" id="{537DD7C3-1FAC-8396-2697-63E18EA72A88}"/>
+                <a16:creationId xmlns:a16="http://schemas.microsoft.com/office/drawing/2014/main" id="{74DA576D-1F2D-46CD-15A9-7C60E26EA7E4}"/>
               </a:ext>
             </a:extLst>
           </p:cNvPr>
@@ -2232,7 +2232,7 @@
           <a:bodyPr/>
           <a:lstStyle/>
           <a:p>
-            <a:fld id="{859497F0-5F34-405D-A7F3-3E7DF3B2637B}" type="slidenum">
+            <a:fld id="{79AA7089-380A-477E-86B0-D7663003EF2E}" type="slidenum">
               <a:rPr kumimoji="1" lang="ja-JP" altLang="en-US" smtClean="0"/>
               <a:t>‹#›</a:t>
             </a:fld>
@@ -2243,7 +2243,7 @@
     </p:spTree>
     <p:extLst>
       <p:ext uri="{BB962C8B-B14F-4D97-AF65-F5344CB8AC3E}">
-        <p14:creationId xmlns:p14="http://schemas.microsoft.com/office/powerpoint/2010/main" val="1988273966"/>
+        <p14:creationId xmlns:p14="http://schemas.microsoft.com/office/powerpoint/2010/main" val="1254860039"/>
       </p:ext>
     </p:extLst>
   </p:cSld>
@@ -2275,7 +2275,7 @@
           <p:cNvPr id="2" name="日付プレースホルダー 1">
             <a:extLst>
               <a:ext uri="{FF2B5EF4-FFF2-40B4-BE49-F238E27FC236}">
-                <a16:creationId xmlns:a16="http://schemas.microsoft.com/office/drawing/2014/main" id="{C6E06601-3728-A1A9-3B5D-25937868E759}"/>
+                <a16:creationId xmlns:a16="http://schemas.microsoft.com/office/drawing/2014/main" id="{EB8F872A-AACD-C84C-574B-227E7E552020}"/>
               </a:ext>
             </a:extLst>
           </p:cNvPr>
@@ -2291,7 +2291,7 @@
           <a:bodyPr/>
           <a:lstStyle/>
           <a:p>
-            <a:fld id="{70708204-28F4-47FC-A19E-27C932FDF4E9}" type="datetimeFigureOut">
+            <a:fld id="{F5B233DF-252A-4B94-878C-18039E32C17E}" type="datetimeFigureOut">
               <a:rPr kumimoji="1" lang="ja-JP" altLang="en-US" smtClean="0"/>
               <a:t>2026/7/30</a:t>
             </a:fld>
@@ -2304,7 +2304,7 @@
           <p:cNvPr id="3" name="フッター プレースホルダー 2">
             <a:extLst>
               <a:ext uri="{FF2B5EF4-FFF2-40B4-BE49-F238E27FC236}">
-                <a16:creationId xmlns:a16="http://schemas.microsoft.com/office/drawing/2014/main" id="{BB81FD58-04F7-5E9A-E028-40FFA1DDABE9}"/>
+                <a16:creationId xmlns:a16="http://schemas.microsoft.com/office/drawing/2014/main" id="{10820BAE-604D-6E5A-F1A2-229D7D95C4B6}"/>
               </a:ext>
             </a:extLst>
           </p:cNvPr>
@@ -2329,7 +2329,7 @@
           <p:cNvPr id="4" name="スライド番号プレースホルダー 3">
             <a:extLst>
               <a:ext uri="{FF2B5EF4-FFF2-40B4-BE49-F238E27FC236}">
-                <a16:creationId xmlns:a16="http://schemas.microsoft.com/office/drawing/2014/main" id="{94A3D8D9-1BAC-5FE9-C7EB-CBB5109A56A7}"/>
+                <a16:creationId xmlns:a16="http://schemas.microsoft.com/office/drawing/2014/main" id="{160F084F-0B13-80DE-67D3-7C74CF778315}"/>
               </a:ext>
             </a:extLst>
           </p:cNvPr>
@@ -2345,7 +2345,7 @@
           <a:bodyPr/>
           <a:lstStyle/>
           <a:p>
-            <a:fld id="{859497F0-5F34-405D-A7F3-3E7DF3B2637B}" type="slidenum">
+            <a:fld id="{79AA7089-380A-477E-86B0-D7663003EF2E}" type="slidenum">
               <a:rPr kumimoji="1" lang="ja-JP" altLang="en-US" smtClean="0"/>
               <a:t>‹#›</a:t>
             </a:fld>
@@ -2356,7 +2356,7 @@
     </p:spTree>
     <p:extLst>
       <p:ext uri="{BB962C8B-B14F-4D97-AF65-F5344CB8AC3E}">
-        <p14:creationId xmlns:p14="http://schemas.microsoft.com/office/powerpoint/2010/main" val="1780789149"/>
+        <p14:creationId xmlns:p14="http://schemas.microsoft.com/office/powerpoint/2010/main" val="3315222026"/>
       </p:ext>
     </p:extLst>
   </p:cSld>
@@ -2388,7 +2388,7 @@
           <p:cNvPr id="2" name="タイトル 1">
             <a:extLst>
               <a:ext uri="{FF2B5EF4-FFF2-40B4-BE49-F238E27FC236}">
-                <a16:creationId xmlns:a16="http://schemas.microsoft.com/office/drawing/2014/main" id="{C9D18027-EE59-6955-A03D-BBB5A535311A}"/>
+                <a16:creationId xmlns:a16="http://schemas.microsoft.com/office/drawing/2014/main" id="{E2A1B8A1-2DE3-EEAA-9E46-B2DE63E763AA}"/>
               </a:ext>
             </a:extLst>
           </p:cNvPr>
@@ -2425,7 +2425,7 @@
           <p:cNvPr id="3" name="コンテンツ プレースホルダー 2">
             <a:extLst>
               <a:ext uri="{FF2B5EF4-FFF2-40B4-BE49-F238E27FC236}">
-                <a16:creationId xmlns:a16="http://schemas.microsoft.com/office/drawing/2014/main" id="{82662581-43FB-66DF-91B4-BF94D20E11EE}"/>
+                <a16:creationId xmlns:a16="http://schemas.microsoft.com/office/drawing/2014/main" id="{ADEE0719-00D3-9D12-4D7E-AF9F30979F22}"/>
               </a:ext>
             </a:extLst>
           </p:cNvPr>
@@ -2547,7 +2547,7 @@
           <p:cNvPr id="4" name="テキスト プレースホルダー 3">
             <a:extLst>
               <a:ext uri="{FF2B5EF4-FFF2-40B4-BE49-F238E27FC236}">
-                <a16:creationId xmlns:a16="http://schemas.microsoft.com/office/drawing/2014/main" id="{87B14B77-A6D4-EE40-9D6C-B095A4EE7672}"/>
+                <a16:creationId xmlns:a16="http://schemas.microsoft.com/office/drawing/2014/main" id="{ECE2D6B7-278C-D11B-8E20-BD640A575ED1}"/>
               </a:ext>
             </a:extLst>
           </p:cNvPr>
@@ -2618,7 +2618,7 @@
           <p:cNvPr id="5" name="日付プレースホルダー 4">
             <a:extLst>
               <a:ext uri="{FF2B5EF4-FFF2-40B4-BE49-F238E27FC236}">
-                <a16:creationId xmlns:a16="http://schemas.microsoft.com/office/drawing/2014/main" id="{D95B6CB9-269E-5D72-6A3B-E0B61BA42D5C}"/>
+                <a16:creationId xmlns:a16="http://schemas.microsoft.com/office/drawing/2014/main" id="{E372D137-8206-EB28-4B05-FED538647F76}"/>
               </a:ext>
             </a:extLst>
           </p:cNvPr>
@@ -2634,7 +2634,7 @@
           <a:bodyPr/>
           <a:lstStyle/>
           <a:p>
-            <a:fld id="{70708204-28F4-47FC-A19E-27C932FDF4E9}" type="datetimeFigureOut">
+            <a:fld id="{F5B233DF-252A-4B94-878C-18039E32C17E}" type="datetimeFigureOut">
               <a:rPr kumimoji="1" lang="ja-JP" altLang="en-US" smtClean="0"/>
               <a:t>2026/7/30</a:t>
             </a:fld>
@@ -2647,7 +2647,7 @@
           <p:cNvPr id="6" name="フッター プレースホルダー 5">
             <a:extLst>
               <a:ext uri="{FF2B5EF4-FFF2-40B4-BE49-F238E27FC236}">
-                <a16:creationId xmlns:a16="http://schemas.microsoft.com/office/drawing/2014/main" id="{2FAA1F57-CE18-361B-7946-CC3396B7D558}"/>
+                <a16:creationId xmlns:a16="http://schemas.microsoft.com/office/drawing/2014/main" id="{9787BF2A-F3C6-A7AC-DE22-E7EDF78E99FB}"/>
               </a:ext>
             </a:extLst>
           </p:cNvPr>
@@ -2672,7 +2672,7 @@
           <p:cNvPr id="7" name="スライド番号プレースホルダー 6">
             <a:extLst>
               <a:ext uri="{FF2B5EF4-FFF2-40B4-BE49-F238E27FC236}">
-                <a16:creationId xmlns:a16="http://schemas.microsoft.com/office/drawing/2014/main" id="{31CCD89F-96C5-543A-BC96-CE35BD8DC8E1}"/>
+                <a16:creationId xmlns:a16="http://schemas.microsoft.com/office/drawing/2014/main" id="{C18E3B57-5C97-97C5-56DF-56A92D0BB06B}"/>
               </a:ext>
             </a:extLst>
           </p:cNvPr>
@@ -2688,7 +2688,7 @@
           <a:bodyPr/>
           <a:lstStyle/>
           <a:p>
-            <a:fld id="{859497F0-5F34-405D-A7F3-3E7DF3B2637B}" type="slidenum">
+            <a:fld id="{79AA7089-380A-477E-86B0-D7663003EF2E}" type="slidenum">
               <a:rPr kumimoji="1" lang="ja-JP" altLang="en-US" smtClean="0"/>
               <a:t>‹#›</a:t>
             </a:fld>
@@ -2699,7 +2699,7 @@
     </p:spTree>
     <p:extLst>
       <p:ext uri="{BB962C8B-B14F-4D97-AF65-F5344CB8AC3E}">
-        <p14:creationId xmlns:p14="http://schemas.microsoft.com/office/powerpoint/2010/main" val="1550171300"/>
+        <p14:creationId xmlns:p14="http://schemas.microsoft.com/office/powerpoint/2010/main" val="2423458228"/>
       </p:ext>
     </p:extLst>
   </p:cSld>
@@ -2731,7 +2731,7 @@
           <p:cNvPr id="2" name="タイトル 1">
             <a:extLst>
               <a:ext uri="{FF2B5EF4-FFF2-40B4-BE49-F238E27FC236}">
-                <a16:creationId xmlns:a16="http://schemas.microsoft.com/office/drawing/2014/main" id="{E14C171E-CC8A-6B95-E6A1-86532BEAE721}"/>
+                <a16:creationId xmlns:a16="http://schemas.microsoft.com/office/drawing/2014/main" id="{11A6EED3-558E-9B76-1441-D0281EF768A2}"/>
               </a:ext>
             </a:extLst>
           </p:cNvPr>
@@ -2768,7 +2768,7 @@
           <p:cNvPr id="3" name="図プレースホルダー 2">
             <a:extLst>
               <a:ext uri="{FF2B5EF4-FFF2-40B4-BE49-F238E27FC236}">
-                <a16:creationId xmlns:a16="http://schemas.microsoft.com/office/drawing/2014/main" id="{1AE8FBDA-0B0C-4982-64D9-26319FFF9944}"/>
+                <a16:creationId xmlns:a16="http://schemas.microsoft.com/office/drawing/2014/main" id="{FF2E7C25-9A82-03B0-D11D-7BA8B803848C}"/>
               </a:ext>
             </a:extLst>
           </p:cNvPr>
@@ -2835,7 +2835,7 @@
           <p:cNvPr id="4" name="テキスト プレースホルダー 3">
             <a:extLst>
               <a:ext uri="{FF2B5EF4-FFF2-40B4-BE49-F238E27FC236}">
-                <a16:creationId xmlns:a16="http://schemas.microsoft.com/office/drawing/2014/main" id="{F5F76442-0F7F-D3FB-43C3-FAC69EA2A553}"/>
+                <a16:creationId xmlns:a16="http://schemas.microsoft.com/office/drawing/2014/main" id="{2B44DC03-5F22-E8EE-AC1C-CC163FFF0E48}"/>
               </a:ext>
             </a:extLst>
           </p:cNvPr>
@@ -2906,7 +2906,7 @@
           <p:cNvPr id="5" name="日付プレースホルダー 4">
             <a:extLst>
               <a:ext uri="{FF2B5EF4-FFF2-40B4-BE49-F238E27FC236}">
-                <a16:creationId xmlns:a16="http://schemas.microsoft.com/office/drawing/2014/main" id="{DA77E107-3EAF-1BE0-BFC8-D3B112CFCB13}"/>
+                <a16:creationId xmlns:a16="http://schemas.microsoft.com/office/drawing/2014/main" id="{01A5226B-56D0-E675-63CA-BC807DFC4873}"/>
               </a:ext>
             </a:extLst>
           </p:cNvPr>
@@ -2922,7 +2922,7 @@
           <a:bodyPr/>
           <a:lstStyle/>
           <a:p>
-            <a:fld id="{70708204-28F4-47FC-A19E-27C932FDF4E9}" type="datetimeFigureOut">
+            <a:fld id="{F5B233DF-252A-4B94-878C-18039E32C17E}" type="datetimeFigureOut">
               <a:rPr kumimoji="1" lang="ja-JP" altLang="en-US" smtClean="0"/>
               <a:t>2026/7/30</a:t>
             </a:fld>
@@ -2935,7 +2935,7 @@
           <p:cNvPr id="6" name="フッター プレースホルダー 5">
             <a:extLst>
               <a:ext uri="{FF2B5EF4-FFF2-40B4-BE49-F238E27FC236}">
-                <a16:creationId xmlns:a16="http://schemas.microsoft.com/office/drawing/2014/main" id="{ED4319E1-8A83-BD70-3208-2B3E7FFA2BB3}"/>
+                <a16:creationId xmlns:a16="http://schemas.microsoft.com/office/drawing/2014/main" id="{71C22CDE-D5B9-9648-F020-67B03461B10F}"/>
               </a:ext>
             </a:extLst>
           </p:cNvPr>
@@ -2960,7 +2960,7 @@
           <p:cNvPr id="7" name="スライド番号プレースホルダー 6">
             <a:extLst>
               <a:ext uri="{FF2B5EF4-FFF2-40B4-BE49-F238E27FC236}">
-                <a16:creationId xmlns:a16="http://schemas.microsoft.com/office/drawing/2014/main" id="{045F53E7-DECF-15D1-4320-E09B7FC3FEEC}"/>
+                <a16:creationId xmlns:a16="http://schemas.microsoft.com/office/drawing/2014/main" id="{5ADFB0B1-01FD-08A2-44BD-3E62C105F38B}"/>
               </a:ext>
             </a:extLst>
           </p:cNvPr>
@@ -2976,7 +2976,7 @@
           <a:bodyPr/>
           <a:lstStyle/>
           <a:p>
-            <a:fld id="{859497F0-5F34-405D-A7F3-3E7DF3B2637B}" type="slidenum">
+            <a:fld id="{79AA7089-380A-477E-86B0-D7663003EF2E}" type="slidenum">
               <a:rPr kumimoji="1" lang="ja-JP" altLang="en-US" smtClean="0"/>
               <a:t>‹#›</a:t>
             </a:fld>
@@ -2987,7 +2987,7 @@
     </p:spTree>
     <p:extLst>
       <p:ext uri="{BB962C8B-B14F-4D97-AF65-F5344CB8AC3E}">
-        <p14:creationId xmlns:p14="http://schemas.microsoft.com/office/powerpoint/2010/main" val="4173457103"/>
+        <p14:creationId xmlns:p14="http://schemas.microsoft.com/office/powerpoint/2010/main" val="3678877295"/>
       </p:ext>
     </p:extLst>
   </p:cSld>
@@ -3024,7 +3024,7 @@
           <p:cNvPr id="2" name="タイトル プレースホルダー 1">
             <a:extLst>
               <a:ext uri="{FF2B5EF4-FFF2-40B4-BE49-F238E27FC236}">
-                <a16:creationId xmlns:a16="http://schemas.microsoft.com/office/drawing/2014/main" id="{1386F6AA-A4FD-1EC7-E91C-362644880FF2}"/>
+                <a16:creationId xmlns:a16="http://schemas.microsoft.com/office/drawing/2014/main" id="{B068325B-AA9F-4B0F-413C-D812D7E75570}"/>
               </a:ext>
             </a:extLst>
           </p:cNvPr>
@@ -3062,7 +3062,7 @@
           <p:cNvPr id="3" name="テキスト プレースホルダー 2">
             <a:extLst>
               <a:ext uri="{FF2B5EF4-FFF2-40B4-BE49-F238E27FC236}">
-                <a16:creationId xmlns:a16="http://schemas.microsoft.com/office/drawing/2014/main" id="{114AE272-E84F-2061-8FB8-A1641EEEE11C}"/>
+                <a16:creationId xmlns:a16="http://schemas.microsoft.com/office/drawing/2014/main" id="{F254B1C2-DD30-A0C7-347B-AB82CEFC3A4C}"/>
               </a:ext>
             </a:extLst>
           </p:cNvPr>
@@ -3161,7 +3161,7 @@
           <p:cNvPr id="4" name="日付プレースホルダー 3">
             <a:extLst>
               <a:ext uri="{FF2B5EF4-FFF2-40B4-BE49-F238E27FC236}">
-                <a16:creationId xmlns:a16="http://schemas.microsoft.com/office/drawing/2014/main" id="{1FB167E5-E146-1CDD-C4E4-905FA839B0F0}"/>
+                <a16:creationId xmlns:a16="http://schemas.microsoft.com/office/drawing/2014/main" id="{95081D5A-673A-2380-0653-A13B89546F84}"/>
               </a:ext>
             </a:extLst>
           </p:cNvPr>
@@ -3195,7 +3195,7 @@
             </a:lvl1pPr>
           </a:lstStyle>
           <a:p>
-            <a:fld id="{70708204-28F4-47FC-A19E-27C932FDF4E9}" type="datetimeFigureOut">
+            <a:fld id="{F5B233DF-252A-4B94-878C-18039E32C17E}" type="datetimeFigureOut">
               <a:rPr kumimoji="1" lang="ja-JP" altLang="en-US" smtClean="0"/>
               <a:t>2026/7/30</a:t>
             </a:fld>
@@ -3208,7 +3208,7 @@
           <p:cNvPr id="5" name="フッター プレースホルダー 4">
             <a:extLst>
               <a:ext uri="{FF2B5EF4-FFF2-40B4-BE49-F238E27FC236}">
-                <a16:creationId xmlns:a16="http://schemas.microsoft.com/office/drawing/2014/main" id="{B13A5086-CE87-311E-53DC-563764DCD15F}"/>
+                <a16:creationId xmlns:a16="http://schemas.microsoft.com/office/drawing/2014/main" id="{AF09A8D6-8567-A29C-265B-A613E91DBF94}"/>
               </a:ext>
             </a:extLst>
           </p:cNvPr>
@@ -3251,7 +3251,7 @@
           <p:cNvPr id="6" name="スライド番号プレースホルダー 5">
             <a:extLst>
               <a:ext uri="{FF2B5EF4-FFF2-40B4-BE49-F238E27FC236}">
-                <a16:creationId xmlns:a16="http://schemas.microsoft.com/office/drawing/2014/main" id="{092695C6-BEDA-D8A9-94F0-8A6E270A799F}"/>
+                <a16:creationId xmlns:a16="http://schemas.microsoft.com/office/drawing/2014/main" id="{756C4156-69B9-231B-4110-B0FDC3E72C35}"/>
               </a:ext>
             </a:extLst>
           </p:cNvPr>
@@ -3285,7 +3285,7 @@
             </a:lvl1pPr>
           </a:lstStyle>
           <a:p>
-            <a:fld id="{859497F0-5F34-405D-A7F3-3E7DF3B2637B}" type="slidenum">
+            <a:fld id="{79AA7089-380A-477E-86B0-D7663003EF2E}" type="slidenum">
               <a:rPr kumimoji="1" lang="ja-JP" altLang="en-US" smtClean="0"/>
               <a:t>‹#›</a:t>
             </a:fld>
@@ -3296,7 +3296,7 @@
     </p:spTree>
     <p:extLst>
       <p:ext uri="{BB962C8B-B14F-4D97-AF65-F5344CB8AC3E}">
-        <p14:creationId xmlns:p14="http://schemas.microsoft.com/office/powerpoint/2010/main" val="181101170"/>
+        <p14:creationId xmlns:p14="http://schemas.microsoft.com/office/powerpoint/2010/main" val="3589371042"/>
       </p:ext>
     </p:extLst>
   </p:cSld>
@@ -3619,7 +3619,7 @@
           <p:cNvPr id="2" name="テキスト ボックス 1">
             <a:extLst>
               <a:ext uri="{FF2B5EF4-FFF2-40B4-BE49-F238E27FC236}">
-                <a16:creationId xmlns:a16="http://schemas.microsoft.com/office/drawing/2014/main" id="{9A3E7B71-EBFF-C7B0-195B-4A72B07681BA}"/>
+                <a16:creationId xmlns:a16="http://schemas.microsoft.com/office/drawing/2014/main" id="{FC6E7183-3847-43C5-BDB1-AB13397DE0FE}"/>
               </a:ext>
             </a:extLst>
           </p:cNvPr>
@@ -3665,7 +3665,7 @@
           <p:cNvPr id="3" name="テキスト ボックス 2">
             <a:extLst>
               <a:ext uri="{FF2B5EF4-FFF2-40B4-BE49-F238E27FC236}">
-                <a16:creationId xmlns:a16="http://schemas.microsoft.com/office/drawing/2014/main" id="{8BB2FA81-6DA6-800E-7D71-78F80796D75A}"/>
+                <a16:creationId xmlns:a16="http://schemas.microsoft.com/office/drawing/2014/main" id="{05554F53-67CC-89C0-6050-3CBE6A555B65}"/>
               </a:ext>
             </a:extLst>
           </p:cNvPr>
@@ -3714,7 +3714,7 @@
           <p:cNvPr id="4" name="テキスト ボックス 3">
             <a:extLst>
               <a:ext uri="{FF2B5EF4-FFF2-40B4-BE49-F238E27FC236}">
-                <a16:creationId xmlns:a16="http://schemas.microsoft.com/office/drawing/2014/main" id="{D7322EFA-5F3C-42BF-D7B7-3D4CB2C7A8E6}"/>
+                <a16:creationId xmlns:a16="http://schemas.microsoft.com/office/drawing/2014/main" id="{983BD241-8E45-DFAA-FB57-438053A3FE1F}"/>
               </a:ext>
             </a:extLst>
           </p:cNvPr>
@@ -3754,7 +3754,7 @@
           <p:cNvPr id="5" name="テキスト ボックス 4">
             <a:extLst>
               <a:ext uri="{FF2B5EF4-FFF2-40B4-BE49-F238E27FC236}">
-                <a16:creationId xmlns:a16="http://schemas.microsoft.com/office/drawing/2014/main" id="{B3AA4590-06A5-851B-1CC7-113EBCB67471}"/>
+                <a16:creationId xmlns:a16="http://schemas.microsoft.com/office/drawing/2014/main" id="{AB1B9621-9B21-2271-0B40-5E2D0CA0E3ED}"/>
               </a:ext>
             </a:extLst>
           </p:cNvPr>
@@ -3801,7 +3801,7 @@
             <a:hlinkClick r:id="" action="ppaction://media"/>
             <a:extLst>
               <a:ext uri="{FF2B5EF4-FFF2-40B4-BE49-F238E27FC236}">
-                <a16:creationId xmlns:a16="http://schemas.microsoft.com/office/drawing/2014/main" id="{08C28796-8DD6-E696-2FF8-48F4C1FACB99}"/>
+                <a16:creationId xmlns:a16="http://schemas.microsoft.com/office/drawing/2014/main" id="{92E23872-7165-2B25-2574-BDD8A7949CF4}"/>
               </a:ext>
             </a:extLst>
           </p:cNvPr>
@@ -3836,7 +3836,7 @@
     </p:spTree>
     <p:extLst>
       <p:ext uri="{BB962C8B-B14F-4D97-AF65-F5344CB8AC3E}">
-        <p14:creationId xmlns:p14="http://schemas.microsoft.com/office/powerpoint/2010/main" val="3873583293"/>
+        <p14:creationId xmlns:p14="http://schemas.microsoft.com/office/powerpoint/2010/main" val="1617524323"/>
       </p:ext>
     </p:extLst>
   </p:cSld>
@@ -3960,7 +3960,7 @@
           <p:cNvPr id="2" name="テキスト ボックス 1">
             <a:extLst>
               <a:ext uri="{FF2B5EF4-FFF2-40B4-BE49-F238E27FC236}">
-                <a16:creationId xmlns:a16="http://schemas.microsoft.com/office/drawing/2014/main" id="{22535AE3-A9CB-AB06-300E-DA4314CADBDB}"/>
+                <a16:creationId xmlns:a16="http://schemas.microsoft.com/office/drawing/2014/main" id="{8C8E7579-D893-BE1C-8799-95239292B4B7}"/>
               </a:ext>
             </a:extLst>
           </p:cNvPr>
@@ -4006,7 +4006,7 @@
           <p:cNvPr id="3" name="テキスト ボックス 2">
             <a:extLst>
               <a:ext uri="{FF2B5EF4-FFF2-40B4-BE49-F238E27FC236}">
-                <a16:creationId xmlns:a16="http://schemas.microsoft.com/office/drawing/2014/main" id="{526E0BCB-FD3F-1AD3-E68F-A07505FB1085}"/>
+                <a16:creationId xmlns:a16="http://schemas.microsoft.com/office/drawing/2014/main" id="{E8C14AD7-F483-9926-60D0-64271C975043}"/>
               </a:ext>
             </a:extLst>
           </p:cNvPr>
@@ -4046,7 +4046,7 @@
           <p:cNvPr id="4" name="テキスト ボックス 3">
             <a:extLst>
               <a:ext uri="{FF2B5EF4-FFF2-40B4-BE49-F238E27FC236}">
-                <a16:creationId xmlns:a16="http://schemas.microsoft.com/office/drawing/2014/main" id="{9D72F943-24A1-9B46-F147-F066453D215B}"/>
+                <a16:creationId xmlns:a16="http://schemas.microsoft.com/office/drawing/2014/main" id="{58A97508-12F8-4369-58EF-C315CAE3CBDF}"/>
               </a:ext>
             </a:extLst>
           </p:cNvPr>
@@ -4095,7 +4095,7 @@
           <p:cNvPr id="5" name="テキスト ボックス 4">
             <a:extLst>
               <a:ext uri="{FF2B5EF4-FFF2-40B4-BE49-F238E27FC236}">
-                <a16:creationId xmlns:a16="http://schemas.microsoft.com/office/drawing/2014/main" id="{ECBD86F2-3579-B4FF-5DAE-0EA540D42D1A}"/>
+                <a16:creationId xmlns:a16="http://schemas.microsoft.com/office/drawing/2014/main" id="{AF336E73-77F2-5B82-7BFF-7BDFB96A825F}"/>
               </a:ext>
             </a:extLst>
           </p:cNvPr>
@@ -4142,7 +4142,7 @@
             <a:hlinkClick r:id="" action="ppaction://media"/>
             <a:extLst>
               <a:ext uri="{FF2B5EF4-FFF2-40B4-BE49-F238E27FC236}">
-                <a16:creationId xmlns:a16="http://schemas.microsoft.com/office/drawing/2014/main" id="{0FAAEB2C-C091-F831-2AA1-FC807710D23E}"/>
+                <a16:creationId xmlns:a16="http://schemas.microsoft.com/office/drawing/2014/main" id="{3EF524F8-E6E5-A27A-97DD-C977B7B53AEF}"/>
               </a:ext>
             </a:extLst>
           </p:cNvPr>
@@ -4177,7 +4177,7 @@
     </p:spTree>
     <p:extLst>
       <p:ext uri="{BB962C8B-B14F-4D97-AF65-F5344CB8AC3E}">
-        <p14:creationId xmlns:p14="http://schemas.microsoft.com/office/powerpoint/2010/main" val="2588711453"/>
+        <p14:creationId xmlns:p14="http://schemas.microsoft.com/office/powerpoint/2010/main" val="3534330620"/>
       </p:ext>
     </p:extLst>
   </p:cSld>
@@ -4301,7 +4301,7 @@
           <p:cNvPr id="2" name="テキスト ボックス 1">
             <a:extLst>
               <a:ext uri="{FF2B5EF4-FFF2-40B4-BE49-F238E27FC236}">
-                <a16:creationId xmlns:a16="http://schemas.microsoft.com/office/drawing/2014/main" id="{5A9B1C66-FCC5-09F4-35D8-8404883ADF25}"/>
+                <a16:creationId xmlns:a16="http://schemas.microsoft.com/office/drawing/2014/main" id="{C74FDA05-3D27-1588-9088-81FE6E56583F}"/>
               </a:ext>
             </a:extLst>
           </p:cNvPr>
@@ -4347,7 +4347,7 @@
           <p:cNvPr id="3" name="テキスト ボックス 2">
             <a:extLst>
               <a:ext uri="{FF2B5EF4-FFF2-40B4-BE49-F238E27FC236}">
-                <a16:creationId xmlns:a16="http://schemas.microsoft.com/office/drawing/2014/main" id="{0A29874B-24AF-D262-E96D-4F9FE0E26CD0}"/>
+                <a16:creationId xmlns:a16="http://schemas.microsoft.com/office/drawing/2014/main" id="{651A356E-8767-4702-8D1D-D165AA50C515}"/>
               </a:ext>
             </a:extLst>
           </p:cNvPr>
@@ -4387,7 +4387,7 @@
           <p:cNvPr id="4" name="テキスト ボックス 3">
             <a:extLst>
               <a:ext uri="{FF2B5EF4-FFF2-40B4-BE49-F238E27FC236}">
-                <a16:creationId xmlns:a16="http://schemas.microsoft.com/office/drawing/2014/main" id="{7A9E9F6B-6E6E-E92F-C962-7DFBE0655AE9}"/>
+                <a16:creationId xmlns:a16="http://schemas.microsoft.com/office/drawing/2014/main" id="{060F1519-21C0-6BD1-3A0C-A01CFA9A01E9}"/>
               </a:ext>
             </a:extLst>
           </p:cNvPr>
@@ -4482,7 +4482,7 @@
           <p:cNvPr id="5" name="テキスト ボックス 4">
             <a:extLst>
               <a:ext uri="{FF2B5EF4-FFF2-40B4-BE49-F238E27FC236}">
-                <a16:creationId xmlns:a16="http://schemas.microsoft.com/office/drawing/2014/main" id="{6B463191-8DAB-453F-B498-5AFF0DA87AB5}"/>
+                <a16:creationId xmlns:a16="http://schemas.microsoft.com/office/drawing/2014/main" id="{B6C5B979-E296-B3BA-F815-CA0388613CE9}"/>
               </a:ext>
             </a:extLst>
           </p:cNvPr>
@@ -4529,7 +4529,7 @@
             <a:hlinkClick r:id="" action="ppaction://media"/>
             <a:extLst>
               <a:ext uri="{FF2B5EF4-FFF2-40B4-BE49-F238E27FC236}">
-                <a16:creationId xmlns:a16="http://schemas.microsoft.com/office/drawing/2014/main" id="{599DBE19-A770-B968-374B-F1421DF68CC7}"/>
+                <a16:creationId xmlns:a16="http://schemas.microsoft.com/office/drawing/2014/main" id="{2FC0C92C-1E6A-DDF7-593E-90540B2B5BA5}"/>
               </a:ext>
             </a:extLst>
           </p:cNvPr>
@@ -4564,7 +4564,7 @@
     </p:spTree>
     <p:extLst>
       <p:ext uri="{BB962C8B-B14F-4D97-AF65-F5344CB8AC3E}">
-        <p14:creationId xmlns:p14="http://schemas.microsoft.com/office/powerpoint/2010/main" val="518633560"/>
+        <p14:creationId xmlns:p14="http://schemas.microsoft.com/office/powerpoint/2010/main" val="1395018820"/>
       </p:ext>
     </p:extLst>
   </p:cSld>
@@ -4688,7 +4688,7 @@
           <p:cNvPr id="2" name="テキスト ボックス 1">
             <a:extLst>
               <a:ext uri="{FF2B5EF4-FFF2-40B4-BE49-F238E27FC236}">
-                <a16:creationId xmlns:a16="http://schemas.microsoft.com/office/drawing/2014/main" id="{8E8350B5-4132-38AA-E3C0-A20EDDAA3838}"/>
+                <a16:creationId xmlns:a16="http://schemas.microsoft.com/office/drawing/2014/main" id="{C1D094FE-96D5-2411-7396-868513568CD7}"/>
               </a:ext>
             </a:extLst>
           </p:cNvPr>
@@ -4734,7 +4734,7 @@
           <p:cNvPr id="3" name="テキスト ボックス 2">
             <a:extLst>
               <a:ext uri="{FF2B5EF4-FFF2-40B4-BE49-F238E27FC236}">
-                <a16:creationId xmlns:a16="http://schemas.microsoft.com/office/drawing/2014/main" id="{3CEE7307-CC56-C966-FF69-911FA9564EE0}"/>
+                <a16:creationId xmlns:a16="http://schemas.microsoft.com/office/drawing/2014/main" id="{5C37A666-E64B-A720-7833-BBD18F9BB3F3}"/>
               </a:ext>
             </a:extLst>
           </p:cNvPr>
@@ -4774,7 +4774,7 @@
           <p:cNvPr id="4" name="テキスト ボックス 3">
             <a:extLst>
               <a:ext uri="{FF2B5EF4-FFF2-40B4-BE49-F238E27FC236}">
-                <a16:creationId xmlns:a16="http://schemas.microsoft.com/office/drawing/2014/main" id="{E3E8A0DD-B77F-A1A2-8CB8-29017C560B4A}"/>
+                <a16:creationId xmlns:a16="http://schemas.microsoft.com/office/drawing/2014/main" id="{52757605-71E2-0BE4-D6FC-E7899DBBC715}"/>
               </a:ext>
             </a:extLst>
           </p:cNvPr>
@@ -4884,7 +4884,7 @@
           <p:cNvPr id="5" name="テキスト ボックス 4">
             <a:extLst>
               <a:ext uri="{FF2B5EF4-FFF2-40B4-BE49-F238E27FC236}">
-                <a16:creationId xmlns:a16="http://schemas.microsoft.com/office/drawing/2014/main" id="{D5BDDA7B-1BF8-CED1-0CC6-E8128D4C712F}"/>
+                <a16:creationId xmlns:a16="http://schemas.microsoft.com/office/drawing/2014/main" id="{F47E8EF0-FE8F-FA24-754C-BCF251B51AA3}"/>
               </a:ext>
             </a:extLst>
           </p:cNvPr>
@@ -4931,7 +4931,7 @@
             <a:hlinkClick r:id="" action="ppaction://media"/>
             <a:extLst>
               <a:ext uri="{FF2B5EF4-FFF2-40B4-BE49-F238E27FC236}">
-                <a16:creationId xmlns:a16="http://schemas.microsoft.com/office/drawing/2014/main" id="{3A46D2F5-5C75-5598-CD0F-D757D882E551}"/>
+                <a16:creationId xmlns:a16="http://schemas.microsoft.com/office/drawing/2014/main" id="{3FEED9FC-812F-7401-C299-D70AD57BECD2}"/>
               </a:ext>
             </a:extLst>
           </p:cNvPr>
@@ -4966,7 +4966,7 @@
     </p:spTree>
     <p:extLst>
       <p:ext uri="{BB962C8B-B14F-4D97-AF65-F5344CB8AC3E}">
-        <p14:creationId xmlns:p14="http://schemas.microsoft.com/office/powerpoint/2010/main" val="1116846873"/>
+        <p14:creationId xmlns:p14="http://schemas.microsoft.com/office/powerpoint/2010/main" val="756992665"/>
       </p:ext>
     </p:extLst>
   </p:cSld>
@@ -5090,7 +5090,7 @@
           <p:cNvPr id="2" name="テキスト ボックス 1">
             <a:extLst>
               <a:ext uri="{FF2B5EF4-FFF2-40B4-BE49-F238E27FC236}">
-                <a16:creationId xmlns:a16="http://schemas.microsoft.com/office/drawing/2014/main" id="{3D211C7E-3F21-D923-A315-D22DFC00CFDF}"/>
+                <a16:creationId xmlns:a16="http://schemas.microsoft.com/office/drawing/2014/main" id="{CDBCE484-4A32-46EF-701D-2DAF9F9C9D5A}"/>
               </a:ext>
             </a:extLst>
           </p:cNvPr>
@@ -5136,7 +5136,7 @@
           <p:cNvPr id="3" name="テキスト ボックス 2">
             <a:extLst>
               <a:ext uri="{FF2B5EF4-FFF2-40B4-BE49-F238E27FC236}">
-                <a16:creationId xmlns:a16="http://schemas.microsoft.com/office/drawing/2014/main" id="{50C70C5C-CEF7-E08B-0228-97041E9184AB}"/>
+                <a16:creationId xmlns:a16="http://schemas.microsoft.com/office/drawing/2014/main" id="{49128242-9C82-6600-72E0-DE79C104280F}"/>
               </a:ext>
             </a:extLst>
           </p:cNvPr>
@@ -5176,7 +5176,7 @@
           <p:cNvPr id="4" name="テキスト ボックス 3">
             <a:extLst>
               <a:ext uri="{FF2B5EF4-FFF2-40B4-BE49-F238E27FC236}">
-                <a16:creationId xmlns:a16="http://schemas.microsoft.com/office/drawing/2014/main" id="{66FA5F7A-AD1A-6D1A-B35F-83900100AB99}"/>
+                <a16:creationId xmlns:a16="http://schemas.microsoft.com/office/drawing/2014/main" id="{A3E7E1DC-09E3-48F3-6D03-7AF5B33ED3A3}"/>
               </a:ext>
             </a:extLst>
           </p:cNvPr>
@@ -5200,20 +5200,14 @@
           <a:lstStyle/>
           <a:p>
             <a:r>
-              <a:rPr kumimoji="1" lang="en-US" altLang="ja-JP" sz="2000">
+              <a:rPr kumimoji="1" lang="ja-JP" altLang="en-US" sz="2000">
                 <a:solidFill>
                   <a:srgbClr val="333333"/>
                 </a:solidFill>
                 <a:latin typeface="Arial" panose="020B0604020202020204" pitchFamily="34" charset="0"/>
               </a:rPr>
-              <a:t>Scaffold togo-kanri-tool: cross-site GSC dashboard with rule-based suggestions</a:t>
-            </a:r>
-            <a:endParaRPr kumimoji="1" lang="ja-JP" altLang="en-US" sz="2000">
-              <a:solidFill>
-                <a:srgbClr val="333333"/>
-              </a:solidFill>
-              <a:latin typeface="Arial" panose="020B0604020202020204" pitchFamily="34" charset="0"/>
-            </a:endParaRPr>
+              <a:t>直近のコミットでは、プロジェクトの初期構成と開発基盤が整備されました。</a:t>
+            </a:r>
           </a:p>
         </p:txBody>
       </p:sp>
@@ -5222,7 +5216,7 @@
           <p:cNvPr id="5" name="テキスト ボックス 4">
             <a:extLst>
               <a:ext uri="{FF2B5EF4-FFF2-40B4-BE49-F238E27FC236}">
-                <a16:creationId xmlns:a16="http://schemas.microsoft.com/office/drawing/2014/main" id="{5EC1E2F3-A8A5-F9B7-5414-FED0F6AB5934}"/>
+                <a16:creationId xmlns:a16="http://schemas.microsoft.com/office/drawing/2014/main" id="{BDEBD9C6-B91A-B935-A735-626EE6BC18EA}"/>
               </a:ext>
             </a:extLst>
           </p:cNvPr>
@@ -5269,7 +5263,7 @@
             <a:hlinkClick r:id="" action="ppaction://media"/>
             <a:extLst>
               <a:ext uri="{FF2B5EF4-FFF2-40B4-BE49-F238E27FC236}">
-                <a16:creationId xmlns:a16="http://schemas.microsoft.com/office/drawing/2014/main" id="{CAF86386-4E33-DEFE-84D0-34748033DB79}"/>
+                <a16:creationId xmlns:a16="http://schemas.microsoft.com/office/drawing/2014/main" id="{64412BB5-DD34-7D15-9180-751F01DD6B47}"/>
               </a:ext>
             </a:extLst>
           </p:cNvPr>
@@ -5304,7 +5298,7 @@
     </p:spTree>
     <p:extLst>
       <p:ext uri="{BB962C8B-B14F-4D97-AF65-F5344CB8AC3E}">
-        <p14:creationId xmlns:p14="http://schemas.microsoft.com/office/powerpoint/2010/main" val="3123807633"/>
+        <p14:creationId xmlns:p14="http://schemas.microsoft.com/office/powerpoint/2010/main" val="1952176517"/>
       </p:ext>
     </p:extLst>
   </p:cSld>
@@ -5313,10 +5307,10 @@
   </p:clrMapOvr>
   <mc:AlternateContent xmlns:mc="http://schemas.openxmlformats.org/markup-compatibility/2006">
     <mc:Choice xmlns:p14="http://schemas.microsoft.com/office/powerpoint/2010/main" Requires="p14">
-      <p:transition spd="slow" p14:dur="2000" advTm="11000"/>
+      <p:transition spd="slow" p14:dur="2000" advTm="7000"/>
     </mc:Choice>
     <mc:Fallback>
-      <p:transition spd="slow" advTm="11000"/>
+      <p:transition spd="slow" advTm="7000"/>
     </mc:Fallback>
   </mc:AlternateContent>
   <p:timing>
@@ -5347,7 +5341,7 @@
                                   <p:childTnLst>
                                     <p:cmd type="call" cmd="playFrom(0.0)">
                                       <p:cBhvr>
-                                        <p:cTn id="6" dur="10499" fill="hold"/>
+                                        <p:cTn id="6" dur="6126" fill="hold"/>
                                         <p:tgtEl>
                                           <p:spTgt spid="6"/>
                                         </p:tgtEl>
@@ -5428,7 +5422,7 @@
           <p:cNvPr id="2" name="テキスト ボックス 1">
             <a:extLst>
               <a:ext uri="{FF2B5EF4-FFF2-40B4-BE49-F238E27FC236}">
-                <a16:creationId xmlns:a16="http://schemas.microsoft.com/office/drawing/2014/main" id="{698D7920-E716-0A6C-9434-9A171756A6FB}"/>
+                <a16:creationId xmlns:a16="http://schemas.microsoft.com/office/drawing/2014/main" id="{F8E850EB-E899-0BBB-18CE-D5B60F6C9B24}"/>
               </a:ext>
             </a:extLst>
           </p:cNvPr>
@@ -5474,7 +5468,7 @@
           <p:cNvPr id="3" name="テキスト ボックス 2">
             <a:extLst>
               <a:ext uri="{FF2B5EF4-FFF2-40B4-BE49-F238E27FC236}">
-                <a16:creationId xmlns:a16="http://schemas.microsoft.com/office/drawing/2014/main" id="{9A6DA4C4-CC99-AB1F-D761-2F0B3B3BE48E}"/>
+                <a16:creationId xmlns:a16="http://schemas.microsoft.com/office/drawing/2014/main" id="{DB888BF0-89B7-DC4C-107D-9505DB831684}"/>
               </a:ext>
             </a:extLst>
           </p:cNvPr>
@@ -5514,7 +5508,7 @@
           <p:cNvPr id="4" name="テキスト ボックス 3">
             <a:extLst>
               <a:ext uri="{FF2B5EF4-FFF2-40B4-BE49-F238E27FC236}">
-                <a16:creationId xmlns:a16="http://schemas.microsoft.com/office/drawing/2014/main" id="{A898EFA3-5E1A-E80B-B8B9-660B338E1265}"/>
+                <a16:creationId xmlns:a16="http://schemas.microsoft.com/office/drawing/2014/main" id="{77E1D384-26E6-4E9A-FC97-4AB86AC3155F}"/>
               </a:ext>
             </a:extLst>
           </p:cNvPr>
@@ -5579,7 +5573,7 @@
           <p:cNvPr id="5" name="テキスト ボックス 4">
             <a:extLst>
               <a:ext uri="{FF2B5EF4-FFF2-40B4-BE49-F238E27FC236}">
-                <a16:creationId xmlns:a16="http://schemas.microsoft.com/office/drawing/2014/main" id="{B57FB804-8346-7CA3-1E9E-066632C60B54}"/>
+                <a16:creationId xmlns:a16="http://schemas.microsoft.com/office/drawing/2014/main" id="{4588C06C-C78A-0E93-ADDF-0FCDD14E3687}"/>
               </a:ext>
             </a:extLst>
           </p:cNvPr>
@@ -5626,7 +5620,7 @@
             <a:hlinkClick r:id="" action="ppaction://media"/>
             <a:extLst>
               <a:ext uri="{FF2B5EF4-FFF2-40B4-BE49-F238E27FC236}">
-                <a16:creationId xmlns:a16="http://schemas.microsoft.com/office/drawing/2014/main" id="{685E5531-2CE4-8A25-1735-0B526E3AE624}"/>
+                <a16:creationId xmlns:a16="http://schemas.microsoft.com/office/drawing/2014/main" id="{58774C1E-98D7-F811-5FA4-8755669C3F43}"/>
               </a:ext>
             </a:extLst>
           </p:cNvPr>
@@ -5661,7 +5655,7 @@
     </p:spTree>
     <p:extLst>
       <p:ext uri="{BB962C8B-B14F-4D97-AF65-F5344CB8AC3E}">
-        <p14:creationId xmlns:p14="http://schemas.microsoft.com/office/powerpoint/2010/main" val="522847924"/>
+        <p14:creationId xmlns:p14="http://schemas.microsoft.com/office/powerpoint/2010/main" val="1239689421"/>
       </p:ext>
     </p:extLst>
   </p:cSld>
